--- a/lecons/F3/33_FORM4_LESSON29_Man_in_Hot_Desert.pptx
+++ b/lecons/F3/33_FORM4_LESSON29_Man_in_Hot_Desert.pptx
@@ -51,9 +51,18 @@
     <p:sldId id="299" r:id="rId45"/>
     <p:sldId id="300" r:id="rId46"/>
     <p:sldId id="301" r:id="rId47"/>
+    <p:sldId id="302" r:id="rId48"/>
+    <p:sldId id="303" r:id="rId49"/>
+    <p:sldId id="304" r:id="rId50"/>
+    <p:sldId id="305" r:id="rId51"/>
+    <p:sldId id="306" r:id="rId52"/>
+    <p:sldId id="307" r:id="rId53"/>
+    <p:sldId id="308" r:id="rId54"/>
+    <p:sldId id="309" r:id="rId55"/>
+    <p:sldId id="310" r:id="rId56"/>
   </p:sldIdLst>
   <p:notesMasterIdLst>
-    <p:notesMasterId r:id="rId48"/>
+    <p:notesMasterId r:id="rId57"/>
   </p:notesMasterIdLst>
   <p:sldSz cx="12192000" cy="6858000"/>
   <p:notesSz cx="6858000" cy="12192000"/>
@@ -635,7 +644,7 @@
           <a:p>
             <a:r>
               <a:rPr lang="en-US" dirty="0"/>
-              <a:t>Listen carefully to this situation from real life. In March, the well of the Bouba family dries up. Mrs Bouba walks for more than an hour every morning to get water, and the goats are thin. Think about it, because I am going to ask you some questions.</a:t>
+              <a:t>Take your time to copy this part; we will continue together.</a:t>
             </a:r>
             <a:endParaRPr lang="en-US" dirty="0"/>
           </a:p>
@@ -723,7 +732,7 @@
           <a:p>
             <a:r>
               <a:rPr lang="en-US" dirty="0"/>
-              <a:t>Question 1: What is the problem in the situation? Think for a moment, then raise your hand to answer.</a:t>
+              <a:t>Listen carefully to this situation from real life. In March, the well of the Bouba family dries up. Mrs Bouba walks for more than an hour every morning to get water, and the goats are thin. Yet in the Sahara, people live in oases and even produce oil and solar electricity. Her son asks: "How can people live, and even become rich, in such dry places?" Think about it, because I am going to ask you some questions.</a:t>
             </a:r>
             <a:endParaRPr lang="en-US" dirty="0"/>
           </a:p>
@@ -811,7 +820,7 @@
           <a:p>
             <a:r>
               <a:rPr lang="en-US" dirty="0"/>
-              <a:t>Good. The family has no water near the house.</a:t>
+              <a:t>Question 1: What is the problem in the situation? Think for a moment, then raise your hand to answer.</a:t>
             </a:r>
             <a:endParaRPr lang="en-US" dirty="0"/>
           </a:p>
@@ -899,7 +908,7 @@
           <a:p>
             <a:r>
               <a:rPr lang="en-US" dirty="0"/>
-              <a:t>Question 2: Who suffers? Think for a moment, then raise your hand to answer.</a:t>
+              <a:t>Good. The son does not understand how people can live and find resources in hot deserts.</a:t>
             </a:r>
             <a:endParaRPr lang="en-US" dirty="0"/>
           </a:p>
@@ -987,7 +996,7 @@
           <a:p>
             <a:r>
               <a:rPr lang="en-US" dirty="0"/>
-              <a:t>Good. Mrs Bouba and the animals.</a:t>
+              <a:t>Question 2: What is the main difficulty of the Bouba family? Think for a moment, then raise your hand to answer.</a:t>
             </a:r>
             <a:endParaRPr lang="en-US" dirty="0"/>
           </a:p>
@@ -1075,7 +1084,7 @@
           <a:p>
             <a:r>
               <a:rPr lang="en-US" dirty="0"/>
-              <a:t>Question 3: What can the village do? Think for a moment, then raise your hand to answer.</a:t>
+              <a:t>Good. The lack of water.</a:t>
             </a:r>
             <a:endParaRPr lang="en-US" dirty="0"/>
           </a:p>
@@ -1163,7 +1172,7 @@
           <a:p>
             <a:r>
               <a:rPr lang="en-US" dirty="0"/>
-              <a:t>Good. Dig a deeper well or collect rain water.</a:t>
+              <a:t>Question 3: Name one resource of the Sahara. Think for a moment, then raise your hand to answer.</a:t>
             </a:r>
             <a:endParaRPr lang="en-US" dirty="0"/>
           </a:p>
@@ -1251,7 +1260,7 @@
           <a:p>
             <a:r>
               <a:rPr lang="en-US" dirty="0"/>
-              <a:t>From this situation, the action we are working towards in this lesson is the following: save water and plant trees to fight desertification.</a:t>
+              <a:t>Good. Oil (or sunshine for solar electricity).</a:t>
             </a:r>
             <a:endParaRPr lang="en-US" dirty="0"/>
           </a:p>
@@ -1339,7 +1348,7 @@
           <a:p>
             <a:r>
               <a:rPr lang="en-US" dirty="0"/>
-              <a:t>Why is this lesson important for you? This lesson helps us to know how people live in hot deserts.</a:t>
+              <a:t>From this situation, the action we are working towards in this lesson is the following: save water and plant trees to fight desertification.</a:t>
             </a:r>
             <a:endParaRPr lang="en-US" dirty="0"/>
           </a:p>
@@ -1427,7 +1436,7 @@
           <a:p>
             <a:r>
               <a:rPr lang="en-US" dirty="0"/>
-              <a:t>Activity 1. Look carefully at this picture: a big solar power station in Morocco. Observe every detail before I ask the question.</a:t>
+              <a:t>Why is this lesson important for you? This lesson helps us to know how people live in hot deserts.</a:t>
             </a:r>
             <a:endParaRPr lang="en-US" dirty="0"/>
           </a:p>
@@ -1603,7 +1612,7 @@
           <a:p>
             <a:r>
               <a:rPr lang="en-US" dirty="0"/>
-              <a:t>Here is the question for Activity 1: Why is the desert a good place for solar power? Take one minute to think and write your answer in your rough notebook.</a:t>
+              <a:t>Activity 1. Look carefully at this picture: solar panels in a sunny area. Observe every detail before I ask the question.</a:t>
             </a:r>
             <a:endParaRPr lang="en-US" dirty="0"/>
           </a:p>
@@ -1691,7 +1700,7 @@
           <a:p>
             <a:r>
               <a:rPr lang="en-US" dirty="0"/>
-              <a:t>Let us check the answer together. The sun shines strongly almost every day.</a:t>
+              <a:t>Here is the question for Activity 1: Why is the desert a good place for solar power? Take one minute to think and write your answer in your rough notebook.</a:t>
             </a:r>
             <a:endParaRPr lang="en-US" dirty="0"/>
           </a:p>
@@ -1779,7 +1788,7 @@
           <a:p>
             <a:r>
               <a:rPr lang="en-US" dirty="0"/>
-              <a:t>Activity 2. Look carefully at this picture: women carry water in the Sahel. Observe every detail before I ask the question.</a:t>
+              <a:t>Let us check the answer together. The Sun shines strongly almost every day.</a:t>
             </a:r>
             <a:endParaRPr lang="en-US" dirty="0"/>
           </a:p>
@@ -1867,7 +1876,7 @@
           <a:p>
             <a:r>
               <a:rPr lang="en-US" dirty="0"/>
-              <a:t>Here is the question for Activity 2: What is the biggest problem of people in dry areas? Take one minute to think and write your answer in your rough notebook.</a:t>
+              <a:t>Activity 2. Look carefully at this picture: women fetch water. Observe every detail before I ask the question.</a:t>
             </a:r>
             <a:endParaRPr lang="en-US" dirty="0"/>
           </a:p>
@@ -1955,7 +1964,7 @@
           <a:p>
             <a:r>
               <a:rPr lang="en-US" dirty="0"/>
-              <a:t>Let us check the answer together. The lack of water.</a:t>
+              <a:t>Here is the question for Activity 2: What is the biggest problem of people in dry areas? Take one minute to think and write your answer in your rough notebook.</a:t>
             </a:r>
             <a:endParaRPr lang="en-US" dirty="0"/>
           </a:p>
@@ -2043,7 +2052,7 @@
           <a:p>
             <a:r>
               <a:rPr lang="en-US" dirty="0"/>
-              <a:t>Activity 3. Look carefully at this picture: young trees planted in rows. Observe every detail before I ask the question.</a:t>
+              <a:t>Let us check the answer together. The lack of water.</a:t>
             </a:r>
             <a:endParaRPr lang="en-US" dirty="0"/>
           </a:p>
@@ -2131,7 +2140,7 @@
           <a:p>
             <a:r>
               <a:rPr lang="en-US" dirty="0"/>
-              <a:t>Here is the question for Activity 3: How does planting trees help against the desert? Take one minute to think and write your answer in your rough notebook.</a:t>
+              <a:t>Activity 3. Look carefully at this picture: tuareg people in the Sahara. Observe every detail before I ask the question.</a:t>
             </a:r>
             <a:endParaRPr lang="en-US" dirty="0"/>
           </a:p>
@@ -2219,7 +2228,7 @@
           <a:p>
             <a:r>
               <a:rPr lang="en-US" dirty="0"/>
-              <a:t>Let us check the answer together. Trees hold the soil and stop the desert from spreading.</a:t>
+              <a:t>Here is the question for Activity 3: Why do these people wear long, loose clothes and cover their heads? Take one minute to think and write your answer in your rough notebook.</a:t>
             </a:r>
             <a:endParaRPr lang="en-US" dirty="0"/>
           </a:p>
@@ -2307,7 +2316,7 @@
           <a:p>
             <a:r>
               <a:rPr lang="en-US" dirty="0"/>
-              <a:t>Now we are going to copy the board summary. Write the title and the headings neatly in your notebooks. I will give you enough time for each slide, so do not rush.</a:t>
+              <a:t>Let us check the answer together. To protect themselves from the Sun, the heat and the sand.</a:t>
             </a:r>
             <a:endParaRPr lang="en-US" dirty="0"/>
           </a:p>
@@ -2395,7 +2404,7 @@
           <a:p>
             <a:r>
               <a:rPr lang="en-US" dirty="0"/>
-              <a:t>Let us copy Resources of Hot Deserts. Hot deserts have the following resources. On this slide we have Minerals and Solar energy. Write each point on a new line, with the key term first, and explain it in your own words when we revise. When you finish, we go to the next slide.</a:t>
+              <a:t>Now we are going to copy the board summary. Write the title and the headings neatly in your notebooks. I will give you enough time for each slide, so do not rush.</a:t>
             </a:r>
             <a:endParaRPr lang="en-US" dirty="0"/>
           </a:p>
@@ -2571,7 +2580,7 @@
           <a:p>
             <a:r>
               <a:rPr lang="en-US" dirty="0"/>
-              <a:t>We continue with Resources of Hot Deserts. On this slide we have Water and Tourism. Write each point on a new line, with the key term first, and explain it in your own words when we revise.</a:t>
+              <a:t>Let us copy the definitions. The key terms of this lesson are defined as follows. On this slide we have Resource and Hazard. Write each point on a new line, with the key term first, and explain it in your own words when we revise. When you finish, we go to the next slide.</a:t>
             </a:r>
             <a:endParaRPr lang="en-US" dirty="0"/>
           </a:p>
@@ -2659,7 +2668,7 @@
           <a:p>
             <a:r>
               <a:rPr lang="en-US" dirty="0"/>
-              <a:t>Let us copy Challenges of Hot Deserts. People in hot deserts face the following challenges. On this slide we have Extreme temperatures and Lack of water. Write each point on a new line, with the key term first, and explain it in your own words when we revise. When you finish, we go to the next slide.</a:t>
+              <a:t>We continue with the definitions. On this slide we have Adaptation. Write each point on a new line, with the key term first, and explain it in your own words when we revise.</a:t>
             </a:r>
             <a:endParaRPr lang="en-US" dirty="0"/>
           </a:p>
@@ -2747,7 +2756,7 @@
           <a:p>
             <a:r>
               <a:rPr lang="en-US" dirty="0"/>
-              <a:t>We continue with Challenges of Hot Deserts. On this slide we have Sandstorms and Desertification. Write each point on a new line, with the key term first, and explain it in your own words when we revise.</a:t>
+              <a:t>Let us copy Resources of Hot Deserts. Hot deserts have the following resources. On this slide we have Minerals. Write each point on a new line, with the key term first, and explain it in your own words when we revise.</a:t>
             </a:r>
             <a:endParaRPr lang="en-US" dirty="0"/>
           </a:p>
@@ -2835,7 +2844,7 @@
           <a:p>
             <a:r>
               <a:rPr lang="en-US" dirty="0"/>
-              <a:t>Let us copy Human Adaptations. People adapt to hot deserts in the following ways. On this slide we have Nomadism and Clothes and houses. Write each point on a new line, with the key term first, and explain it in your own words when we revise. When you finish, we go to the next slide.</a:t>
+              <a:t>Copy the point on Solar energy on the left, then draw the diagram on the right: solar panels. Give it a title and label it clearly.</a:t>
             </a:r>
             <a:endParaRPr lang="en-US" dirty="0"/>
           </a:p>
@@ -2923,7 +2932,7 @@
           <a:p>
             <a:r>
               <a:rPr lang="en-US" dirty="0"/>
-              <a:t>We continue with Human Adaptations. On this slide we have Irrigation and Tree planting. Write each point on a new line, with the key term first, and explain it in your own words when we revise.</a:t>
+              <a:t>Copy the point on Water on the left, then draw the diagram on the right: an oasis. Give it a title and label it clearly.</a:t>
             </a:r>
             <a:endParaRPr lang="en-US" dirty="0"/>
           </a:p>
@@ -3011,7 +3020,7 @@
           <a:p>
             <a:r>
               <a:rPr lang="en-US" dirty="0"/>
-              <a:t>Now let us check what you have understood. Question 1: Give two resources of hot deserts. Answer in your exercise book.</a:t>
+              <a:t>We continue with Resources of Hot Deserts. On this slide we have Pasture and Tourism. Write each point on a new line, with the key term first, and explain it in your own words when we revise.</a:t>
             </a:r>
             <a:endParaRPr lang="en-US" dirty="0"/>
           </a:p>
@@ -3099,7 +3108,7 @@
           <a:p>
             <a:r>
               <a:rPr lang="en-US" dirty="0"/>
-              <a:t>The expected answer is: oil and solar energy. If you got it right, well done.</a:t>
+              <a:t>Let us copy Challenges of Hot Deserts. People in hot deserts face the following challenges. Copy the point on Extreme temperatures on the left, then draw the diagram on the right: cold desert nights. Give it a title and label it clearly.</a:t>
             </a:r>
             <a:endParaRPr lang="en-US" dirty="0"/>
           </a:p>
@@ -3187,7 +3196,7 @@
           <a:p>
             <a:r>
               <a:rPr lang="en-US" dirty="0"/>
-              <a:t>Now let us check what you have understood. Question 2: How can we fight desertification? Answer in your exercise book.</a:t>
+              <a:t>Copy the point on Lack of water on the left, then draw the diagram on the right: fetching water. Give it a title and label it clearly.</a:t>
             </a:r>
             <a:endParaRPr lang="en-US" dirty="0"/>
           </a:p>
@@ -3275,7 +3284,7 @@
           <a:p>
             <a:r>
               <a:rPr lang="en-US" dirty="0"/>
-              <a:t>The expected answer is: plant trees (Great Green Wall). If you got it right, well done.</a:t>
+              <a:t>Copy the point on Sandstorms on the left, then draw the diagram on the right: a sandstorm. Give it a title and label it clearly.</a:t>
             </a:r>
             <a:endParaRPr lang="en-US" dirty="0"/>
           </a:p>
@@ -3363,7 +3372,7 @@
           <a:p>
             <a:r>
               <a:rPr lang="en-US" dirty="0"/>
-              <a:t>For those who need more practice, fill in the blanks in your exercise book. The answers are: number 1, desertification; number 2, sun; number 3, nomads.</a:t>
+              <a:t>We continue with Challenges of Hot Deserts. On this slide we have Flash floods and Desertification. Write each point on a new line, with the key term first, and explain it in your own words when we revise.</a:t>
             </a:r>
             <a:endParaRPr lang="en-US" dirty="0"/>
           </a:p>
@@ -3539,7 +3548,7 @@
           <a:p>
             <a:r>
               <a:rPr lang="en-US" dirty="0"/>
-              <a:t>For your homework: Make a table with three columns: resources, hazards and adaptations. Fill it with examples from the hot deserts and from the dry season in Garoua. We shall correct it at the beginning of our next lesson.</a:t>
+              <a:t>Let us copy Human Adaptations. People adapt to hot deserts in the following ways. Copy the point on Nomadism on the left, then draw the diagram on the right: tuareg people. Give it a title and label it clearly.</a:t>
             </a:r>
             <a:endParaRPr lang="en-US" dirty="0"/>
           </a:p>
@@ -3627,7 +3636,7 @@
           <a:p>
             <a:r>
               <a:rPr lang="en-US" dirty="0"/>
-              <a:t>Our next lesson will be on Lesson 30: The Atmosphere. Thank you for your attention, and see you next time.</a:t>
+              <a:t>We continue with Human Adaptations. On this slide we have Clothes and Houses. Write each point on a new line, with the key term first, and explain it in your own words when we revise. When you finish, we go to the next slide.</a:t>
             </a:r>
             <a:endParaRPr lang="en-US" dirty="0"/>
           </a:p>
@@ -3715,7 +3724,7 @@
           <a:p>
             <a:r>
               <a:rPr lang="en-US" dirty="0"/>
-              <a:t>Let us play the bilingual game. I say a word in English, and you give me the French word. Then we do the reverse.</a:t>
+              <a:t>We continue with Human Adaptations. On this slide we have Water management and Tree planting. Write each point on a new line, with the key term first, and explain it in your own words when we revise.</a:t>
             </a:r>
             <a:endParaRPr lang="en-US" dirty="0"/>
           </a:p>
@@ -3803,7 +3812,7 @@
           <a:p>
             <a:r>
               <a:rPr lang="en-US" dirty="0"/>
-              <a:t>I record this information in the official logbook of the class after the lesson.</a:t>
+              <a:t>Now let us check what you have understood. Question 1: Give two resources of hot deserts. Answer in your exercise book.</a:t>
             </a:r>
             <a:endParaRPr lang="en-US" dirty="0"/>
           </a:p>
@@ -3891,7 +3900,7 @@
           <a:p>
             <a:r>
               <a:rPr lang="en-US" dirty="0"/>
-              <a:t>I complete the second page of the logbook: the matter taught, the evaluation, the homework and the attendance.</a:t>
+              <a:t>The expected answer is: oil and solar energy. If you got it right, well done.</a:t>
             </a:r>
             <a:endParaRPr lang="en-US" dirty="0"/>
           </a:p>
@@ -3979,7 +3988,7 @@
           <a:p>
             <a:r>
               <a:rPr lang="en-US" dirty="0"/>
-              <a:t>This slide is for me, the teacher: it gives the timing of the lesson and what to do if the projector is not available.</a:t>
+              <a:t>Now let us check what you have understood. Question 2: How can we fight desertification? Answer in your exercise book.</a:t>
             </a:r>
             <a:endParaRPr lang="en-US" dirty="0"/>
           </a:p>
@@ -4067,7 +4076,7 @@
           <a:p>
             <a:r>
               <a:rPr lang="en-US" dirty="0"/>
-              <a:t>These are the references and picture credits used to prepare this lesson.</a:t>
+              <a:t>The expected answer is: plant trees (Great Green Wall). If you got it right, well done.</a:t>
             </a:r>
             <a:endParaRPr lang="en-US" dirty="0"/>
           </a:p>
@@ -4091,6 +4100,270 @@
             <a:fld id="{F7021451-1387-4CA6-816F-3879F97B5CBC}" type="slidenum">
               <a:rPr lang="en-US"/>
               <a:t>46</a:t>
+            </a:fld>
+            <a:endParaRPr lang="en-US"/>
+          </a:p>
+        </p:txBody>
+      </p:sp>
+    </p:spTree>
+    <p:extLst>
+      <p:ext uri="{BB962C8B-B14F-4D97-AF65-F5344CB8AC3E}">
+        <p14:creationId xmlns:p14="http://schemas.microsoft.com/office/powerpoint/2010/main" val="1024086991"/>
+      </p:ext>
+    </p:extLst>
+  </p:cSld>
+  <p:clrMapOvr>
+    <a:masterClrMapping/>
+  </p:clrMapOvr>
+</p:notes>
+</file>
+
+<file path=ppt/notesSlides/notesSlide47.xml><?xml version="1.0" encoding="utf-8"?>
+<p:notes xmlns:a="http://schemas.openxmlformats.org/drawingml/2006/main" xmlns:r="http://schemas.openxmlformats.org/officeDocument/2006/relationships" xmlns:p="http://schemas.openxmlformats.org/presentationml/2006/main">
+  <p:cSld>
+    <p:spTree>
+      <p:nvGrpSpPr>
+        <p:cNvPr id="1" name=""/>
+        <p:cNvGrpSpPr/>
+        <p:nvPr/>
+      </p:nvGrpSpPr>
+      <p:grpSpPr>
+        <a:xfrm>
+          <a:off x="0" y="0"/>
+          <a:ext cx="0" cy="0"/>
+          <a:chOff x="0" y="0"/>
+          <a:chExt cx="0" cy="0"/>
+        </a:xfrm>
+      </p:grpSpPr>
+      <p:sp>
+        <p:nvSpPr>
+          <p:cNvPr id="2" name="Slide Image Placeholder 1"/>
+          <p:cNvSpPr>
+            <a:spLocks noGrp="1" noRot="1" noChangeAspect="1"/>
+          </p:cNvSpPr>
+          <p:nvPr>
+            <p:ph type="sldImg"/>
+          </p:nvPr>
+        </p:nvSpPr>
+        <p:spPr/>
+      </p:sp>
+      <p:sp>
+        <p:nvSpPr>
+          <p:cNvPr id="3" name="Notes Placeholder 2"/>
+          <p:cNvSpPr>
+            <a:spLocks noGrp="1"/>
+          </p:cNvSpPr>
+          <p:nvPr>
+            <p:ph type="body" idx="1"/>
+          </p:nvPr>
+        </p:nvSpPr>
+        <p:spPr/>
+        <p:txBody>
+          <a:bodyPr/>
+          <a:lstStyle/>
+          <a:p>
+            <a:r>
+              <a:rPr lang="en-US" dirty="0"/>
+              <a:t>For those who need more practice, fill in the blanks in your exercise book. The answers are: number 1, desertification; number 2, sun; number 3, nomads.</a:t>
+            </a:r>
+            <a:endParaRPr lang="en-US" dirty="0"/>
+          </a:p>
+        </p:txBody>
+      </p:sp>
+      <p:sp>
+        <p:nvSpPr>
+          <p:cNvPr id="4" name="Slide Number Placeholder 3"/>
+          <p:cNvSpPr>
+            <a:spLocks noGrp="1"/>
+          </p:cNvSpPr>
+          <p:nvPr>
+            <p:ph type="sldNum" sz="quarter" idx="10"/>
+          </p:nvPr>
+        </p:nvSpPr>
+        <p:spPr/>
+        <p:txBody>
+          <a:bodyPr/>
+          <a:lstStyle/>
+          <a:p>
+            <a:fld id="{F7021451-1387-4CA6-816F-3879F97B5CBC}" type="slidenum">
+              <a:rPr lang="en-US"/>
+              <a:t>47</a:t>
+            </a:fld>
+            <a:endParaRPr lang="en-US"/>
+          </a:p>
+        </p:txBody>
+      </p:sp>
+    </p:spTree>
+    <p:extLst>
+      <p:ext uri="{BB962C8B-B14F-4D97-AF65-F5344CB8AC3E}">
+        <p14:creationId xmlns:p14="http://schemas.microsoft.com/office/powerpoint/2010/main" val="1024086991"/>
+      </p:ext>
+    </p:extLst>
+  </p:cSld>
+  <p:clrMapOvr>
+    <a:masterClrMapping/>
+  </p:clrMapOvr>
+</p:notes>
+</file>
+
+<file path=ppt/notesSlides/notesSlide48.xml><?xml version="1.0" encoding="utf-8"?>
+<p:notes xmlns:a="http://schemas.openxmlformats.org/drawingml/2006/main" xmlns:r="http://schemas.openxmlformats.org/officeDocument/2006/relationships" xmlns:p="http://schemas.openxmlformats.org/presentationml/2006/main">
+  <p:cSld>
+    <p:spTree>
+      <p:nvGrpSpPr>
+        <p:cNvPr id="1" name=""/>
+        <p:cNvGrpSpPr/>
+        <p:nvPr/>
+      </p:nvGrpSpPr>
+      <p:grpSpPr>
+        <a:xfrm>
+          <a:off x="0" y="0"/>
+          <a:ext cx="0" cy="0"/>
+          <a:chOff x="0" y="0"/>
+          <a:chExt cx="0" cy="0"/>
+        </a:xfrm>
+      </p:grpSpPr>
+      <p:sp>
+        <p:nvSpPr>
+          <p:cNvPr id="2" name="Slide Image Placeholder 1"/>
+          <p:cNvSpPr>
+            <a:spLocks noGrp="1" noRot="1" noChangeAspect="1"/>
+          </p:cNvSpPr>
+          <p:nvPr>
+            <p:ph type="sldImg"/>
+          </p:nvPr>
+        </p:nvSpPr>
+        <p:spPr/>
+      </p:sp>
+      <p:sp>
+        <p:nvSpPr>
+          <p:cNvPr id="3" name="Notes Placeholder 2"/>
+          <p:cNvSpPr>
+            <a:spLocks noGrp="1"/>
+          </p:cNvSpPr>
+          <p:nvPr>
+            <p:ph type="body" idx="1"/>
+          </p:nvPr>
+        </p:nvSpPr>
+        <p:spPr/>
+        <p:txBody>
+          <a:bodyPr/>
+          <a:lstStyle/>
+          <a:p>
+            <a:r>
+              <a:rPr lang="en-US" dirty="0"/>
+              <a:t>For your homework: Make a table with three columns: resources, hazards and adaptations. Fill it with examples from the hot deserts and from the dry season in Garoua. We shall correct it at the beginning of our next lesson.</a:t>
+            </a:r>
+            <a:endParaRPr lang="en-US" dirty="0"/>
+          </a:p>
+        </p:txBody>
+      </p:sp>
+      <p:sp>
+        <p:nvSpPr>
+          <p:cNvPr id="4" name="Slide Number Placeholder 3"/>
+          <p:cNvSpPr>
+            <a:spLocks noGrp="1"/>
+          </p:cNvSpPr>
+          <p:nvPr>
+            <p:ph type="sldNum" sz="quarter" idx="10"/>
+          </p:nvPr>
+        </p:nvSpPr>
+        <p:spPr/>
+        <p:txBody>
+          <a:bodyPr/>
+          <a:lstStyle/>
+          <a:p>
+            <a:fld id="{F7021451-1387-4CA6-816F-3879F97B5CBC}" type="slidenum">
+              <a:rPr lang="en-US"/>
+              <a:t>48</a:t>
+            </a:fld>
+            <a:endParaRPr lang="en-US"/>
+          </a:p>
+        </p:txBody>
+      </p:sp>
+    </p:spTree>
+    <p:extLst>
+      <p:ext uri="{BB962C8B-B14F-4D97-AF65-F5344CB8AC3E}">
+        <p14:creationId xmlns:p14="http://schemas.microsoft.com/office/powerpoint/2010/main" val="1024086991"/>
+      </p:ext>
+    </p:extLst>
+  </p:cSld>
+  <p:clrMapOvr>
+    <a:masterClrMapping/>
+  </p:clrMapOvr>
+</p:notes>
+</file>
+
+<file path=ppt/notesSlides/notesSlide49.xml><?xml version="1.0" encoding="utf-8"?>
+<p:notes xmlns:a="http://schemas.openxmlformats.org/drawingml/2006/main" xmlns:r="http://schemas.openxmlformats.org/officeDocument/2006/relationships" xmlns:p="http://schemas.openxmlformats.org/presentationml/2006/main">
+  <p:cSld>
+    <p:spTree>
+      <p:nvGrpSpPr>
+        <p:cNvPr id="1" name=""/>
+        <p:cNvGrpSpPr/>
+        <p:nvPr/>
+      </p:nvGrpSpPr>
+      <p:grpSpPr>
+        <a:xfrm>
+          <a:off x="0" y="0"/>
+          <a:ext cx="0" cy="0"/>
+          <a:chOff x="0" y="0"/>
+          <a:chExt cx="0" cy="0"/>
+        </a:xfrm>
+      </p:grpSpPr>
+      <p:sp>
+        <p:nvSpPr>
+          <p:cNvPr id="2" name="Slide Image Placeholder 1"/>
+          <p:cNvSpPr>
+            <a:spLocks noGrp="1" noRot="1" noChangeAspect="1"/>
+          </p:cNvSpPr>
+          <p:nvPr>
+            <p:ph type="sldImg"/>
+          </p:nvPr>
+        </p:nvSpPr>
+        <p:spPr/>
+      </p:sp>
+      <p:sp>
+        <p:nvSpPr>
+          <p:cNvPr id="3" name="Notes Placeholder 2"/>
+          <p:cNvSpPr>
+            <a:spLocks noGrp="1"/>
+          </p:cNvSpPr>
+          <p:nvPr>
+            <p:ph type="body" idx="1"/>
+          </p:nvPr>
+        </p:nvSpPr>
+        <p:spPr/>
+        <p:txBody>
+          <a:bodyPr/>
+          <a:lstStyle/>
+          <a:p>
+            <a:r>
+              <a:rPr lang="en-US" dirty="0"/>
+              <a:t>Our next lesson will be on Lesson 30: The Atmosphere. Thank you for your attention, and see you next time.</a:t>
+            </a:r>
+            <a:endParaRPr lang="en-US" dirty="0"/>
+          </a:p>
+        </p:txBody>
+      </p:sp>
+      <p:sp>
+        <p:nvSpPr>
+          <p:cNvPr id="4" name="Slide Number Placeholder 3"/>
+          <p:cNvSpPr>
+            <a:spLocks noGrp="1"/>
+          </p:cNvSpPr>
+          <p:nvPr>
+            <p:ph type="sldNum" sz="quarter" idx="10"/>
+          </p:nvPr>
+        </p:nvSpPr>
+        <p:spPr/>
+        <p:txBody>
+          <a:bodyPr/>
+          <a:lstStyle/>
+          <a:p>
+            <a:fld id="{F7021451-1387-4CA6-816F-3879F97B5CBC}" type="slidenum">
+              <a:rPr lang="en-US"/>
+              <a:t>49</a:t>
             </a:fld>
             <a:endParaRPr lang="en-US"/>
           </a:p>
@@ -4197,6 +4470,534 @@
 </p:notes>
 </file>
 
+<file path=ppt/notesSlides/notesSlide50.xml><?xml version="1.0" encoding="utf-8"?>
+<p:notes xmlns:a="http://schemas.openxmlformats.org/drawingml/2006/main" xmlns:r="http://schemas.openxmlformats.org/officeDocument/2006/relationships" xmlns:p="http://schemas.openxmlformats.org/presentationml/2006/main">
+  <p:cSld>
+    <p:spTree>
+      <p:nvGrpSpPr>
+        <p:cNvPr id="1" name=""/>
+        <p:cNvGrpSpPr/>
+        <p:nvPr/>
+      </p:nvGrpSpPr>
+      <p:grpSpPr>
+        <a:xfrm>
+          <a:off x="0" y="0"/>
+          <a:ext cx="0" cy="0"/>
+          <a:chOff x="0" y="0"/>
+          <a:chExt cx="0" cy="0"/>
+        </a:xfrm>
+      </p:grpSpPr>
+      <p:sp>
+        <p:nvSpPr>
+          <p:cNvPr id="2" name="Slide Image Placeholder 1"/>
+          <p:cNvSpPr>
+            <a:spLocks noGrp="1" noRot="1" noChangeAspect="1"/>
+          </p:cNvSpPr>
+          <p:nvPr>
+            <p:ph type="sldImg"/>
+          </p:nvPr>
+        </p:nvSpPr>
+        <p:spPr/>
+      </p:sp>
+      <p:sp>
+        <p:nvSpPr>
+          <p:cNvPr id="3" name="Notes Placeholder 2"/>
+          <p:cNvSpPr>
+            <a:spLocks noGrp="1"/>
+          </p:cNvSpPr>
+          <p:nvPr>
+            <p:ph type="body" idx="1"/>
+          </p:nvPr>
+        </p:nvSpPr>
+        <p:spPr/>
+        <p:txBody>
+          <a:bodyPr/>
+          <a:lstStyle/>
+          <a:p>
+            <a:r>
+              <a:rPr lang="en-US" dirty="0"/>
+              <a:t>Let us play the bilingual game. I say a word in English, and you give me the French word. Then we do the reverse.</a:t>
+            </a:r>
+            <a:endParaRPr lang="en-US" dirty="0"/>
+          </a:p>
+        </p:txBody>
+      </p:sp>
+      <p:sp>
+        <p:nvSpPr>
+          <p:cNvPr id="4" name="Slide Number Placeholder 3"/>
+          <p:cNvSpPr>
+            <a:spLocks noGrp="1"/>
+          </p:cNvSpPr>
+          <p:nvPr>
+            <p:ph type="sldNum" sz="quarter" idx="10"/>
+          </p:nvPr>
+        </p:nvSpPr>
+        <p:spPr/>
+        <p:txBody>
+          <a:bodyPr/>
+          <a:lstStyle/>
+          <a:p>
+            <a:fld id="{F7021451-1387-4CA6-816F-3879F97B5CBC}" type="slidenum">
+              <a:rPr lang="en-US"/>
+              <a:t>50</a:t>
+            </a:fld>
+            <a:endParaRPr lang="en-US"/>
+          </a:p>
+        </p:txBody>
+      </p:sp>
+    </p:spTree>
+    <p:extLst>
+      <p:ext uri="{BB962C8B-B14F-4D97-AF65-F5344CB8AC3E}">
+        <p14:creationId xmlns:p14="http://schemas.microsoft.com/office/powerpoint/2010/main" val="1024086991"/>
+      </p:ext>
+    </p:extLst>
+  </p:cSld>
+  <p:clrMapOvr>
+    <a:masterClrMapping/>
+  </p:clrMapOvr>
+</p:notes>
+</file>
+
+<file path=ppt/notesSlides/notesSlide51.xml><?xml version="1.0" encoding="utf-8"?>
+<p:notes xmlns:a="http://schemas.openxmlformats.org/drawingml/2006/main" xmlns:r="http://schemas.openxmlformats.org/officeDocument/2006/relationships" xmlns:p="http://schemas.openxmlformats.org/presentationml/2006/main">
+  <p:cSld>
+    <p:spTree>
+      <p:nvGrpSpPr>
+        <p:cNvPr id="1" name=""/>
+        <p:cNvGrpSpPr/>
+        <p:nvPr/>
+      </p:nvGrpSpPr>
+      <p:grpSpPr>
+        <a:xfrm>
+          <a:off x="0" y="0"/>
+          <a:ext cx="0" cy="0"/>
+          <a:chOff x="0" y="0"/>
+          <a:chExt cx="0" cy="0"/>
+        </a:xfrm>
+      </p:grpSpPr>
+      <p:sp>
+        <p:nvSpPr>
+          <p:cNvPr id="2" name="Slide Image Placeholder 1"/>
+          <p:cNvSpPr>
+            <a:spLocks noGrp="1" noRot="1" noChangeAspect="1"/>
+          </p:cNvSpPr>
+          <p:nvPr>
+            <p:ph type="sldImg"/>
+          </p:nvPr>
+        </p:nvSpPr>
+        <p:spPr/>
+      </p:sp>
+      <p:sp>
+        <p:nvSpPr>
+          <p:cNvPr id="3" name="Notes Placeholder 2"/>
+          <p:cNvSpPr>
+            <a:spLocks noGrp="1"/>
+          </p:cNvSpPr>
+          <p:nvPr>
+            <p:ph type="body" idx="1"/>
+          </p:nvPr>
+        </p:nvSpPr>
+        <p:spPr/>
+        <p:txBody>
+          <a:bodyPr/>
+          <a:lstStyle/>
+          <a:p>
+            <a:r>
+              <a:rPr lang="en-US" dirty="0"/>
+              <a:t>I record this information in the official logbook of the class after the lesson.</a:t>
+            </a:r>
+            <a:endParaRPr lang="en-US" dirty="0"/>
+          </a:p>
+        </p:txBody>
+      </p:sp>
+      <p:sp>
+        <p:nvSpPr>
+          <p:cNvPr id="4" name="Slide Number Placeholder 3"/>
+          <p:cNvSpPr>
+            <a:spLocks noGrp="1"/>
+          </p:cNvSpPr>
+          <p:nvPr>
+            <p:ph type="sldNum" sz="quarter" idx="10"/>
+          </p:nvPr>
+        </p:nvSpPr>
+        <p:spPr/>
+        <p:txBody>
+          <a:bodyPr/>
+          <a:lstStyle/>
+          <a:p>
+            <a:fld id="{F7021451-1387-4CA6-816F-3879F97B5CBC}" type="slidenum">
+              <a:rPr lang="en-US"/>
+              <a:t>51</a:t>
+            </a:fld>
+            <a:endParaRPr lang="en-US"/>
+          </a:p>
+        </p:txBody>
+      </p:sp>
+    </p:spTree>
+    <p:extLst>
+      <p:ext uri="{BB962C8B-B14F-4D97-AF65-F5344CB8AC3E}">
+        <p14:creationId xmlns:p14="http://schemas.microsoft.com/office/powerpoint/2010/main" val="1024086991"/>
+      </p:ext>
+    </p:extLst>
+  </p:cSld>
+  <p:clrMapOvr>
+    <a:masterClrMapping/>
+  </p:clrMapOvr>
+</p:notes>
+</file>
+
+<file path=ppt/notesSlides/notesSlide52.xml><?xml version="1.0" encoding="utf-8"?>
+<p:notes xmlns:a="http://schemas.openxmlformats.org/drawingml/2006/main" xmlns:r="http://schemas.openxmlformats.org/officeDocument/2006/relationships" xmlns:p="http://schemas.openxmlformats.org/presentationml/2006/main">
+  <p:cSld>
+    <p:spTree>
+      <p:nvGrpSpPr>
+        <p:cNvPr id="1" name=""/>
+        <p:cNvGrpSpPr/>
+        <p:nvPr/>
+      </p:nvGrpSpPr>
+      <p:grpSpPr>
+        <a:xfrm>
+          <a:off x="0" y="0"/>
+          <a:ext cx="0" cy="0"/>
+          <a:chOff x="0" y="0"/>
+          <a:chExt cx="0" cy="0"/>
+        </a:xfrm>
+      </p:grpSpPr>
+      <p:sp>
+        <p:nvSpPr>
+          <p:cNvPr id="2" name="Slide Image Placeholder 1"/>
+          <p:cNvSpPr>
+            <a:spLocks noGrp="1" noRot="1" noChangeAspect="1"/>
+          </p:cNvSpPr>
+          <p:nvPr>
+            <p:ph type="sldImg"/>
+          </p:nvPr>
+        </p:nvSpPr>
+        <p:spPr/>
+      </p:sp>
+      <p:sp>
+        <p:nvSpPr>
+          <p:cNvPr id="3" name="Notes Placeholder 2"/>
+          <p:cNvSpPr>
+            <a:spLocks noGrp="1"/>
+          </p:cNvSpPr>
+          <p:nvPr>
+            <p:ph type="body" idx="1"/>
+          </p:nvPr>
+        </p:nvSpPr>
+        <p:spPr/>
+        <p:txBody>
+          <a:bodyPr/>
+          <a:lstStyle/>
+          <a:p>
+            <a:r>
+              <a:rPr lang="en-US" dirty="0"/>
+              <a:t>I complete the second page of the logbook: the matter taught, the evaluation, the homework and the attendance.</a:t>
+            </a:r>
+            <a:endParaRPr lang="en-US" dirty="0"/>
+          </a:p>
+        </p:txBody>
+      </p:sp>
+      <p:sp>
+        <p:nvSpPr>
+          <p:cNvPr id="4" name="Slide Number Placeholder 3"/>
+          <p:cNvSpPr>
+            <a:spLocks noGrp="1"/>
+          </p:cNvSpPr>
+          <p:nvPr>
+            <p:ph type="sldNum" sz="quarter" idx="10"/>
+          </p:nvPr>
+        </p:nvSpPr>
+        <p:spPr/>
+        <p:txBody>
+          <a:bodyPr/>
+          <a:lstStyle/>
+          <a:p>
+            <a:fld id="{F7021451-1387-4CA6-816F-3879F97B5CBC}" type="slidenum">
+              <a:rPr lang="en-US"/>
+              <a:t>52</a:t>
+            </a:fld>
+            <a:endParaRPr lang="en-US"/>
+          </a:p>
+        </p:txBody>
+      </p:sp>
+    </p:spTree>
+    <p:extLst>
+      <p:ext uri="{BB962C8B-B14F-4D97-AF65-F5344CB8AC3E}">
+        <p14:creationId xmlns:p14="http://schemas.microsoft.com/office/powerpoint/2010/main" val="1024086991"/>
+      </p:ext>
+    </p:extLst>
+  </p:cSld>
+  <p:clrMapOvr>
+    <a:masterClrMapping/>
+  </p:clrMapOvr>
+</p:notes>
+</file>
+
+<file path=ppt/notesSlides/notesSlide53.xml><?xml version="1.0" encoding="utf-8"?>
+<p:notes xmlns:a="http://schemas.openxmlformats.org/drawingml/2006/main" xmlns:r="http://schemas.openxmlformats.org/officeDocument/2006/relationships" xmlns:p="http://schemas.openxmlformats.org/presentationml/2006/main">
+  <p:cSld>
+    <p:spTree>
+      <p:nvGrpSpPr>
+        <p:cNvPr id="1" name=""/>
+        <p:cNvGrpSpPr/>
+        <p:nvPr/>
+      </p:nvGrpSpPr>
+      <p:grpSpPr>
+        <a:xfrm>
+          <a:off x="0" y="0"/>
+          <a:ext cx="0" cy="0"/>
+          <a:chOff x="0" y="0"/>
+          <a:chExt cx="0" cy="0"/>
+        </a:xfrm>
+      </p:grpSpPr>
+      <p:sp>
+        <p:nvSpPr>
+          <p:cNvPr id="2" name="Slide Image Placeholder 1"/>
+          <p:cNvSpPr>
+            <a:spLocks noGrp="1" noRot="1" noChangeAspect="1"/>
+          </p:cNvSpPr>
+          <p:nvPr>
+            <p:ph type="sldImg"/>
+          </p:nvPr>
+        </p:nvSpPr>
+        <p:spPr/>
+      </p:sp>
+      <p:sp>
+        <p:nvSpPr>
+          <p:cNvPr id="3" name="Notes Placeholder 2"/>
+          <p:cNvSpPr>
+            <a:spLocks noGrp="1"/>
+          </p:cNvSpPr>
+          <p:nvPr>
+            <p:ph type="body" idx="1"/>
+          </p:nvPr>
+        </p:nvSpPr>
+        <p:spPr/>
+        <p:txBody>
+          <a:bodyPr/>
+          <a:lstStyle/>
+          <a:p>
+            <a:r>
+              <a:rPr lang="en-US" dirty="0"/>
+              <a:t>This slide is for me, the teacher: it gives the timing of the lesson and what to do if the projector is not available.</a:t>
+            </a:r>
+            <a:endParaRPr lang="en-US" dirty="0"/>
+          </a:p>
+        </p:txBody>
+      </p:sp>
+      <p:sp>
+        <p:nvSpPr>
+          <p:cNvPr id="4" name="Slide Number Placeholder 3"/>
+          <p:cNvSpPr>
+            <a:spLocks noGrp="1"/>
+          </p:cNvSpPr>
+          <p:nvPr>
+            <p:ph type="sldNum" sz="quarter" idx="10"/>
+          </p:nvPr>
+        </p:nvSpPr>
+        <p:spPr/>
+        <p:txBody>
+          <a:bodyPr/>
+          <a:lstStyle/>
+          <a:p>
+            <a:fld id="{F7021451-1387-4CA6-816F-3879F97B5CBC}" type="slidenum">
+              <a:rPr lang="en-US"/>
+              <a:t>53</a:t>
+            </a:fld>
+            <a:endParaRPr lang="en-US"/>
+          </a:p>
+        </p:txBody>
+      </p:sp>
+    </p:spTree>
+    <p:extLst>
+      <p:ext uri="{BB962C8B-B14F-4D97-AF65-F5344CB8AC3E}">
+        <p14:creationId xmlns:p14="http://schemas.microsoft.com/office/powerpoint/2010/main" val="1024086991"/>
+      </p:ext>
+    </p:extLst>
+  </p:cSld>
+  <p:clrMapOvr>
+    <a:masterClrMapping/>
+  </p:clrMapOvr>
+</p:notes>
+</file>
+
+<file path=ppt/notesSlides/notesSlide54.xml><?xml version="1.0" encoding="utf-8"?>
+<p:notes xmlns:a="http://schemas.openxmlformats.org/drawingml/2006/main" xmlns:r="http://schemas.openxmlformats.org/officeDocument/2006/relationships" xmlns:p="http://schemas.openxmlformats.org/presentationml/2006/main">
+  <p:cSld>
+    <p:spTree>
+      <p:nvGrpSpPr>
+        <p:cNvPr id="1" name=""/>
+        <p:cNvGrpSpPr/>
+        <p:nvPr/>
+      </p:nvGrpSpPr>
+      <p:grpSpPr>
+        <a:xfrm>
+          <a:off x="0" y="0"/>
+          <a:ext cx="0" cy="0"/>
+          <a:chOff x="0" y="0"/>
+          <a:chExt cx="0" cy="0"/>
+        </a:xfrm>
+      </p:grpSpPr>
+      <p:sp>
+        <p:nvSpPr>
+          <p:cNvPr id="2" name="Slide Image Placeholder 1"/>
+          <p:cNvSpPr>
+            <a:spLocks noGrp="1" noRot="1" noChangeAspect="1"/>
+          </p:cNvSpPr>
+          <p:nvPr>
+            <p:ph type="sldImg"/>
+          </p:nvPr>
+        </p:nvSpPr>
+        <p:spPr/>
+      </p:sp>
+      <p:sp>
+        <p:nvSpPr>
+          <p:cNvPr id="3" name="Notes Placeholder 2"/>
+          <p:cNvSpPr>
+            <a:spLocks noGrp="1"/>
+          </p:cNvSpPr>
+          <p:nvPr>
+            <p:ph type="body" idx="1"/>
+          </p:nvPr>
+        </p:nvSpPr>
+        <p:spPr/>
+        <p:txBody>
+          <a:bodyPr/>
+          <a:lstStyle/>
+          <a:p>
+            <a:r>
+              <a:rPr lang="en-US" dirty="0"/>
+              <a:t>Take your time to copy this part; we will continue together.</a:t>
+            </a:r>
+            <a:endParaRPr lang="en-US" dirty="0"/>
+          </a:p>
+        </p:txBody>
+      </p:sp>
+      <p:sp>
+        <p:nvSpPr>
+          <p:cNvPr id="4" name="Slide Number Placeholder 3"/>
+          <p:cNvSpPr>
+            <a:spLocks noGrp="1"/>
+          </p:cNvSpPr>
+          <p:nvPr>
+            <p:ph type="sldNum" sz="quarter" idx="10"/>
+          </p:nvPr>
+        </p:nvSpPr>
+        <p:spPr/>
+        <p:txBody>
+          <a:bodyPr/>
+          <a:lstStyle/>
+          <a:p>
+            <a:fld id="{F7021451-1387-4CA6-816F-3879F97B5CBC}" type="slidenum">
+              <a:rPr lang="en-US"/>
+              <a:t>54</a:t>
+            </a:fld>
+            <a:endParaRPr lang="en-US"/>
+          </a:p>
+        </p:txBody>
+      </p:sp>
+    </p:spTree>
+    <p:extLst>
+      <p:ext uri="{BB962C8B-B14F-4D97-AF65-F5344CB8AC3E}">
+        <p14:creationId xmlns:p14="http://schemas.microsoft.com/office/powerpoint/2010/main" val="1024086991"/>
+      </p:ext>
+    </p:extLst>
+  </p:cSld>
+  <p:clrMapOvr>
+    <a:masterClrMapping/>
+  </p:clrMapOvr>
+</p:notes>
+</file>
+
+<file path=ppt/notesSlides/notesSlide55.xml><?xml version="1.0" encoding="utf-8"?>
+<p:notes xmlns:a="http://schemas.openxmlformats.org/drawingml/2006/main" xmlns:r="http://schemas.openxmlformats.org/officeDocument/2006/relationships" xmlns:p="http://schemas.openxmlformats.org/presentationml/2006/main">
+  <p:cSld>
+    <p:spTree>
+      <p:nvGrpSpPr>
+        <p:cNvPr id="1" name=""/>
+        <p:cNvGrpSpPr/>
+        <p:nvPr/>
+      </p:nvGrpSpPr>
+      <p:grpSpPr>
+        <a:xfrm>
+          <a:off x="0" y="0"/>
+          <a:ext cx="0" cy="0"/>
+          <a:chOff x="0" y="0"/>
+          <a:chExt cx="0" cy="0"/>
+        </a:xfrm>
+      </p:grpSpPr>
+      <p:sp>
+        <p:nvSpPr>
+          <p:cNvPr id="2" name="Slide Image Placeholder 1"/>
+          <p:cNvSpPr>
+            <a:spLocks noGrp="1" noRot="1" noChangeAspect="1"/>
+          </p:cNvSpPr>
+          <p:nvPr>
+            <p:ph type="sldImg"/>
+          </p:nvPr>
+        </p:nvSpPr>
+        <p:spPr/>
+      </p:sp>
+      <p:sp>
+        <p:nvSpPr>
+          <p:cNvPr id="3" name="Notes Placeholder 2"/>
+          <p:cNvSpPr>
+            <a:spLocks noGrp="1"/>
+          </p:cNvSpPr>
+          <p:nvPr>
+            <p:ph type="body" idx="1"/>
+          </p:nvPr>
+        </p:nvSpPr>
+        <p:spPr/>
+        <p:txBody>
+          <a:bodyPr/>
+          <a:lstStyle/>
+          <a:p>
+            <a:r>
+              <a:rPr lang="en-US" dirty="0"/>
+              <a:t>These are the references and picture credits used to prepare this lesson.</a:t>
+            </a:r>
+            <a:endParaRPr lang="en-US" dirty="0"/>
+          </a:p>
+        </p:txBody>
+      </p:sp>
+      <p:sp>
+        <p:nvSpPr>
+          <p:cNvPr id="4" name="Slide Number Placeholder 3"/>
+          <p:cNvSpPr>
+            <a:spLocks noGrp="1"/>
+          </p:cNvSpPr>
+          <p:nvPr>
+            <p:ph type="sldNum" sz="quarter" idx="10"/>
+          </p:nvPr>
+        </p:nvSpPr>
+        <p:spPr/>
+        <p:txBody>
+          <a:bodyPr/>
+          <a:lstStyle/>
+          <a:p>
+            <a:fld id="{F7021451-1387-4CA6-816F-3879F97B5CBC}" type="slidenum">
+              <a:rPr lang="en-US"/>
+              <a:t>55</a:t>
+            </a:fld>
+            <a:endParaRPr lang="en-US"/>
+          </a:p>
+        </p:txBody>
+      </p:sp>
+    </p:spTree>
+    <p:extLst>
+      <p:ext uri="{BB962C8B-B14F-4D97-AF65-F5344CB8AC3E}">
+        <p14:creationId xmlns:p14="http://schemas.microsoft.com/office/powerpoint/2010/main" val="1024086991"/>
+      </p:ext>
+    </p:extLst>
+  </p:cSld>
+  <p:clrMapOvr>
+    <a:masterClrMapping/>
+  </p:clrMapOvr>
+</p:notes>
+</file>
+
 <file path=ppt/notesSlides/notesSlide6.xml><?xml version="1.0" encoding="utf-8"?>
 <p:notes xmlns:a="http://schemas.openxmlformats.org/drawingml/2006/main" xmlns:r="http://schemas.openxmlformats.org/officeDocument/2006/relationships" xmlns:p="http://schemas.openxmlformats.org/presentationml/2006/main">
   <p:cSld>
@@ -4419,7 +5220,7 @@
           <a:p>
             <a:r>
               <a:rPr lang="en-US" dirty="0"/>
-              <a:t>By the end of this lesson, you should be able to do three things. Number 1: define a resource and a hazard. Number 2: identify the main resources of hot deserts. Number 3: describe the main challenges of living in hot deserts. Number 4: explain how people adapt to life in hot deserts.</a:t>
+              <a:t>By the end of this lesson, you should be able to do four things. Number 1: define a resource and a hazard. Number 2: identify the main resources of hot deserts. Number 3: describe the main challenges of living in hot deserts. Number 4: explain how people adapt to life in hot deserts.</a:t>
             </a:r>
             <a:endParaRPr lang="en-US" dirty="0"/>
           </a:p>
@@ -5887,7 +6688,7 @@
         <p:spPr>
           <a:xfrm>
             <a:off x="0" y="658368"/>
-            <a:ext cx="5120640" cy="5833872"/>
+            <a:ext cx="1463040" cy="5833872"/>
           </a:xfrm>
           <a:prstGeom prst="rect">
             <a:avLst/>
@@ -5902,8 +6703,8 @@
         </p:nvSpPr>
         <p:spPr>
           <a:xfrm>
-            <a:off x="5349240" y="1005840"/>
-            <a:ext cx="6522415" cy="731520"/>
+            <a:off x="1691640" y="1005840"/>
+            <a:ext cx="10180015" cy="731520"/>
           </a:xfrm>
           <a:prstGeom prst="rect">
             <a:avLst/>
@@ -5943,8 +6744,8 @@
         </p:nvSpPr>
         <p:spPr>
           <a:xfrm>
-            <a:off x="5349240" y="1783080"/>
-            <a:ext cx="6522415" cy="4663440"/>
+            <a:off x="1691640" y="1783080"/>
+            <a:ext cx="10180015" cy="4663440"/>
           </a:xfrm>
           <a:prstGeom prst="rect">
             <a:avLst/>
@@ -5971,7 +6772,47 @@
                 <a:ea typeface="Times New Roman" pitchFamily="34" charset="-122"/>
                 <a:cs typeface="Times New Roman" pitchFamily="34" charset="-120"/>
               </a:rPr>
-              <a:t>In March, the well of the Bouba family dries up. Mrs Bouba walks for more than an hour every morning to get water, and the goats are thin.</a:t>
+              <a:t>In March, the well of the Bouba family dries up.</a:t>
+            </a:r>
+            <a:endParaRPr lang="en-US" sz="4000" dirty="0"/>
+          </a:p>
+          <a:p>
+            <a:pPr algn="l" indent="0" marL="0">
+              <a:spcAft>
+                <a:spcPts val="800"/>
+              </a:spcAft>
+              <a:buNone/>
+            </a:pPr>
+            <a:r>
+              <a:rPr lang="en-US" sz="4000" dirty="0">
+                <a:solidFill>
+                  <a:srgbClr val="111111"/>
+                </a:solidFill>
+                <a:latin typeface="Times New Roman" pitchFamily="34" charset="0"/>
+                <a:ea typeface="Times New Roman" pitchFamily="34" charset="-122"/>
+                <a:cs typeface="Times New Roman" pitchFamily="34" charset="-120"/>
+              </a:rPr>
+              <a:t>Mrs Bouba walks for more than an hour every morning to get water, and the goats are thin.</a:t>
+            </a:r>
+            <a:endParaRPr lang="en-US" sz="4000" dirty="0"/>
+          </a:p>
+          <a:p>
+            <a:pPr algn="l" indent="0" marL="0">
+              <a:spcAft>
+                <a:spcPts val="800"/>
+              </a:spcAft>
+              <a:buNone/>
+            </a:pPr>
+            <a:r>
+              <a:rPr lang="en-US" sz="4000" dirty="0">
+                <a:solidFill>
+                  <a:srgbClr val="111111"/>
+                </a:solidFill>
+                <a:latin typeface="Times New Roman" pitchFamily="34" charset="0"/>
+                <a:ea typeface="Times New Roman" pitchFamily="34" charset="-122"/>
+                <a:cs typeface="Times New Roman" pitchFamily="34" charset="-120"/>
+              </a:rPr>
+              <a:t>Yet in the Sahara, people live in oases and even produce oil and solar electricity.</a:t>
             </a:r>
             <a:endParaRPr lang="en-US" sz="4000" dirty="0"/>
           </a:p>
@@ -6148,7 +6989,7 @@
                 <a:ea typeface="Times New Roman" pitchFamily="34" charset="-122"/>
                 <a:cs typeface="Times New Roman" pitchFamily="34" charset="-120"/>
               </a:rPr>
-              <a:t>Situation: Question 1</a:t>
+              <a:t>Situation in Real Life (continued)</a:t>
             </a:r>
             <a:endParaRPr lang="en-US" sz="3600" dirty="0"/>
           </a:p>
@@ -6190,7 +7031,7 @@
                 <a:ea typeface="Times New Roman" pitchFamily="34" charset="-122"/>
                 <a:cs typeface="Times New Roman" pitchFamily="34" charset="-120"/>
               </a:rPr>
-              <a:t>What is the problem in the situation?</a:t>
+              <a:t>"</a:t>
             </a:r>
             <a:endParaRPr lang="en-US" sz="4000" dirty="0"/>
           </a:p>
@@ -6367,7 +7208,7 @@
                 <a:ea typeface="Times New Roman" pitchFamily="34" charset="-122"/>
                 <a:cs typeface="Times New Roman" pitchFamily="34" charset="-120"/>
               </a:rPr>
-              <a:t>Answer</a:t>
+              <a:t>Situation: Question 1</a:t>
             </a:r>
             <a:endParaRPr lang="en-US" sz="3600" dirty="0"/>
           </a:p>
@@ -6409,7 +7250,7 @@
                 <a:ea typeface="Times New Roman" pitchFamily="34" charset="-122"/>
                 <a:cs typeface="Times New Roman" pitchFamily="34" charset="-120"/>
               </a:rPr>
-              <a:t>The family has no water near the house.</a:t>
+              <a:t>What is the problem in the situation?</a:t>
             </a:r>
             <a:endParaRPr lang="en-US" sz="4000" dirty="0"/>
           </a:p>
@@ -6586,7 +7427,7 @@
                 <a:ea typeface="Times New Roman" pitchFamily="34" charset="-122"/>
                 <a:cs typeface="Times New Roman" pitchFamily="34" charset="-120"/>
               </a:rPr>
-              <a:t>Situation: Question 2</a:t>
+              <a:t>Answer</a:t>
             </a:r>
             <a:endParaRPr lang="en-US" sz="3600" dirty="0"/>
           </a:p>
@@ -6628,7 +7469,7 @@
                 <a:ea typeface="Times New Roman" pitchFamily="34" charset="-122"/>
                 <a:cs typeface="Times New Roman" pitchFamily="34" charset="-120"/>
               </a:rPr>
-              <a:t>Who suffers?</a:t>
+              <a:t>The son does not understand how people can live and find resources in hot deserts.</a:t>
             </a:r>
             <a:endParaRPr lang="en-US" sz="4000" dirty="0"/>
           </a:p>
@@ -6805,7 +7646,7 @@
                 <a:ea typeface="Times New Roman" pitchFamily="34" charset="-122"/>
                 <a:cs typeface="Times New Roman" pitchFamily="34" charset="-120"/>
               </a:rPr>
-              <a:t>Answer</a:t>
+              <a:t>Situation: Question 2</a:t>
             </a:r>
             <a:endParaRPr lang="en-US" sz="3600" dirty="0"/>
           </a:p>
@@ -6847,7 +7688,7 @@
                 <a:ea typeface="Times New Roman" pitchFamily="34" charset="-122"/>
                 <a:cs typeface="Times New Roman" pitchFamily="34" charset="-120"/>
               </a:rPr>
-              <a:t>Mrs Bouba and the animals.</a:t>
+              <a:t>What is the main difficulty of the Bouba family?</a:t>
             </a:r>
             <a:endParaRPr lang="en-US" sz="4000" dirty="0"/>
           </a:p>
@@ -7024,7 +7865,7 @@
                 <a:ea typeface="Times New Roman" pitchFamily="34" charset="-122"/>
                 <a:cs typeface="Times New Roman" pitchFamily="34" charset="-120"/>
               </a:rPr>
-              <a:t>Situation: Question 3</a:t>
+              <a:t>Answer</a:t>
             </a:r>
             <a:endParaRPr lang="en-US" sz="3600" dirty="0"/>
           </a:p>
@@ -7066,7 +7907,7 @@
                 <a:ea typeface="Times New Roman" pitchFamily="34" charset="-122"/>
                 <a:cs typeface="Times New Roman" pitchFamily="34" charset="-120"/>
               </a:rPr>
-              <a:t>What can the village do?</a:t>
+              <a:t>The lack of water.</a:t>
             </a:r>
             <a:endParaRPr lang="en-US" sz="4000" dirty="0"/>
           </a:p>
@@ -7243,7 +8084,7 @@
                 <a:ea typeface="Times New Roman" pitchFamily="34" charset="-122"/>
                 <a:cs typeface="Times New Roman" pitchFamily="34" charset="-120"/>
               </a:rPr>
-              <a:t>Possible Answer</a:t>
+              <a:t>Situation: Question 3</a:t>
             </a:r>
             <a:endParaRPr lang="en-US" sz="3600" dirty="0"/>
           </a:p>
@@ -7285,7 +8126,7 @@
                 <a:ea typeface="Times New Roman" pitchFamily="34" charset="-122"/>
                 <a:cs typeface="Times New Roman" pitchFamily="34" charset="-120"/>
               </a:rPr>
-              <a:t>Dig a deeper well or collect rain water.</a:t>
+              <a:t>Name one resource of the Sahara.</a:t>
             </a:r>
             <a:endParaRPr lang="en-US" sz="4000" dirty="0"/>
           </a:p>
@@ -7397,7 +8238,7 @@
                 <a:ea typeface="Calibri" pitchFamily="34" charset="-122"/>
                 <a:cs typeface="Calibri" pitchFamily="34" charset="-120"/>
               </a:rPr>
-              <a:t>ACTION TO TAKE</a:t>
+              <a:t>REAL-LIFE SITUATION</a:t>
             </a:r>
             <a:endParaRPr lang="en-US" sz="1400" dirty="0"/>
           </a:p>
@@ -7462,7 +8303,7 @@
                 <a:ea typeface="Times New Roman" pitchFamily="34" charset="-122"/>
                 <a:cs typeface="Times New Roman" pitchFamily="34" charset="-120"/>
               </a:rPr>
-              <a:t>Action to Take</a:t>
+              <a:t>Possible Answer</a:t>
             </a:r>
             <a:endParaRPr lang="en-US" sz="3600" dirty="0"/>
           </a:p>
@@ -7504,7 +8345,7 @@
                 <a:ea typeface="Times New Roman" pitchFamily="34" charset="-122"/>
                 <a:cs typeface="Times New Roman" pitchFamily="34" charset="-120"/>
               </a:rPr>
-              <a:t>Save water and plant trees to fight desertification.</a:t>
+              <a:t>Oil (or sunshine for solar electricity).</a:t>
             </a:r>
             <a:endParaRPr lang="en-US" sz="4000" dirty="0"/>
           </a:p>
@@ -7616,7 +8457,7 @@
                 <a:ea typeface="Calibri" pitchFamily="34" charset="-122"/>
                 <a:cs typeface="Calibri" pitchFamily="34" charset="-120"/>
               </a:rPr>
-              <a:t>JUSTIFICATION</a:t>
+              <a:t>ACTION TO TAKE</a:t>
             </a:r>
             <a:endParaRPr lang="en-US" sz="1400" dirty="0"/>
           </a:p>
@@ -7681,7 +8522,7 @@
                 <a:ea typeface="Times New Roman" pitchFamily="34" charset="-122"/>
                 <a:cs typeface="Times New Roman" pitchFamily="34" charset="-120"/>
               </a:rPr>
-              <a:t>Justification of the Lesson</a:t>
+              <a:t>Action to Take</a:t>
             </a:r>
             <a:endParaRPr lang="en-US" sz="3600" dirty="0"/>
           </a:p>
@@ -7723,7 +8564,7 @@
                 <a:ea typeface="Times New Roman" pitchFamily="34" charset="-122"/>
                 <a:cs typeface="Times New Roman" pitchFamily="34" charset="-120"/>
               </a:rPr>
-              <a:t>This lesson helps us to know how people live in hot deserts.</a:t>
+              <a:t>Save water and plant trees to fight desertification.</a:t>
             </a:r>
             <a:endParaRPr lang="en-US" sz="4000" dirty="0"/>
           </a:p>
@@ -7835,54 +8676,15 @@
                 <a:ea typeface="Calibri" pitchFamily="34" charset="-122"/>
                 <a:cs typeface="Calibri" pitchFamily="34" charset="-120"/>
               </a:rPr>
-              <a:t>1. RESOURCES</a:t>
+              <a:t>JUSTIFICATION</a:t>
             </a:r>
             <a:endParaRPr lang="en-US" sz="1400" dirty="0"/>
-          </a:p>
-        </p:txBody>
-      </p:sp>
-      <p:sp>
-        <p:nvSpPr>
-          <p:cNvPr id="3" name="Text 1"/>
-          <p:cNvSpPr/>
-          <p:nvPr/>
-        </p:nvSpPr>
-        <p:spPr>
-          <a:xfrm>
-            <a:off x="457200" y="1005840"/>
-            <a:ext cx="11277295" cy="731520"/>
-          </a:xfrm>
-          <a:prstGeom prst="rect">
-            <a:avLst/>
-          </a:prstGeom>
-          <a:noFill/>
-          <a:ln/>
-        </p:spPr>
-        <p:txBody>
-          <a:bodyPr wrap="square" lIns="0" tIns="0" rIns="0" bIns="0" rtlCol="0" anchor="ctr"/>
-          <a:lstStyle/>
-          <a:p>
-            <a:pPr algn="ctr" indent="0" marL="0">
-              <a:buNone/>
-            </a:pPr>
-            <a:r>
-              <a:rPr lang="en-US" sz="3600" b="1" dirty="0">
-                <a:solidFill>
-                  <a:srgbClr val="990011"/>
-                </a:solidFill>
-                <a:latin typeface="Times New Roman" pitchFamily="34" charset="0"/>
-                <a:ea typeface="Times New Roman" pitchFamily="34" charset="-122"/>
-                <a:cs typeface="Times New Roman" pitchFamily="34" charset="-120"/>
-              </a:rPr>
-              <a:t>Activity 1</a:t>
-            </a:r>
-            <a:endParaRPr lang="en-US" sz="3600" dirty="0"/>
           </a:p>
         </p:txBody>
       </p:sp>
       <p:pic>
         <p:nvPicPr>
-          <p:cNvPr id="4" name="Image 0" descr="/home/claude/f4/img/v2/f4_solar.jpg">    </p:cNvPr>
+          <p:cNvPr id="3" name="Image 0" descr="/home/claude/f4/img/minesec_sheet.png">    </p:cNvPr>
           <p:cNvPicPr>
             <a:picLocks noChangeAspect="1"/>
           </p:cNvPicPr>
@@ -7896,8 +8698,8 @@
         </p:blipFill>
         <p:spPr>
           <a:xfrm>
-            <a:off x="2246610" y="1783080"/>
-            <a:ext cx="7698475" cy="4270248"/>
+            <a:off x="0" y="658368"/>
+            <a:ext cx="5120640" cy="5833872"/>
           </a:xfrm>
           <a:prstGeom prst="rect">
             <a:avLst/>
@@ -7906,14 +8708,14 @@
       </p:pic>
       <p:sp>
         <p:nvSpPr>
-          <p:cNvPr id="5" name="Text 2"/>
+          <p:cNvPr id="4" name="Text 1"/>
           <p:cNvSpPr/>
           <p:nvPr/>
         </p:nvSpPr>
         <p:spPr>
           <a:xfrm>
-            <a:off x="457200" y="6089904"/>
-            <a:ext cx="11277295" cy="347472"/>
+            <a:off x="5349240" y="1005840"/>
+            <a:ext cx="6522415" cy="731520"/>
           </a:xfrm>
           <a:prstGeom prst="rect">
             <a:avLst/>
@@ -7922,24 +8724,68 @@
           <a:ln/>
         </p:spPr>
         <p:txBody>
-          <a:bodyPr wrap="square" lIns="0" tIns="0" rIns="0" bIns="0" rtlCol="0" anchor="ctr"/>
+          <a:bodyPr wrap="square" lIns="0" tIns="0" rIns="0" bIns="0" rtlCol="0" anchor="ctr">
+            <a:normAutofit/>
+          </a:bodyPr>
           <a:lstStyle/>
           <a:p>
             <a:pPr algn="ctr" indent="0" marL="0">
               <a:buNone/>
             </a:pPr>
             <a:r>
-              <a:rPr lang="en-US" sz="1800" i="1" dirty="0">
-                <a:solidFill>
-                  <a:srgbClr val="555555"/>
+              <a:rPr lang="en-US" sz="3600" b="1" dirty="0">
+                <a:solidFill>
+                  <a:srgbClr val="990011"/>
                 </a:solidFill>
                 <a:latin typeface="Times New Roman" pitchFamily="34" charset="0"/>
                 <a:ea typeface="Times New Roman" pitchFamily="34" charset="-122"/>
                 <a:cs typeface="Times New Roman" pitchFamily="34" charset="-120"/>
               </a:rPr>
-              <a:t>A big solar power station in Morocco.</a:t>
-            </a:r>
-            <a:endParaRPr lang="en-US" sz="1800" dirty="0"/>
+              <a:t>Justification of the Lesson</a:t>
+            </a:r>
+            <a:endParaRPr lang="en-US" sz="3600" dirty="0"/>
+          </a:p>
+        </p:txBody>
+      </p:sp>
+      <p:sp>
+        <p:nvSpPr>
+          <p:cNvPr id="5" name="Text 2"/>
+          <p:cNvSpPr/>
+          <p:nvPr/>
+        </p:nvSpPr>
+        <p:spPr>
+          <a:xfrm>
+            <a:off x="5349240" y="1783080"/>
+            <a:ext cx="6522415" cy="4663440"/>
+          </a:xfrm>
+          <a:prstGeom prst="rect">
+            <a:avLst/>
+          </a:prstGeom>
+          <a:noFill/>
+          <a:ln/>
+        </p:spPr>
+        <p:txBody>
+          <a:bodyPr wrap="square" lIns="0" tIns="0" rIns="0" bIns="0" rtlCol="0" anchor="t"/>
+          <a:lstStyle/>
+          <a:p>
+            <a:pPr algn="l" indent="0" marL="0">
+              <a:spcAft>
+                <a:spcPts val="800"/>
+              </a:spcAft>
+              <a:buNone/>
+            </a:pPr>
+            <a:r>
+              <a:rPr lang="en-US" sz="4000" dirty="0">
+                <a:solidFill>
+                  <a:srgbClr val="111111"/>
+                </a:solidFill>
+                <a:latin typeface="Times New Roman" pitchFamily="34" charset="0"/>
+                <a:ea typeface="Times New Roman" pitchFamily="34" charset="-122"/>
+                <a:cs typeface="Times New Roman" pitchFamily="34" charset="-120"/>
+              </a:rPr>
+              <a:t>This lesson helps us to know how people live in hot deserts.</a:t>
+            </a:r>
+            <a:endParaRPr lang="en-US" sz="4000" dirty="0"/>
           </a:p>
         </p:txBody>
       </p:sp>
@@ -8650,9 +9496,48 @@
           </a:p>
         </p:txBody>
       </p:sp>
+      <p:sp>
+        <p:nvSpPr>
+          <p:cNvPr id="3" name="Text 1"/>
+          <p:cNvSpPr/>
+          <p:nvPr/>
+        </p:nvSpPr>
+        <p:spPr>
+          <a:xfrm>
+            <a:off x="457200" y="1005840"/>
+            <a:ext cx="11277295" cy="731520"/>
+          </a:xfrm>
+          <a:prstGeom prst="rect">
+            <a:avLst/>
+          </a:prstGeom>
+          <a:noFill/>
+          <a:ln/>
+        </p:spPr>
+        <p:txBody>
+          <a:bodyPr wrap="square" lIns="0" tIns="0" rIns="0" bIns="0" rtlCol="0" anchor="ctr"/>
+          <a:lstStyle/>
+          <a:p>
+            <a:pPr algn="ctr" indent="0" marL="0">
+              <a:buNone/>
+            </a:pPr>
+            <a:r>
+              <a:rPr lang="en-US" sz="3600" b="1" dirty="0">
+                <a:solidFill>
+                  <a:srgbClr val="990011"/>
+                </a:solidFill>
+                <a:latin typeface="Times New Roman" pitchFamily="34" charset="0"/>
+                <a:ea typeface="Times New Roman" pitchFamily="34" charset="-122"/>
+                <a:cs typeface="Times New Roman" pitchFamily="34" charset="-120"/>
+              </a:rPr>
+              <a:t>Activity 1</a:t>
+            </a:r>
+            <a:endParaRPr lang="en-US" sz="3600" dirty="0"/>
+          </a:p>
+        </p:txBody>
+      </p:sp>
       <p:pic>
         <p:nvPicPr>
-          <p:cNvPr id="3" name="Image 0" descr="/home/claude/f4/img/minesec_sheet.png">    </p:cNvPr>
+          <p:cNvPr id="4" name="Image 0" descr="/home/claude/f4/img/v2/f4_solar.jpg">    </p:cNvPr>
           <p:cNvPicPr>
             <a:picLocks noChangeAspect="1"/>
           </p:cNvPicPr>
@@ -8666,8 +9551,8 @@
         </p:blipFill>
         <p:spPr>
           <a:xfrm>
-            <a:off x="0" y="658368"/>
-            <a:ext cx="5120640" cy="5833872"/>
+            <a:off x="2246610" y="1783080"/>
+            <a:ext cx="7698475" cy="4270248"/>
           </a:xfrm>
           <a:prstGeom prst="rect">
             <a:avLst/>
@@ -8676,14 +9561,14 @@
       </p:pic>
       <p:sp>
         <p:nvSpPr>
-          <p:cNvPr id="4" name="Text 1"/>
+          <p:cNvPr id="5" name="Text 2"/>
           <p:cNvSpPr/>
           <p:nvPr/>
         </p:nvSpPr>
         <p:spPr>
           <a:xfrm>
-            <a:off x="5349240" y="1005840"/>
-            <a:ext cx="6522415" cy="731520"/>
+            <a:off x="457200" y="6089904"/>
+            <a:ext cx="11277295" cy="347472"/>
           </a:xfrm>
           <a:prstGeom prst="rect">
             <a:avLst/>
@@ -8692,68 +9577,24 @@
           <a:ln/>
         </p:spPr>
         <p:txBody>
-          <a:bodyPr wrap="square" lIns="0" tIns="0" rIns="0" bIns="0" rtlCol="0" anchor="ctr">
-            <a:normAutofit/>
-          </a:bodyPr>
+          <a:bodyPr wrap="square" lIns="0" tIns="0" rIns="0" bIns="0" rtlCol="0" anchor="ctr"/>
           <a:lstStyle/>
           <a:p>
             <a:pPr algn="ctr" indent="0" marL="0">
               <a:buNone/>
             </a:pPr>
             <a:r>
-              <a:rPr lang="en-US" sz="3600" b="1" dirty="0">
-                <a:solidFill>
-                  <a:srgbClr val="990011"/>
+              <a:rPr lang="en-US" sz="1800" i="1" dirty="0">
+                <a:solidFill>
+                  <a:srgbClr val="555555"/>
                 </a:solidFill>
                 <a:latin typeface="Times New Roman" pitchFamily="34" charset="0"/>
                 <a:ea typeface="Times New Roman" pitchFamily="34" charset="-122"/>
                 <a:cs typeface="Times New Roman" pitchFamily="34" charset="-120"/>
               </a:rPr>
-              <a:t>Activity 1: Question</a:t>
-            </a:r>
-            <a:endParaRPr lang="en-US" sz="3600" dirty="0"/>
-          </a:p>
-        </p:txBody>
-      </p:sp>
-      <p:sp>
-        <p:nvSpPr>
-          <p:cNvPr id="5" name="Text 2"/>
-          <p:cNvSpPr/>
-          <p:nvPr/>
-        </p:nvSpPr>
-        <p:spPr>
-          <a:xfrm>
-            <a:off x="5349240" y="1783080"/>
-            <a:ext cx="6522415" cy="4663440"/>
-          </a:xfrm>
-          <a:prstGeom prst="rect">
-            <a:avLst/>
-          </a:prstGeom>
-          <a:noFill/>
-          <a:ln/>
-        </p:spPr>
-        <p:txBody>
-          <a:bodyPr wrap="square" lIns="0" tIns="0" rIns="0" bIns="0" rtlCol="0" anchor="t"/>
-          <a:lstStyle/>
-          <a:p>
-            <a:pPr algn="l" indent="0" marL="0">
-              <a:spcAft>
-                <a:spcPts val="800"/>
-              </a:spcAft>
-              <a:buNone/>
-            </a:pPr>
-            <a:r>
-              <a:rPr lang="en-US" sz="4000" dirty="0">
-                <a:solidFill>
-                  <a:srgbClr val="111111"/>
-                </a:solidFill>
-                <a:latin typeface="Times New Roman" pitchFamily="34" charset="0"/>
-                <a:ea typeface="Times New Roman" pitchFamily="34" charset="-122"/>
-                <a:cs typeface="Times New Roman" pitchFamily="34" charset="-120"/>
-              </a:rPr>
-              <a:t>Why is the desert a good place for solar power?</a:t>
-            </a:r>
-            <a:endParaRPr lang="en-US" sz="4000" dirty="0"/>
+              <a:t>Solar panels in a sunny area.</a:t>
+            </a:r>
+            <a:endParaRPr lang="en-US" sz="1800" dirty="0"/>
           </a:p>
         </p:txBody>
       </p:sp>
@@ -8928,7 +9769,7 @@
                 <a:ea typeface="Times New Roman" pitchFamily="34" charset="-122"/>
                 <a:cs typeface="Times New Roman" pitchFamily="34" charset="-120"/>
               </a:rPr>
-              <a:t>Activity 1: Answer</a:t>
+              <a:t>Activity 1: Question</a:t>
             </a:r>
             <a:endParaRPr lang="en-US" sz="3600" dirty="0"/>
           </a:p>
@@ -8970,7 +9811,7 @@
                 <a:ea typeface="Times New Roman" pitchFamily="34" charset="-122"/>
                 <a:cs typeface="Times New Roman" pitchFamily="34" charset="-120"/>
               </a:rPr>
-              <a:t>The sun shines strongly almost every day.</a:t>
+              <a:t>Why is the desert a good place for solar power?</a:t>
             </a:r>
             <a:endParaRPr lang="en-US" sz="4000" dirty="0"/>
           </a:p>
@@ -9082,54 +9923,15 @@
                 <a:ea typeface="Calibri" pitchFamily="34" charset="-122"/>
                 <a:cs typeface="Calibri" pitchFamily="34" charset="-120"/>
               </a:rPr>
-              <a:t>2. CHALLENGES</a:t>
+              <a:t>1. RESOURCES</a:t>
             </a:r>
             <a:endParaRPr lang="en-US" sz="1400" dirty="0"/>
-          </a:p>
-        </p:txBody>
-      </p:sp>
-      <p:sp>
-        <p:nvSpPr>
-          <p:cNvPr id="3" name="Text 1"/>
-          <p:cNvSpPr/>
-          <p:nvPr/>
-        </p:nvSpPr>
-        <p:spPr>
-          <a:xfrm>
-            <a:off x="457200" y="1005840"/>
-            <a:ext cx="11277295" cy="731520"/>
-          </a:xfrm>
-          <a:prstGeom prst="rect">
-            <a:avLst/>
-          </a:prstGeom>
-          <a:noFill/>
-          <a:ln/>
-        </p:spPr>
-        <p:txBody>
-          <a:bodyPr wrap="square" lIns="0" tIns="0" rIns="0" bIns="0" rtlCol="0" anchor="ctr"/>
-          <a:lstStyle/>
-          <a:p>
-            <a:pPr algn="ctr" indent="0" marL="0">
-              <a:buNone/>
-            </a:pPr>
-            <a:r>
-              <a:rPr lang="en-US" sz="3600" b="1" dirty="0">
-                <a:solidFill>
-                  <a:srgbClr val="990011"/>
-                </a:solidFill>
-                <a:latin typeface="Times New Roman" pitchFamily="34" charset="0"/>
-                <a:ea typeface="Times New Roman" pitchFamily="34" charset="-122"/>
-                <a:cs typeface="Times New Roman" pitchFamily="34" charset="-120"/>
-              </a:rPr>
-              <a:t>Activity 2</a:t>
-            </a:r>
-            <a:endParaRPr lang="en-US" sz="3600" dirty="0"/>
           </a:p>
         </p:txBody>
       </p:sp>
       <p:pic>
         <p:nvPicPr>
-          <p:cNvPr id="4" name="Image 0" descr="/home/claude/f4/img/v2/f4_fetchwater.jpg">    </p:cNvPr>
+          <p:cNvPr id="3" name="Image 0" descr="/home/claude/f4/img/minesec_sheet.png">    </p:cNvPr>
           <p:cNvPicPr>
             <a:picLocks noChangeAspect="1"/>
           </p:cNvPicPr>
@@ -9143,8 +9945,8 @@
         </p:blipFill>
         <p:spPr>
           <a:xfrm>
-            <a:off x="2250369" y="1783080"/>
-            <a:ext cx="7690957" cy="4270248"/>
+            <a:off x="0" y="658368"/>
+            <a:ext cx="5120640" cy="5833872"/>
           </a:xfrm>
           <a:prstGeom prst="rect">
             <a:avLst/>
@@ -9153,14 +9955,14 @@
       </p:pic>
       <p:sp>
         <p:nvSpPr>
-          <p:cNvPr id="5" name="Text 2"/>
+          <p:cNvPr id="4" name="Text 1"/>
           <p:cNvSpPr/>
           <p:nvPr/>
         </p:nvSpPr>
         <p:spPr>
           <a:xfrm>
-            <a:off x="457200" y="6089904"/>
-            <a:ext cx="11277295" cy="347472"/>
+            <a:off x="5349240" y="1005840"/>
+            <a:ext cx="6522415" cy="731520"/>
           </a:xfrm>
           <a:prstGeom prst="rect">
             <a:avLst/>
@@ -9169,24 +9971,68 @@
           <a:ln/>
         </p:spPr>
         <p:txBody>
-          <a:bodyPr wrap="square" lIns="0" tIns="0" rIns="0" bIns="0" rtlCol="0" anchor="ctr"/>
+          <a:bodyPr wrap="square" lIns="0" tIns="0" rIns="0" bIns="0" rtlCol="0" anchor="ctr">
+            <a:normAutofit/>
+          </a:bodyPr>
           <a:lstStyle/>
           <a:p>
             <a:pPr algn="ctr" indent="0" marL="0">
               <a:buNone/>
             </a:pPr>
             <a:r>
-              <a:rPr lang="en-US" sz="1800" i="1" dirty="0">
-                <a:solidFill>
-                  <a:srgbClr val="555555"/>
+              <a:rPr lang="en-US" sz="3600" b="1" dirty="0">
+                <a:solidFill>
+                  <a:srgbClr val="990011"/>
                 </a:solidFill>
                 <a:latin typeface="Times New Roman" pitchFamily="34" charset="0"/>
                 <a:ea typeface="Times New Roman" pitchFamily="34" charset="-122"/>
                 <a:cs typeface="Times New Roman" pitchFamily="34" charset="-120"/>
               </a:rPr>
-              <a:t>Women carry water in the Sahel.</a:t>
-            </a:r>
-            <a:endParaRPr lang="en-US" sz="1800" dirty="0"/>
+              <a:t>Activity 1: Answer</a:t>
+            </a:r>
+            <a:endParaRPr lang="en-US" sz="3600" dirty="0"/>
+          </a:p>
+        </p:txBody>
+      </p:sp>
+      <p:sp>
+        <p:nvSpPr>
+          <p:cNvPr id="5" name="Text 2"/>
+          <p:cNvSpPr/>
+          <p:nvPr/>
+        </p:nvSpPr>
+        <p:spPr>
+          <a:xfrm>
+            <a:off x="5349240" y="1783080"/>
+            <a:ext cx="6522415" cy="4663440"/>
+          </a:xfrm>
+          <a:prstGeom prst="rect">
+            <a:avLst/>
+          </a:prstGeom>
+          <a:noFill/>
+          <a:ln/>
+        </p:spPr>
+        <p:txBody>
+          <a:bodyPr wrap="square" lIns="0" tIns="0" rIns="0" bIns="0" rtlCol="0" anchor="t"/>
+          <a:lstStyle/>
+          <a:p>
+            <a:pPr algn="l" indent="0" marL="0">
+              <a:spcAft>
+                <a:spcPts val="800"/>
+              </a:spcAft>
+              <a:buNone/>
+            </a:pPr>
+            <a:r>
+              <a:rPr lang="en-US" sz="4000" dirty="0">
+                <a:solidFill>
+                  <a:srgbClr val="111111"/>
+                </a:solidFill>
+                <a:latin typeface="Times New Roman" pitchFamily="34" charset="0"/>
+                <a:ea typeface="Times New Roman" pitchFamily="34" charset="-122"/>
+                <a:cs typeface="Times New Roman" pitchFamily="34" charset="-120"/>
+              </a:rPr>
+              <a:t>The Sun shines strongly almost every day.</a:t>
+            </a:r>
+            <a:endParaRPr lang="en-US" sz="4000" dirty="0"/>
           </a:p>
         </p:txBody>
       </p:sp>
@@ -9302,9 +10148,48 @@
           </a:p>
         </p:txBody>
       </p:sp>
+      <p:sp>
+        <p:nvSpPr>
+          <p:cNvPr id="3" name="Text 1"/>
+          <p:cNvSpPr/>
+          <p:nvPr/>
+        </p:nvSpPr>
+        <p:spPr>
+          <a:xfrm>
+            <a:off x="457200" y="1005840"/>
+            <a:ext cx="11277295" cy="731520"/>
+          </a:xfrm>
+          <a:prstGeom prst="rect">
+            <a:avLst/>
+          </a:prstGeom>
+          <a:noFill/>
+          <a:ln/>
+        </p:spPr>
+        <p:txBody>
+          <a:bodyPr wrap="square" lIns="0" tIns="0" rIns="0" bIns="0" rtlCol="0" anchor="ctr"/>
+          <a:lstStyle/>
+          <a:p>
+            <a:pPr algn="ctr" indent="0" marL="0">
+              <a:buNone/>
+            </a:pPr>
+            <a:r>
+              <a:rPr lang="en-US" sz="3600" b="1" dirty="0">
+                <a:solidFill>
+                  <a:srgbClr val="990011"/>
+                </a:solidFill>
+                <a:latin typeface="Times New Roman" pitchFamily="34" charset="0"/>
+                <a:ea typeface="Times New Roman" pitchFamily="34" charset="-122"/>
+                <a:cs typeface="Times New Roman" pitchFamily="34" charset="-120"/>
+              </a:rPr>
+              <a:t>Activity 2</a:t>
+            </a:r>
+            <a:endParaRPr lang="en-US" sz="3600" dirty="0"/>
+          </a:p>
+        </p:txBody>
+      </p:sp>
       <p:pic>
         <p:nvPicPr>
-          <p:cNvPr id="3" name="Image 0" descr="/home/claude/f4/img/minesec_sheet.png">    </p:cNvPr>
+          <p:cNvPr id="4" name="Image 0" descr="/home/claude/f4/img/v2/f4_fetchwater.jpg">    </p:cNvPr>
           <p:cNvPicPr>
             <a:picLocks noChangeAspect="1"/>
           </p:cNvPicPr>
@@ -9318,8 +10203,8 @@
         </p:blipFill>
         <p:spPr>
           <a:xfrm>
-            <a:off x="0" y="658368"/>
-            <a:ext cx="5120640" cy="5833872"/>
+            <a:off x="2250369" y="1783080"/>
+            <a:ext cx="7690957" cy="4270248"/>
           </a:xfrm>
           <a:prstGeom prst="rect">
             <a:avLst/>
@@ -9328,14 +10213,14 @@
       </p:pic>
       <p:sp>
         <p:nvSpPr>
-          <p:cNvPr id="4" name="Text 1"/>
+          <p:cNvPr id="5" name="Text 2"/>
           <p:cNvSpPr/>
           <p:nvPr/>
         </p:nvSpPr>
         <p:spPr>
           <a:xfrm>
-            <a:off x="5349240" y="1005840"/>
-            <a:ext cx="6522415" cy="731520"/>
+            <a:off x="457200" y="6089904"/>
+            <a:ext cx="11277295" cy="347472"/>
           </a:xfrm>
           <a:prstGeom prst="rect">
             <a:avLst/>
@@ -9344,68 +10229,24 @@
           <a:ln/>
         </p:spPr>
         <p:txBody>
-          <a:bodyPr wrap="square" lIns="0" tIns="0" rIns="0" bIns="0" rtlCol="0" anchor="ctr">
-            <a:normAutofit/>
-          </a:bodyPr>
+          <a:bodyPr wrap="square" lIns="0" tIns="0" rIns="0" bIns="0" rtlCol="0" anchor="ctr"/>
           <a:lstStyle/>
           <a:p>
             <a:pPr algn="ctr" indent="0" marL="0">
               <a:buNone/>
             </a:pPr>
             <a:r>
-              <a:rPr lang="en-US" sz="3600" b="1" dirty="0">
-                <a:solidFill>
-                  <a:srgbClr val="990011"/>
+              <a:rPr lang="en-US" sz="1800" i="1" dirty="0">
+                <a:solidFill>
+                  <a:srgbClr val="555555"/>
                 </a:solidFill>
                 <a:latin typeface="Times New Roman" pitchFamily="34" charset="0"/>
                 <a:ea typeface="Times New Roman" pitchFamily="34" charset="-122"/>
                 <a:cs typeface="Times New Roman" pitchFamily="34" charset="-120"/>
               </a:rPr>
-              <a:t>Activity 2: Question</a:t>
-            </a:r>
-            <a:endParaRPr lang="en-US" sz="3600" dirty="0"/>
-          </a:p>
-        </p:txBody>
-      </p:sp>
-      <p:sp>
-        <p:nvSpPr>
-          <p:cNvPr id="5" name="Text 2"/>
-          <p:cNvSpPr/>
-          <p:nvPr/>
-        </p:nvSpPr>
-        <p:spPr>
-          <a:xfrm>
-            <a:off x="5349240" y="1783080"/>
-            <a:ext cx="6522415" cy="4663440"/>
-          </a:xfrm>
-          <a:prstGeom prst="rect">
-            <a:avLst/>
-          </a:prstGeom>
-          <a:noFill/>
-          <a:ln/>
-        </p:spPr>
-        <p:txBody>
-          <a:bodyPr wrap="square" lIns="0" tIns="0" rIns="0" bIns="0" rtlCol="0" anchor="t"/>
-          <a:lstStyle/>
-          <a:p>
-            <a:pPr algn="l" indent="0" marL="0">
-              <a:spcAft>
-                <a:spcPts val="800"/>
-              </a:spcAft>
-              <a:buNone/>
-            </a:pPr>
-            <a:r>
-              <a:rPr lang="en-US" sz="4000" dirty="0">
-                <a:solidFill>
-                  <a:srgbClr val="111111"/>
-                </a:solidFill>
-                <a:latin typeface="Times New Roman" pitchFamily="34" charset="0"/>
-                <a:ea typeface="Times New Roman" pitchFamily="34" charset="-122"/>
-                <a:cs typeface="Times New Roman" pitchFamily="34" charset="-120"/>
-              </a:rPr>
-              <a:t>What is the biggest problem of people in dry areas?</a:t>
-            </a:r>
-            <a:endParaRPr lang="en-US" sz="4000" dirty="0"/>
+              <a:t>Women fetch water.</a:t>
+            </a:r>
+            <a:endParaRPr lang="en-US" sz="1800" dirty="0"/>
           </a:p>
         </p:txBody>
       </p:sp>
@@ -9580,7 +10421,7 @@
                 <a:ea typeface="Times New Roman" pitchFamily="34" charset="-122"/>
                 <a:cs typeface="Times New Roman" pitchFamily="34" charset="-120"/>
               </a:rPr>
-              <a:t>Activity 2: Answer</a:t>
+              <a:t>Activity 2: Question</a:t>
             </a:r>
             <a:endParaRPr lang="en-US" sz="3600" dirty="0"/>
           </a:p>
@@ -9622,7 +10463,7 @@
                 <a:ea typeface="Times New Roman" pitchFamily="34" charset="-122"/>
                 <a:cs typeface="Times New Roman" pitchFamily="34" charset="-120"/>
               </a:rPr>
-              <a:t>The lack of water.</a:t>
+              <a:t>What is the biggest problem of people in dry areas?</a:t>
             </a:r>
             <a:endParaRPr lang="en-US" sz="4000" dirty="0"/>
           </a:p>
@@ -9734,54 +10575,15 @@
                 <a:ea typeface="Calibri" pitchFamily="34" charset="-122"/>
                 <a:cs typeface="Calibri" pitchFamily="34" charset="-120"/>
               </a:rPr>
-              <a:t>3. ADAPTATIONS</a:t>
+              <a:t>2. CHALLENGES</a:t>
             </a:r>
             <a:endParaRPr lang="en-US" sz="1400" dirty="0"/>
-          </a:p>
-        </p:txBody>
-      </p:sp>
-      <p:sp>
-        <p:nvSpPr>
-          <p:cNvPr id="3" name="Text 1"/>
-          <p:cNvSpPr/>
-          <p:nvPr/>
-        </p:nvSpPr>
-        <p:spPr>
-          <a:xfrm>
-            <a:off x="457200" y="1005840"/>
-            <a:ext cx="11277295" cy="731520"/>
-          </a:xfrm>
-          <a:prstGeom prst="rect">
-            <a:avLst/>
-          </a:prstGeom>
-          <a:noFill/>
-          <a:ln/>
-        </p:spPr>
-        <p:txBody>
-          <a:bodyPr wrap="square" lIns="0" tIns="0" rIns="0" bIns="0" rtlCol="0" anchor="ctr"/>
-          <a:lstStyle/>
-          <a:p>
-            <a:pPr algn="ctr" indent="0" marL="0">
-              <a:buNone/>
-            </a:pPr>
-            <a:r>
-              <a:rPr lang="en-US" sz="3600" b="1" dirty="0">
-                <a:solidFill>
-                  <a:srgbClr val="990011"/>
-                </a:solidFill>
-                <a:latin typeface="Times New Roman" pitchFamily="34" charset="0"/>
-                <a:ea typeface="Times New Roman" pitchFamily="34" charset="-122"/>
-                <a:cs typeface="Times New Roman" pitchFamily="34" charset="-120"/>
-              </a:rPr>
-              <a:t>Activity 3</a:t>
-            </a:r>
-            <a:endParaRPr lang="en-US" sz="3600" dirty="0"/>
           </a:p>
         </p:txBody>
       </p:sp>
       <p:pic>
         <p:nvPicPr>
-          <p:cNvPr id="4" name="Image 0" descr="/home/claude/f4/img/v2/f2t_tree_planting_sahel.jpg">    </p:cNvPr>
+          <p:cNvPr id="3" name="Image 0" descr="/home/claude/f4/img/minesec_sheet.png">    </p:cNvPr>
           <p:cNvPicPr>
             <a:picLocks noChangeAspect="1"/>
           </p:cNvPicPr>
@@ -9795,8 +10597,8 @@
         </p:blipFill>
         <p:spPr>
           <a:xfrm>
-            <a:off x="2246610" y="1783080"/>
-            <a:ext cx="7698475" cy="4270248"/>
+            <a:off x="0" y="658368"/>
+            <a:ext cx="5120640" cy="5833872"/>
           </a:xfrm>
           <a:prstGeom prst="rect">
             <a:avLst/>
@@ -9805,14 +10607,14 @@
       </p:pic>
       <p:sp>
         <p:nvSpPr>
-          <p:cNvPr id="5" name="Text 2"/>
+          <p:cNvPr id="4" name="Text 1"/>
           <p:cNvSpPr/>
           <p:nvPr/>
         </p:nvSpPr>
         <p:spPr>
           <a:xfrm>
-            <a:off x="457200" y="6089904"/>
-            <a:ext cx="11277295" cy="347472"/>
+            <a:off x="5349240" y="1005840"/>
+            <a:ext cx="6522415" cy="731520"/>
           </a:xfrm>
           <a:prstGeom prst="rect">
             <a:avLst/>
@@ -9821,24 +10623,68 @@
           <a:ln/>
         </p:spPr>
         <p:txBody>
-          <a:bodyPr wrap="square" lIns="0" tIns="0" rIns="0" bIns="0" rtlCol="0" anchor="ctr"/>
+          <a:bodyPr wrap="square" lIns="0" tIns="0" rIns="0" bIns="0" rtlCol="0" anchor="ctr">
+            <a:normAutofit/>
+          </a:bodyPr>
           <a:lstStyle/>
           <a:p>
             <a:pPr algn="ctr" indent="0" marL="0">
               <a:buNone/>
             </a:pPr>
             <a:r>
-              <a:rPr lang="en-US" sz="1800" i="1" dirty="0">
-                <a:solidFill>
-                  <a:srgbClr val="555555"/>
+              <a:rPr lang="en-US" sz="3600" b="1" dirty="0">
+                <a:solidFill>
+                  <a:srgbClr val="990011"/>
                 </a:solidFill>
                 <a:latin typeface="Times New Roman" pitchFamily="34" charset="0"/>
                 <a:ea typeface="Times New Roman" pitchFamily="34" charset="-122"/>
                 <a:cs typeface="Times New Roman" pitchFamily="34" charset="-120"/>
               </a:rPr>
-              <a:t>Young trees planted in rows.</a:t>
-            </a:r>
-            <a:endParaRPr lang="en-US" sz="1800" dirty="0"/>
+              <a:t>Activity 2: Answer</a:t>
+            </a:r>
+            <a:endParaRPr lang="en-US" sz="3600" dirty="0"/>
+          </a:p>
+        </p:txBody>
+      </p:sp>
+      <p:sp>
+        <p:nvSpPr>
+          <p:cNvPr id="5" name="Text 2"/>
+          <p:cNvSpPr/>
+          <p:nvPr/>
+        </p:nvSpPr>
+        <p:spPr>
+          <a:xfrm>
+            <a:off x="5349240" y="1783080"/>
+            <a:ext cx="6522415" cy="4663440"/>
+          </a:xfrm>
+          <a:prstGeom prst="rect">
+            <a:avLst/>
+          </a:prstGeom>
+          <a:noFill/>
+          <a:ln/>
+        </p:spPr>
+        <p:txBody>
+          <a:bodyPr wrap="square" lIns="0" tIns="0" rIns="0" bIns="0" rtlCol="0" anchor="t"/>
+          <a:lstStyle/>
+          <a:p>
+            <a:pPr algn="l" indent="0" marL="0">
+              <a:spcAft>
+                <a:spcPts val="800"/>
+              </a:spcAft>
+              <a:buNone/>
+            </a:pPr>
+            <a:r>
+              <a:rPr lang="en-US" sz="4000" dirty="0">
+                <a:solidFill>
+                  <a:srgbClr val="111111"/>
+                </a:solidFill>
+                <a:latin typeface="Times New Roman" pitchFamily="34" charset="0"/>
+                <a:ea typeface="Times New Roman" pitchFamily="34" charset="-122"/>
+                <a:cs typeface="Times New Roman" pitchFamily="34" charset="-120"/>
+              </a:rPr>
+              <a:t>The lack of water.</a:t>
+            </a:r>
+            <a:endParaRPr lang="en-US" sz="4000" dirty="0"/>
           </a:p>
         </p:txBody>
       </p:sp>
@@ -9954,9 +10800,48 @@
           </a:p>
         </p:txBody>
       </p:sp>
+      <p:sp>
+        <p:nvSpPr>
+          <p:cNvPr id="3" name="Text 1"/>
+          <p:cNvSpPr/>
+          <p:nvPr/>
+        </p:nvSpPr>
+        <p:spPr>
+          <a:xfrm>
+            <a:off x="457200" y="1005840"/>
+            <a:ext cx="11277295" cy="731520"/>
+          </a:xfrm>
+          <a:prstGeom prst="rect">
+            <a:avLst/>
+          </a:prstGeom>
+          <a:noFill/>
+          <a:ln/>
+        </p:spPr>
+        <p:txBody>
+          <a:bodyPr wrap="square" lIns="0" tIns="0" rIns="0" bIns="0" rtlCol="0" anchor="ctr"/>
+          <a:lstStyle/>
+          <a:p>
+            <a:pPr algn="ctr" indent="0" marL="0">
+              <a:buNone/>
+            </a:pPr>
+            <a:r>
+              <a:rPr lang="en-US" sz="3600" b="1" dirty="0">
+                <a:solidFill>
+                  <a:srgbClr val="990011"/>
+                </a:solidFill>
+                <a:latin typeface="Times New Roman" pitchFamily="34" charset="0"/>
+                <a:ea typeface="Times New Roman" pitchFamily="34" charset="-122"/>
+                <a:cs typeface="Times New Roman" pitchFamily="34" charset="-120"/>
+              </a:rPr>
+              <a:t>Activity 3</a:t>
+            </a:r>
+            <a:endParaRPr lang="en-US" sz="3600" dirty="0"/>
+          </a:p>
+        </p:txBody>
+      </p:sp>
       <p:pic>
         <p:nvPicPr>
-          <p:cNvPr id="3" name="Image 0" descr="/home/claude/f4/img/minesec_sheet.png">    </p:cNvPr>
+          <p:cNvPr id="4" name="Image 0" descr="/home/claude/f4/img/v2/f2t_tuareg.jpg">    </p:cNvPr>
           <p:cNvPicPr>
             <a:picLocks noChangeAspect="1"/>
           </p:cNvPicPr>
@@ -9970,8 +10855,8 @@
         </p:blipFill>
         <p:spPr>
           <a:xfrm>
-            <a:off x="0" y="658368"/>
-            <a:ext cx="5120640" cy="5833872"/>
+            <a:off x="2250369" y="1783080"/>
+            <a:ext cx="7690957" cy="4270248"/>
           </a:xfrm>
           <a:prstGeom prst="rect">
             <a:avLst/>
@@ -9980,14 +10865,14 @@
       </p:pic>
       <p:sp>
         <p:nvSpPr>
-          <p:cNvPr id="4" name="Text 1"/>
+          <p:cNvPr id="5" name="Text 2"/>
           <p:cNvSpPr/>
           <p:nvPr/>
         </p:nvSpPr>
         <p:spPr>
           <a:xfrm>
-            <a:off x="5349240" y="1005840"/>
-            <a:ext cx="6522415" cy="731520"/>
+            <a:off x="457200" y="6089904"/>
+            <a:ext cx="11277295" cy="347472"/>
           </a:xfrm>
           <a:prstGeom prst="rect">
             <a:avLst/>
@@ -9996,68 +10881,24 @@
           <a:ln/>
         </p:spPr>
         <p:txBody>
-          <a:bodyPr wrap="square" lIns="0" tIns="0" rIns="0" bIns="0" rtlCol="0" anchor="ctr">
-            <a:normAutofit/>
-          </a:bodyPr>
+          <a:bodyPr wrap="square" lIns="0" tIns="0" rIns="0" bIns="0" rtlCol="0" anchor="ctr"/>
           <a:lstStyle/>
           <a:p>
             <a:pPr algn="ctr" indent="0" marL="0">
               <a:buNone/>
             </a:pPr>
             <a:r>
-              <a:rPr lang="en-US" sz="3600" b="1" dirty="0">
-                <a:solidFill>
-                  <a:srgbClr val="990011"/>
+              <a:rPr lang="en-US" sz="1800" i="1" dirty="0">
+                <a:solidFill>
+                  <a:srgbClr val="555555"/>
                 </a:solidFill>
                 <a:latin typeface="Times New Roman" pitchFamily="34" charset="0"/>
                 <a:ea typeface="Times New Roman" pitchFamily="34" charset="-122"/>
                 <a:cs typeface="Times New Roman" pitchFamily="34" charset="-120"/>
               </a:rPr>
-              <a:t>Activity 3: Question</a:t>
-            </a:r>
-            <a:endParaRPr lang="en-US" sz="3600" dirty="0"/>
-          </a:p>
-        </p:txBody>
-      </p:sp>
-      <p:sp>
-        <p:nvSpPr>
-          <p:cNvPr id="5" name="Text 2"/>
-          <p:cNvSpPr/>
-          <p:nvPr/>
-        </p:nvSpPr>
-        <p:spPr>
-          <a:xfrm>
-            <a:off x="5349240" y="1783080"/>
-            <a:ext cx="6522415" cy="4663440"/>
-          </a:xfrm>
-          <a:prstGeom prst="rect">
-            <a:avLst/>
-          </a:prstGeom>
-          <a:noFill/>
-          <a:ln/>
-        </p:spPr>
-        <p:txBody>
-          <a:bodyPr wrap="square" lIns="0" tIns="0" rIns="0" bIns="0" rtlCol="0" anchor="t"/>
-          <a:lstStyle/>
-          <a:p>
-            <a:pPr algn="l" indent="0" marL="0">
-              <a:spcAft>
-                <a:spcPts val="800"/>
-              </a:spcAft>
-              <a:buNone/>
-            </a:pPr>
-            <a:r>
-              <a:rPr lang="en-US" sz="4000" dirty="0">
-                <a:solidFill>
-                  <a:srgbClr val="111111"/>
-                </a:solidFill>
-                <a:latin typeface="Times New Roman" pitchFamily="34" charset="0"/>
-                <a:ea typeface="Times New Roman" pitchFamily="34" charset="-122"/>
-                <a:cs typeface="Times New Roman" pitchFamily="34" charset="-120"/>
-              </a:rPr>
-              <a:t>How does planting trees help against the desert?</a:t>
-            </a:r>
-            <a:endParaRPr lang="en-US" sz="4000" dirty="0"/>
+              <a:t>Tuareg people in the Sahara.</a:t>
+            </a:r>
+            <a:endParaRPr lang="en-US" sz="1800" dirty="0"/>
           </a:p>
         </p:txBody>
       </p:sp>
@@ -10232,7 +11073,7 @@
                 <a:ea typeface="Times New Roman" pitchFamily="34" charset="-122"/>
                 <a:cs typeface="Times New Roman" pitchFamily="34" charset="-120"/>
               </a:rPr>
-              <a:t>Activity 3: Answer</a:t>
+              <a:t>Activity 3: Question</a:t>
             </a:r>
             <a:endParaRPr lang="en-US" sz="3600" dirty="0"/>
           </a:p>
@@ -10274,7 +11115,7 @@
                 <a:ea typeface="Times New Roman" pitchFamily="34" charset="-122"/>
                 <a:cs typeface="Times New Roman" pitchFamily="34" charset="-120"/>
               </a:rPr>
-              <a:t>Trees hold the soil and stop the desert from spreading.</a:t>
+              <a:t>Why do these people wear long, loose clothes and cover their heads?</a:t>
             </a:r>
             <a:endParaRPr lang="en-US" sz="4000" dirty="0"/>
           </a:p>
@@ -10386,7 +11227,7 @@
                 <a:ea typeface="Calibri" pitchFamily="34" charset="-122"/>
                 <a:cs typeface="Calibri" pitchFamily="34" charset="-120"/>
               </a:rPr>
-              <a:t>BOARD SUMMARY</a:t>
+              <a:t>3. ADAPTATIONS</a:t>
             </a:r>
             <a:endParaRPr lang="en-US" sz="1400" dirty="0"/>
           </a:p>
@@ -10451,7 +11292,7 @@
                 <a:ea typeface="Times New Roman" pitchFamily="34" charset="-122"/>
                 <a:cs typeface="Times New Roman" pitchFamily="34" charset="-120"/>
               </a:rPr>
-              <a:t>Board Summary</a:t>
+              <a:t>Activity 3: Answer</a:t>
             </a:r>
             <a:endParaRPr lang="en-US" sz="3600" dirty="0"/>
           </a:p>
@@ -10485,7 +11326,7 @@
               <a:buNone/>
             </a:pPr>
             <a:r>
-              <a:rPr lang="en-US" sz="4000" b="1" dirty="0">
+              <a:rPr lang="en-US" sz="4000" dirty="0">
                 <a:solidFill>
                   <a:srgbClr val="111111"/>
                 </a:solidFill>
@@ -10493,47 +11334,7 @@
                 <a:ea typeface="Times New Roman" pitchFamily="34" charset="-122"/>
                 <a:cs typeface="Times New Roman" pitchFamily="34" charset="-120"/>
               </a:rPr>
-              <a:t>Topic: Denudation Processes, Landforms and Impacts on Man</a:t>
-            </a:r>
-            <a:endParaRPr lang="en-US" sz="4000" dirty="0"/>
-          </a:p>
-          <a:p>
-            <a:pPr algn="l" indent="0" marL="0">
-              <a:spcAft>
-                <a:spcPts val="800"/>
-              </a:spcAft>
-              <a:buNone/>
-            </a:pPr>
-            <a:r>
-              <a:rPr lang="en-US" sz="4000" b="1" dirty="0">
-                <a:solidFill>
-                  <a:srgbClr val="111111"/>
-                </a:solidFill>
-                <a:latin typeface="Times New Roman" pitchFamily="34" charset="0"/>
-                <a:ea typeface="Times New Roman" pitchFamily="34" charset="-122"/>
-                <a:cs typeface="Times New Roman" pitchFamily="34" charset="-120"/>
-              </a:rPr>
-              <a:t>Sub-topic: Hot Desert Landscapes: Wind Action and Human Adaptation</a:t>
-            </a:r>
-            <a:endParaRPr lang="en-US" sz="4000" dirty="0"/>
-          </a:p>
-          <a:p>
-            <a:pPr algn="l" indent="0" marL="0">
-              <a:spcAft>
-                <a:spcPts val="800"/>
-              </a:spcAft>
-              <a:buNone/>
-            </a:pPr>
-            <a:r>
-              <a:rPr lang="en-US" sz="4000" b="1" dirty="0">
-                <a:solidFill>
-                  <a:srgbClr val="990011"/>
-                </a:solidFill>
-                <a:latin typeface="Times New Roman" pitchFamily="34" charset="0"/>
-                <a:ea typeface="Times New Roman" pitchFamily="34" charset="-122"/>
-                <a:cs typeface="Times New Roman" pitchFamily="34" charset="-120"/>
-              </a:rPr>
-              <a:t>Lesson 29: Man in the Hot Desert Environments</a:t>
+              <a:t>To protect themselves from the Sun, the heat and the sand.</a:t>
             </a:r>
             <a:endParaRPr lang="en-US" sz="4000" dirty="0"/>
           </a:p>
@@ -10668,7 +11469,7 @@
         <p:spPr>
           <a:xfrm>
             <a:off x="0" y="658368"/>
-            <a:ext cx="2468880" cy="5833872"/>
+            <a:ext cx="5120640" cy="5833872"/>
           </a:xfrm>
           <a:prstGeom prst="rect">
             <a:avLst/>
@@ -10683,8 +11484,8 @@
         </p:nvSpPr>
         <p:spPr>
           <a:xfrm>
-            <a:off x="2697480" y="1005840"/>
-            <a:ext cx="9174175" cy="731520"/>
+            <a:off x="5349240" y="1005840"/>
+            <a:ext cx="6522415" cy="731520"/>
           </a:xfrm>
           <a:prstGeom prst="rect">
             <a:avLst/>
@@ -10710,7 +11511,7 @@
                 <a:ea typeface="Times New Roman" pitchFamily="34" charset="-122"/>
                 <a:cs typeface="Times New Roman" pitchFamily="34" charset="-120"/>
               </a:rPr>
-              <a:t>1. Resources of Hot Deserts</a:t>
+              <a:t>Board Summary</a:t>
             </a:r>
             <a:endParaRPr lang="en-US" sz="3600" dirty="0"/>
           </a:p>
@@ -10724,8 +11525,8 @@
         </p:nvSpPr>
         <p:spPr>
           <a:xfrm>
-            <a:off x="2697480" y="1783080"/>
-            <a:ext cx="9174175" cy="4663440"/>
+            <a:off x="5349240" y="1783080"/>
+            <a:ext cx="6522415" cy="4663440"/>
           </a:xfrm>
           <a:prstGeom prst="rect">
             <a:avLst/>
@@ -10744,7 +11545,7 @@
               <a:buNone/>
             </a:pPr>
             <a:r>
-              <a:rPr lang="en-US" sz="4000" i="1" dirty="0">
+              <a:rPr lang="en-US" sz="3200" b="1" dirty="0">
                 <a:solidFill>
                   <a:srgbClr val="111111"/>
                 </a:solidFill>
@@ -10752,9 +11553,9 @@
                 <a:ea typeface="Times New Roman" pitchFamily="34" charset="-122"/>
                 <a:cs typeface="Times New Roman" pitchFamily="34" charset="-120"/>
               </a:rPr>
-              <a:t>Hot deserts have the following resources:</a:t>
-            </a:r>
-            <a:endParaRPr lang="en-US" sz="4000" dirty="0"/>
+              <a:t>Topic: Denudation Processes, Landforms and Impacts on Man</a:t>
+            </a:r>
+            <a:endParaRPr lang="en-US" sz="3200" dirty="0"/>
           </a:p>
           <a:p>
             <a:pPr algn="l" indent="0" marL="0">
@@ -10764,7 +11565,7 @@
               <a:buNone/>
             </a:pPr>
             <a:r>
-              <a:rPr lang="en-US" sz="4000" b="1" dirty="0">
+              <a:rPr lang="en-US" sz="3200" b="1" dirty="0">
                 <a:solidFill>
                   <a:srgbClr val="111111"/>
                 </a:solidFill>
@@ -10772,8 +11573,11 @@
                 <a:ea typeface="Times New Roman" pitchFamily="34" charset="-122"/>
                 <a:cs typeface="Times New Roman" pitchFamily="34" charset="-120"/>
               </a:rPr>
-              <a:t>Minerals: </a:t>
-            </a:r>
+              <a:t>Sub-topic: Hot Desert Landscapes: Wind Action and Human Adaptation</a:t>
+            </a:r>
+            <a:endParaRPr lang="en-US" sz="3200" dirty="0"/>
+          </a:p>
+          <a:p>
             <a:pPr algn="l" indent="0" marL="0">
               <a:spcAft>
                 <a:spcPts val="800"/>
@@ -10781,54 +11585,17 @@
               <a:buNone/>
             </a:pPr>
             <a:r>
-              <a:rPr lang="en-US" sz="4000" dirty="0">
-                <a:solidFill>
-                  <a:srgbClr val="111111"/>
+              <a:rPr lang="en-US" sz="3200" b="1" dirty="0">
+                <a:solidFill>
+                  <a:srgbClr val="990011"/>
                 </a:solidFill>
                 <a:latin typeface="Times New Roman" pitchFamily="34" charset="0"/>
                 <a:ea typeface="Times New Roman" pitchFamily="34" charset="-122"/>
                 <a:cs typeface="Times New Roman" pitchFamily="34" charset="-120"/>
               </a:rPr>
-              <a:t>Deserts contain oil in Algeria and Libya and uranium in Niger.</a:t>
-            </a:r>
-            <a:endParaRPr lang="en-US" sz="4000" dirty="0"/>
-          </a:p>
-          <a:p>
-            <a:pPr algn="l" indent="0" marL="0">
-              <a:spcAft>
-                <a:spcPts val="800"/>
-              </a:spcAft>
-              <a:buNone/>
-            </a:pPr>
-            <a:r>
-              <a:rPr lang="en-US" sz="4000" b="1" dirty="0">
-                <a:solidFill>
-                  <a:srgbClr val="111111"/>
-                </a:solidFill>
-                <a:latin typeface="Times New Roman" pitchFamily="34" charset="0"/>
-                <a:ea typeface="Times New Roman" pitchFamily="34" charset="-122"/>
-                <a:cs typeface="Times New Roman" pitchFamily="34" charset="-120"/>
-              </a:rPr>
-              <a:t>Solar energy: </a:t>
-            </a:r>
-            <a:pPr algn="l" indent="0" marL="0">
-              <a:spcAft>
-                <a:spcPts val="800"/>
-              </a:spcAft>
-              <a:buNone/>
-            </a:pPr>
-            <a:r>
-              <a:rPr lang="en-US" sz="4000" dirty="0">
-                <a:solidFill>
-                  <a:srgbClr val="111111"/>
-                </a:solidFill>
-                <a:latin typeface="Times New Roman" pitchFamily="34" charset="0"/>
-                <a:ea typeface="Times New Roman" pitchFamily="34" charset="-122"/>
-                <a:cs typeface="Times New Roman" pitchFamily="34" charset="-120"/>
-              </a:rPr>
-              <a:t>Strong sunshine is used for solar power, as in Morocco.</a:t>
-            </a:r>
-            <a:endParaRPr lang="en-US" sz="4000" dirty="0"/>
+              <a:t>Lesson 29: Man in the Hot Desert Environments</a:t>
+            </a:r>
+            <a:endParaRPr lang="en-US" sz="3200" dirty="0"/>
           </a:p>
         </p:txBody>
       </p:sp>
@@ -12012,7 +12779,7 @@
                 <a:ea typeface="Times New Roman" pitchFamily="34" charset="-122"/>
                 <a:cs typeface="Times New Roman" pitchFamily="34" charset="-120"/>
               </a:rPr>
-              <a:t>1. Resources of Hot Deserts (continued)</a:t>
+              <a:t>DEFINITIONS</a:t>
             </a:r>
             <a:endParaRPr lang="en-US" sz="3600" dirty="0"/>
           </a:p>
@@ -12046,7 +12813,7 @@
               <a:buNone/>
             </a:pPr>
             <a:r>
-              <a:rPr lang="en-US" sz="4000" b="1" dirty="0">
+              <a:rPr lang="en-US" sz="4000" i="1" dirty="0">
                 <a:solidFill>
                   <a:srgbClr val="111111"/>
                 </a:solidFill>
@@ -12054,8 +12821,11 @@
                 <a:ea typeface="Times New Roman" pitchFamily="34" charset="-122"/>
                 <a:cs typeface="Times New Roman" pitchFamily="34" charset="-120"/>
               </a:rPr>
-              <a:t>Water: </a:t>
-            </a:r>
+              <a:t>The key terms of this lesson are defined as follows:</a:t>
+            </a:r>
+            <a:endParaRPr lang="en-US" sz="4000" dirty="0"/>
+          </a:p>
+          <a:p>
             <a:pPr algn="l" indent="0" marL="0">
               <a:spcAft>
                 <a:spcPts val="800"/>
@@ -12063,7 +12833,7 @@
               <a:buNone/>
             </a:pPr>
             <a:r>
-              <a:rPr lang="en-US" sz="4000" dirty="0">
+              <a:rPr lang="en-US" sz="4000" b="1" dirty="0">
                 <a:solidFill>
                   <a:srgbClr val="111111"/>
                 </a:solidFill>
@@ -12071,11 +12841,8 @@
                 <a:ea typeface="Times New Roman" pitchFamily="34" charset="-122"/>
                 <a:cs typeface="Times New Roman" pitchFamily="34" charset="-120"/>
               </a:rPr>
-              <a:t>Oases and wells provide water for people and crops.</a:t>
-            </a:r>
-            <a:endParaRPr lang="en-US" sz="4000" dirty="0"/>
-          </a:p>
-          <a:p>
+              <a:t>Resource: </a:t>
+            </a:r>
             <a:pPr algn="l" indent="0" marL="0">
               <a:spcAft>
                 <a:spcPts val="800"/>
@@ -12083,7 +12850,7 @@
               <a:buNone/>
             </a:pPr>
             <a:r>
-              <a:rPr lang="en-US" sz="4000" b="1" dirty="0">
+              <a:rPr lang="en-US" sz="4000" dirty="0">
                 <a:solidFill>
                   <a:srgbClr val="111111"/>
                 </a:solidFill>
@@ -12091,8 +12858,11 @@
                 <a:ea typeface="Times New Roman" pitchFamily="34" charset="-122"/>
                 <a:cs typeface="Times New Roman" pitchFamily="34" charset="-120"/>
               </a:rPr>
-              <a:t>Tourism: </a:t>
-            </a:r>
+              <a:t>It is anything in nature that people can use.</a:t>
+            </a:r>
+            <a:endParaRPr lang="en-US" sz="4000" dirty="0"/>
+          </a:p>
+          <a:p>
             <a:pPr algn="l" indent="0" marL="0">
               <a:spcAft>
                 <a:spcPts val="800"/>
@@ -12100,7 +12870,7 @@
               <a:buNone/>
             </a:pPr>
             <a:r>
-              <a:rPr lang="en-US" sz="4000" dirty="0">
+              <a:rPr lang="en-US" sz="4000" b="1" dirty="0">
                 <a:solidFill>
                   <a:srgbClr val="111111"/>
                 </a:solidFill>
@@ -12108,7 +12878,24 @@
                 <a:ea typeface="Times New Roman" pitchFamily="34" charset="-122"/>
                 <a:cs typeface="Times New Roman" pitchFamily="34" charset="-120"/>
               </a:rPr>
-              <a:t>Dunes and ancient monuments attract tourists.</a:t>
+              <a:t>Hazard: </a:t>
+            </a:r>
+            <a:pPr algn="l" indent="0" marL="0">
+              <a:spcAft>
+                <a:spcPts val="800"/>
+              </a:spcAft>
+              <a:buNone/>
+            </a:pPr>
+            <a:r>
+              <a:rPr lang="en-US" sz="4000" dirty="0">
+                <a:solidFill>
+                  <a:srgbClr val="111111"/>
+                </a:solidFill>
+                <a:latin typeface="Times New Roman" pitchFamily="34" charset="0"/>
+                <a:ea typeface="Times New Roman" pitchFamily="34" charset="-122"/>
+                <a:cs typeface="Times New Roman" pitchFamily="34" charset="-120"/>
+              </a:rPr>
+              <a:t>It is an event or condition that can harm people and property.</a:t>
             </a:r>
             <a:endParaRPr lang="en-US" sz="4000" dirty="0"/>
           </a:p>
@@ -12243,7 +13030,7 @@
         <p:spPr>
           <a:xfrm>
             <a:off x="0" y="658368"/>
-            <a:ext cx="3840480" cy="5833872"/>
+            <a:ext cx="5120640" cy="5833872"/>
           </a:xfrm>
           <a:prstGeom prst="rect">
             <a:avLst/>
@@ -12258,8 +13045,8 @@
         </p:nvSpPr>
         <p:spPr>
           <a:xfrm>
-            <a:off x="4069080" y="1005840"/>
-            <a:ext cx="7802575" cy="731520"/>
+            <a:off x="5349240" y="1005840"/>
+            <a:ext cx="6522415" cy="731520"/>
           </a:xfrm>
           <a:prstGeom prst="rect">
             <a:avLst/>
@@ -12285,7 +13072,7 @@
                 <a:ea typeface="Times New Roman" pitchFamily="34" charset="-122"/>
                 <a:cs typeface="Times New Roman" pitchFamily="34" charset="-120"/>
               </a:rPr>
-              <a:t>2. Challenges of Hot Deserts</a:t>
+              <a:t>DEFINITIONS (continued)</a:t>
             </a:r>
             <a:endParaRPr lang="en-US" sz="3600" dirty="0"/>
           </a:p>
@@ -12299,8 +13086,8 @@
         </p:nvSpPr>
         <p:spPr>
           <a:xfrm>
-            <a:off x="4069080" y="1783080"/>
-            <a:ext cx="7802575" cy="4663440"/>
+            <a:off x="5349240" y="1783080"/>
+            <a:ext cx="6522415" cy="4663440"/>
           </a:xfrm>
           <a:prstGeom prst="rect">
             <a:avLst/>
@@ -12319,7 +13106,7 @@
               <a:buNone/>
             </a:pPr>
             <a:r>
-              <a:rPr lang="en-US" sz="4000" i="1" dirty="0">
+              <a:rPr lang="en-US" sz="4000" b="1" dirty="0">
                 <a:solidFill>
                   <a:srgbClr val="111111"/>
                 </a:solidFill>
@@ -12327,11 +13114,8 @@
                 <a:ea typeface="Times New Roman" pitchFamily="34" charset="-122"/>
                 <a:cs typeface="Times New Roman" pitchFamily="34" charset="-120"/>
               </a:rPr>
-              <a:t>People in hot deserts face the following challenges:</a:t>
-            </a:r>
-            <a:endParaRPr lang="en-US" sz="4000" dirty="0"/>
-          </a:p>
-          <a:p>
+              <a:t>Adaptation: </a:t>
+            </a:r>
             <a:pPr algn="l" indent="0" marL="0">
               <a:spcAft>
                 <a:spcPts val="800"/>
@@ -12339,7 +13123,7 @@
               <a:buNone/>
             </a:pPr>
             <a:r>
-              <a:rPr lang="en-US" sz="4000" b="1" dirty="0">
+              <a:rPr lang="en-US" sz="4000" dirty="0">
                 <a:solidFill>
                   <a:srgbClr val="111111"/>
                 </a:solidFill>
@@ -12347,61 +13131,7 @@
                 <a:ea typeface="Times New Roman" pitchFamily="34" charset="-122"/>
                 <a:cs typeface="Times New Roman" pitchFamily="34" charset="-120"/>
               </a:rPr>
-              <a:t>Extreme temperatures: </a:t>
-            </a:r>
-            <a:pPr algn="l" indent="0" marL="0">
-              <a:spcAft>
-                <a:spcPts val="800"/>
-              </a:spcAft>
-              <a:buNone/>
-            </a:pPr>
-            <a:r>
-              <a:rPr lang="en-US" sz="4000" dirty="0">
-                <a:solidFill>
-                  <a:srgbClr val="111111"/>
-                </a:solidFill>
-                <a:latin typeface="Times New Roman" pitchFamily="34" charset="0"/>
-                <a:ea typeface="Times New Roman" pitchFamily="34" charset="-122"/>
-                <a:cs typeface="Times New Roman" pitchFamily="34" charset="-120"/>
-              </a:rPr>
-              <a:t>Days are very hot and nights are cold.</a:t>
-            </a:r>
-            <a:endParaRPr lang="en-US" sz="4000" dirty="0"/>
-          </a:p>
-          <a:p>
-            <a:pPr algn="l" indent="0" marL="0">
-              <a:spcAft>
-                <a:spcPts val="800"/>
-              </a:spcAft>
-              <a:buNone/>
-            </a:pPr>
-            <a:r>
-              <a:rPr lang="en-US" sz="4000" b="1" dirty="0">
-                <a:solidFill>
-                  <a:srgbClr val="111111"/>
-                </a:solidFill>
-                <a:latin typeface="Times New Roman" pitchFamily="34" charset="0"/>
-                <a:ea typeface="Times New Roman" pitchFamily="34" charset="-122"/>
-                <a:cs typeface="Times New Roman" pitchFamily="34" charset="-120"/>
-              </a:rPr>
-              <a:t>Lack of water: </a:t>
-            </a:r>
-            <a:pPr algn="l" indent="0" marL="0">
-              <a:spcAft>
-                <a:spcPts val="800"/>
-              </a:spcAft>
-              <a:buNone/>
-            </a:pPr>
-            <a:r>
-              <a:rPr lang="en-US" sz="4000" dirty="0">
-                <a:solidFill>
-                  <a:srgbClr val="111111"/>
-                </a:solidFill>
-                <a:latin typeface="Times New Roman" pitchFamily="34" charset="0"/>
-                <a:ea typeface="Times New Roman" pitchFamily="34" charset="-122"/>
-                <a:cs typeface="Times New Roman" pitchFamily="34" charset="-120"/>
-              </a:rPr>
-              <a:t>Deserts receive less than 250 mm of rain per year.</a:t>
+              <a:t>It is the way people change their way of life to live in an environment.</a:t>
             </a:r>
             <a:endParaRPr lang="en-US" sz="4000" dirty="0"/>
           </a:p>
@@ -12578,7 +13308,7 @@
                 <a:ea typeface="Times New Roman" pitchFamily="34" charset="-122"/>
                 <a:cs typeface="Times New Roman" pitchFamily="34" charset="-120"/>
               </a:rPr>
-              <a:t>2. Challenges of Hot Deserts (continued)</a:t>
+              <a:t>1. Resources of Hot Deserts</a:t>
             </a:r>
             <a:endParaRPr lang="en-US" sz="3600" dirty="0"/>
           </a:p>
@@ -12612,7 +13342,7 @@
               <a:buNone/>
             </a:pPr>
             <a:r>
-              <a:rPr lang="en-US" sz="4000" b="1" dirty="0">
+              <a:rPr lang="en-US" sz="4000" i="1" dirty="0">
                 <a:solidFill>
                   <a:srgbClr val="111111"/>
                 </a:solidFill>
@@ -12620,8 +13350,11 @@
                 <a:ea typeface="Times New Roman" pitchFamily="34" charset="-122"/>
                 <a:cs typeface="Times New Roman" pitchFamily="34" charset="-120"/>
               </a:rPr>
-              <a:t>Sandstorms: </a:t>
-            </a:r>
+              <a:t>Hot deserts have the following resources:</a:t>
+            </a:r>
+            <a:endParaRPr lang="en-US" sz="4000" dirty="0"/>
+          </a:p>
+          <a:p>
             <a:pPr algn="l" indent="0" marL="0">
               <a:spcAft>
                 <a:spcPts val="800"/>
@@ -12629,7 +13362,7 @@
               <a:buNone/>
             </a:pPr>
             <a:r>
-              <a:rPr lang="en-US" sz="4000" dirty="0">
+              <a:rPr lang="en-US" sz="4000" b="1" dirty="0">
                 <a:solidFill>
                   <a:srgbClr val="111111"/>
                 </a:solidFill>
@@ -12637,11 +13370,8 @@
                 <a:ea typeface="Times New Roman" pitchFamily="34" charset="-122"/>
                 <a:cs typeface="Times New Roman" pitchFamily="34" charset="-120"/>
               </a:rPr>
-              <a:t>Sandstorms hurt the eyes and lungs and bury roads.</a:t>
-            </a:r>
-            <a:endParaRPr lang="en-US" sz="4000" dirty="0"/>
-          </a:p>
-          <a:p>
+              <a:t>Minerals: </a:t>
+            </a:r>
             <a:pPr algn="l" indent="0" marL="0">
               <a:spcAft>
                 <a:spcPts val="800"/>
@@ -12649,7 +13379,7 @@
               <a:buNone/>
             </a:pPr>
             <a:r>
-              <a:rPr lang="en-US" sz="4000" b="1" dirty="0">
+              <a:rPr lang="en-US" sz="4000" dirty="0">
                 <a:solidFill>
                   <a:srgbClr val="111111"/>
                 </a:solidFill>
@@ -12657,24 +13387,7 @@
                 <a:ea typeface="Times New Roman" pitchFamily="34" charset="-122"/>
                 <a:cs typeface="Times New Roman" pitchFamily="34" charset="-120"/>
               </a:rPr>
-              <a:t>Desertification: </a:t>
-            </a:r>
-            <a:pPr algn="l" indent="0" marL="0">
-              <a:spcAft>
-                <a:spcPts val="800"/>
-              </a:spcAft>
-              <a:buNone/>
-            </a:pPr>
-            <a:r>
-              <a:rPr lang="en-US" sz="4000" dirty="0">
-                <a:solidFill>
-                  <a:srgbClr val="111111"/>
-                </a:solidFill>
-                <a:latin typeface="Times New Roman" pitchFamily="34" charset="0"/>
-                <a:ea typeface="Times New Roman" pitchFamily="34" charset="-122"/>
-                <a:cs typeface="Times New Roman" pitchFamily="34" charset="-120"/>
-              </a:rPr>
-              <a:t>The desert spreads into neighbouring lands.</a:t>
+              <a:t>Deserts contain oil and gas in Algeria and Libya, uranium in Niger and phosphates in Morocco.</a:t>
             </a:r>
             <a:endParaRPr lang="en-US" sz="4000" dirty="0"/>
           </a:p>
@@ -12792,9 +13505,109 @@
           </a:p>
         </p:txBody>
       </p:sp>
+      <p:sp>
+        <p:nvSpPr>
+          <p:cNvPr id="3" name="Text 1"/>
+          <p:cNvSpPr/>
+          <p:nvPr/>
+        </p:nvSpPr>
+        <p:spPr>
+          <a:xfrm>
+            <a:off x="365760" y="1005840"/>
+            <a:ext cx="11460175" cy="731520"/>
+          </a:xfrm>
+          <a:prstGeom prst="rect">
+            <a:avLst/>
+          </a:prstGeom>
+          <a:noFill/>
+          <a:ln/>
+        </p:spPr>
+        <p:txBody>
+          <a:bodyPr wrap="square" lIns="0" tIns="0" rIns="0" bIns="0" rtlCol="0" anchor="ctr">
+            <a:normAutofit/>
+          </a:bodyPr>
+          <a:lstStyle/>
+          <a:p>
+            <a:pPr algn="ctr" indent="0" marL="0">
+              <a:buNone/>
+            </a:pPr>
+            <a:r>
+              <a:rPr lang="en-US" sz="3600" b="1" dirty="0">
+                <a:solidFill>
+                  <a:srgbClr val="990011"/>
+                </a:solidFill>
+                <a:latin typeface="Times New Roman" pitchFamily="34" charset="0"/>
+                <a:ea typeface="Times New Roman" pitchFamily="34" charset="-122"/>
+                <a:cs typeface="Times New Roman" pitchFamily="34" charset="-120"/>
+              </a:rPr>
+              <a:t>1. Resources of Hot Deserts</a:t>
+            </a:r>
+            <a:endParaRPr lang="en-US" sz="3600" dirty="0"/>
+          </a:p>
+        </p:txBody>
+      </p:sp>
+      <p:sp>
+        <p:nvSpPr>
+          <p:cNvPr id="4" name="Text 2"/>
+          <p:cNvSpPr/>
+          <p:nvPr/>
+        </p:nvSpPr>
+        <p:spPr>
+          <a:xfrm>
+            <a:off x="365760" y="1783080"/>
+            <a:ext cx="4846320" cy="4617720"/>
+          </a:xfrm>
+          <a:prstGeom prst="rect">
+            <a:avLst/>
+          </a:prstGeom>
+          <a:noFill/>
+          <a:ln/>
+        </p:spPr>
+        <p:txBody>
+          <a:bodyPr wrap="square" lIns="0" tIns="0" rIns="0" bIns="0" rtlCol="0" anchor="t"/>
+          <a:lstStyle/>
+          <a:p>
+            <a:pPr algn="l" indent="0" marL="0">
+              <a:spcAft>
+                <a:spcPts val="800"/>
+              </a:spcAft>
+              <a:buNone/>
+            </a:pPr>
+            <a:r>
+              <a:rPr lang="en-US" sz="3600" b="1" dirty="0">
+                <a:solidFill>
+                  <a:srgbClr val="111111"/>
+                </a:solidFill>
+                <a:latin typeface="Times New Roman" pitchFamily="34" charset="0"/>
+                <a:ea typeface="Times New Roman" pitchFamily="34" charset="-122"/>
+                <a:cs typeface="Times New Roman" pitchFamily="34" charset="-120"/>
+              </a:rPr>
+              <a:t>Solar energy: </a:t>
+            </a:r>
+            <a:pPr algn="l" indent="0" marL="0">
+              <a:spcAft>
+                <a:spcPts val="800"/>
+              </a:spcAft>
+              <a:buNone/>
+            </a:pPr>
+            <a:r>
+              <a:rPr lang="en-US" sz="3600" dirty="0">
+                <a:solidFill>
+                  <a:srgbClr val="111111"/>
+                </a:solidFill>
+                <a:latin typeface="Times New Roman" pitchFamily="34" charset="0"/>
+                <a:ea typeface="Times New Roman" pitchFamily="34" charset="-122"/>
+                <a:cs typeface="Times New Roman" pitchFamily="34" charset="-120"/>
+              </a:rPr>
+              <a:t>Strong sunshine is used for solar power, as at Ouarzazate in Morocco.</a:t>
+            </a:r>
+            <a:endParaRPr lang="en-US" sz="3600" dirty="0"/>
+          </a:p>
+        </p:txBody>
+      </p:sp>
       <p:pic>
         <p:nvPicPr>
-          <p:cNvPr id="3" name="Image 0" descr="/home/claude/f4/img/minesec_sheet.png">    </p:cNvPr>
+          <p:cNvPr id="5" name="Image 0" descr="/home/claude/f4/img/v2/f4_solar.jpg">    </p:cNvPr>
           <p:cNvPicPr>
             <a:picLocks noChangeAspect="1"/>
           </p:cNvPicPr>
@@ -12808,8 +13621,8 @@
         </p:blipFill>
         <p:spPr>
           <a:xfrm>
-            <a:off x="0" y="658368"/>
-            <a:ext cx="1463040" cy="5833872"/>
+            <a:off x="5349240" y="2071212"/>
+            <a:ext cx="6659575" cy="3693983"/>
           </a:xfrm>
           <a:prstGeom prst="rect">
             <a:avLst/>
@@ -12818,14 +13631,14 @@
       </p:pic>
       <p:sp>
         <p:nvSpPr>
-          <p:cNvPr id="4" name="Text 1"/>
+          <p:cNvPr id="6" name="Text 3"/>
           <p:cNvSpPr/>
           <p:nvPr/>
         </p:nvSpPr>
         <p:spPr>
           <a:xfrm>
-            <a:off x="1691640" y="1005840"/>
-            <a:ext cx="10180015" cy="731520"/>
+            <a:off x="5349240" y="6089904"/>
+            <a:ext cx="6659575" cy="347472"/>
           </a:xfrm>
           <a:prstGeom prst="rect">
             <a:avLst/>
@@ -12834,142 +13647,24 @@
           <a:ln/>
         </p:spPr>
         <p:txBody>
-          <a:bodyPr wrap="square" lIns="0" tIns="0" rIns="0" bIns="0" rtlCol="0" anchor="ctr">
-            <a:normAutofit/>
-          </a:bodyPr>
+          <a:bodyPr wrap="square" lIns="0" tIns="0" rIns="0" bIns="0" rtlCol="0" anchor="ctr"/>
           <a:lstStyle/>
           <a:p>
             <a:pPr algn="ctr" indent="0" marL="0">
               <a:buNone/>
             </a:pPr>
             <a:r>
-              <a:rPr lang="en-US" sz="3600" b="1" dirty="0">
-                <a:solidFill>
-                  <a:srgbClr val="990011"/>
+              <a:rPr lang="en-US" sz="1600" i="1" dirty="0">
+                <a:solidFill>
+                  <a:srgbClr val="555555"/>
                 </a:solidFill>
                 <a:latin typeface="Times New Roman" pitchFamily="34" charset="0"/>
                 <a:ea typeface="Times New Roman" pitchFamily="34" charset="-122"/>
                 <a:cs typeface="Times New Roman" pitchFamily="34" charset="-120"/>
               </a:rPr>
-              <a:t>3. Human Adaptations</a:t>
-            </a:r>
-            <a:endParaRPr lang="en-US" sz="3600" dirty="0"/>
-          </a:p>
-        </p:txBody>
-      </p:sp>
-      <p:sp>
-        <p:nvSpPr>
-          <p:cNvPr id="5" name="Text 2"/>
-          <p:cNvSpPr/>
-          <p:nvPr/>
-        </p:nvSpPr>
-        <p:spPr>
-          <a:xfrm>
-            <a:off x="1691640" y="1783080"/>
-            <a:ext cx="10180015" cy="4663440"/>
-          </a:xfrm>
-          <a:prstGeom prst="rect">
-            <a:avLst/>
-          </a:prstGeom>
-          <a:noFill/>
-          <a:ln/>
-        </p:spPr>
-        <p:txBody>
-          <a:bodyPr wrap="square" lIns="0" tIns="0" rIns="0" bIns="0" rtlCol="0" anchor="t"/>
-          <a:lstStyle/>
-          <a:p>
-            <a:pPr algn="l" indent="0" marL="0">
-              <a:spcAft>
-                <a:spcPts val="800"/>
-              </a:spcAft>
-              <a:buNone/>
-            </a:pPr>
-            <a:r>
-              <a:rPr lang="en-US" sz="4000" i="1" dirty="0">
-                <a:solidFill>
-                  <a:srgbClr val="111111"/>
-                </a:solidFill>
-                <a:latin typeface="Times New Roman" pitchFamily="34" charset="0"/>
-                <a:ea typeface="Times New Roman" pitchFamily="34" charset="-122"/>
-                <a:cs typeface="Times New Roman" pitchFamily="34" charset="-120"/>
-              </a:rPr>
-              <a:t>People adapt to hot deserts in the following ways:</a:t>
-            </a:r>
-            <a:endParaRPr lang="en-US" sz="4000" dirty="0"/>
-          </a:p>
-          <a:p>
-            <a:pPr algn="l" indent="0" marL="0">
-              <a:spcAft>
-                <a:spcPts val="800"/>
-              </a:spcAft>
-              <a:buNone/>
-            </a:pPr>
-            <a:r>
-              <a:rPr lang="en-US" sz="4000" b="1" dirty="0">
-                <a:solidFill>
-                  <a:srgbClr val="111111"/>
-                </a:solidFill>
-                <a:latin typeface="Times New Roman" pitchFamily="34" charset="0"/>
-                <a:ea typeface="Times New Roman" pitchFamily="34" charset="-122"/>
-                <a:cs typeface="Times New Roman" pitchFamily="34" charset="-120"/>
-              </a:rPr>
-              <a:t>Nomadism: </a:t>
-            </a:r>
-            <a:pPr algn="l" indent="0" marL="0">
-              <a:spcAft>
-                <a:spcPts val="800"/>
-              </a:spcAft>
-              <a:buNone/>
-            </a:pPr>
-            <a:r>
-              <a:rPr lang="en-US" sz="4000" dirty="0">
-                <a:solidFill>
-                  <a:srgbClr val="111111"/>
-                </a:solidFill>
-                <a:latin typeface="Times New Roman" pitchFamily="34" charset="0"/>
-                <a:ea typeface="Times New Roman" pitchFamily="34" charset="-122"/>
-                <a:cs typeface="Times New Roman" pitchFamily="34" charset="-120"/>
-              </a:rPr>
-              <a:t>Nomads such as the Tuareg move with their animals in search of water and pasture.</a:t>
-            </a:r>
-            <a:endParaRPr lang="en-US" sz="4000" dirty="0"/>
-          </a:p>
-          <a:p>
-            <a:pPr algn="l" indent="0" marL="0">
-              <a:spcAft>
-                <a:spcPts val="800"/>
-              </a:spcAft>
-              <a:buNone/>
-            </a:pPr>
-            <a:r>
-              <a:rPr lang="en-US" sz="4000" b="1" dirty="0">
-                <a:solidFill>
-                  <a:srgbClr val="111111"/>
-                </a:solidFill>
-                <a:latin typeface="Times New Roman" pitchFamily="34" charset="0"/>
-                <a:ea typeface="Times New Roman" pitchFamily="34" charset="-122"/>
-                <a:cs typeface="Times New Roman" pitchFamily="34" charset="-120"/>
-              </a:rPr>
-              <a:t>Clothes and houses: </a:t>
-            </a:r>
-            <a:pPr algn="l" indent="0" marL="0">
-              <a:spcAft>
-                <a:spcPts val="800"/>
-              </a:spcAft>
-              <a:buNone/>
-            </a:pPr>
-            <a:r>
-              <a:rPr lang="en-US" sz="4000" dirty="0">
-                <a:solidFill>
-                  <a:srgbClr val="111111"/>
-                </a:solidFill>
-                <a:latin typeface="Times New Roman" pitchFamily="34" charset="0"/>
-                <a:ea typeface="Times New Roman" pitchFamily="34" charset="-122"/>
-                <a:cs typeface="Times New Roman" pitchFamily="34" charset="-120"/>
-              </a:rPr>
-              <a:t>People wear long loose clothes and build houses with thick walls.</a:t>
-            </a:r>
-            <a:endParaRPr lang="en-US" sz="4000" dirty="0"/>
+              <a:t>Illustration: solar panels</a:t>
+            </a:r>
+            <a:endParaRPr lang="en-US" sz="1600" dirty="0"/>
           </a:p>
         </p:txBody>
       </p:sp>
@@ -13085,9 +13780,109 @@
           </a:p>
         </p:txBody>
       </p:sp>
+      <p:sp>
+        <p:nvSpPr>
+          <p:cNvPr id="3" name="Text 1"/>
+          <p:cNvSpPr/>
+          <p:nvPr/>
+        </p:nvSpPr>
+        <p:spPr>
+          <a:xfrm>
+            <a:off x="365760" y="1005840"/>
+            <a:ext cx="11460175" cy="731520"/>
+          </a:xfrm>
+          <a:prstGeom prst="rect">
+            <a:avLst/>
+          </a:prstGeom>
+          <a:noFill/>
+          <a:ln/>
+        </p:spPr>
+        <p:txBody>
+          <a:bodyPr wrap="square" lIns="0" tIns="0" rIns="0" bIns="0" rtlCol="0" anchor="ctr">
+            <a:normAutofit/>
+          </a:bodyPr>
+          <a:lstStyle/>
+          <a:p>
+            <a:pPr algn="ctr" indent="0" marL="0">
+              <a:buNone/>
+            </a:pPr>
+            <a:r>
+              <a:rPr lang="en-US" sz="3600" b="1" dirty="0">
+                <a:solidFill>
+                  <a:srgbClr val="990011"/>
+                </a:solidFill>
+                <a:latin typeface="Times New Roman" pitchFamily="34" charset="0"/>
+                <a:ea typeface="Times New Roman" pitchFamily="34" charset="-122"/>
+                <a:cs typeface="Times New Roman" pitchFamily="34" charset="-120"/>
+              </a:rPr>
+              <a:t>1. Resources of Hot Deserts</a:t>
+            </a:r>
+            <a:endParaRPr lang="en-US" sz="3600" dirty="0"/>
+          </a:p>
+        </p:txBody>
+      </p:sp>
+      <p:sp>
+        <p:nvSpPr>
+          <p:cNvPr id="4" name="Text 2"/>
+          <p:cNvSpPr/>
+          <p:nvPr/>
+        </p:nvSpPr>
+        <p:spPr>
+          <a:xfrm>
+            <a:off x="365760" y="1783080"/>
+            <a:ext cx="4846320" cy="4617720"/>
+          </a:xfrm>
+          <a:prstGeom prst="rect">
+            <a:avLst/>
+          </a:prstGeom>
+          <a:noFill/>
+          <a:ln/>
+        </p:spPr>
+        <p:txBody>
+          <a:bodyPr wrap="square" lIns="0" tIns="0" rIns="0" bIns="0" rtlCol="0" anchor="t"/>
+          <a:lstStyle/>
+          <a:p>
+            <a:pPr algn="l" indent="0" marL="0">
+              <a:spcAft>
+                <a:spcPts val="800"/>
+              </a:spcAft>
+              <a:buNone/>
+            </a:pPr>
+            <a:r>
+              <a:rPr lang="en-US" sz="3600" b="1" dirty="0">
+                <a:solidFill>
+                  <a:srgbClr val="111111"/>
+                </a:solidFill>
+                <a:latin typeface="Times New Roman" pitchFamily="34" charset="0"/>
+                <a:ea typeface="Times New Roman" pitchFamily="34" charset="-122"/>
+                <a:cs typeface="Times New Roman" pitchFamily="34" charset="-120"/>
+              </a:rPr>
+              <a:t>Water: </a:t>
+            </a:r>
+            <a:pPr algn="l" indent="0" marL="0">
+              <a:spcAft>
+                <a:spcPts val="800"/>
+              </a:spcAft>
+              <a:buNone/>
+            </a:pPr>
+            <a:r>
+              <a:rPr lang="en-US" sz="3600" dirty="0">
+                <a:solidFill>
+                  <a:srgbClr val="111111"/>
+                </a:solidFill>
+                <a:latin typeface="Times New Roman" pitchFamily="34" charset="0"/>
+                <a:ea typeface="Times New Roman" pitchFamily="34" charset="-122"/>
+                <a:cs typeface="Times New Roman" pitchFamily="34" charset="-120"/>
+              </a:rPr>
+              <a:t>Oases, wells and rivers such as the Nile provide water for people and crops.</a:t>
+            </a:r>
+            <a:endParaRPr lang="en-US" sz="3600" dirty="0"/>
+          </a:p>
+        </p:txBody>
+      </p:sp>
       <p:pic>
         <p:nvPicPr>
-          <p:cNvPr id="3" name="Image 0" descr="/home/claude/f4/img/minesec_sheet.png">    </p:cNvPr>
+          <p:cNvPr id="5" name="Image 0" descr="/home/claude/f4/img/v2/oasis_big.png">    </p:cNvPr>
           <p:cNvPicPr>
             <a:picLocks noChangeAspect="1"/>
           </p:cNvPicPr>
@@ -13101,8 +13896,8 @@
         </p:blipFill>
         <p:spPr>
           <a:xfrm>
-            <a:off x="0" y="658368"/>
-            <a:ext cx="3840480" cy="5833872"/>
+            <a:off x="5349240" y="2617506"/>
+            <a:ext cx="6659575" cy="2601397"/>
           </a:xfrm>
           <a:prstGeom prst="rect">
             <a:avLst/>
@@ -13111,14 +13906,14 @@
       </p:pic>
       <p:sp>
         <p:nvSpPr>
-          <p:cNvPr id="4" name="Text 1"/>
+          <p:cNvPr id="6" name="Text 3"/>
           <p:cNvSpPr/>
           <p:nvPr/>
         </p:nvSpPr>
         <p:spPr>
           <a:xfrm>
-            <a:off x="4069080" y="1005840"/>
-            <a:ext cx="7802575" cy="731520"/>
+            <a:off x="5349240" y="6089904"/>
+            <a:ext cx="6659575" cy="347472"/>
           </a:xfrm>
           <a:prstGeom prst="rect">
             <a:avLst/>
@@ -13127,122 +13922,24 @@
           <a:ln/>
         </p:spPr>
         <p:txBody>
-          <a:bodyPr wrap="square" lIns="0" tIns="0" rIns="0" bIns="0" rtlCol="0" anchor="ctr">
-            <a:normAutofit/>
-          </a:bodyPr>
+          <a:bodyPr wrap="square" lIns="0" tIns="0" rIns="0" bIns="0" rtlCol="0" anchor="ctr"/>
           <a:lstStyle/>
           <a:p>
             <a:pPr algn="ctr" indent="0" marL="0">
               <a:buNone/>
             </a:pPr>
             <a:r>
-              <a:rPr lang="en-US" sz="3600" b="1" dirty="0">
-                <a:solidFill>
-                  <a:srgbClr val="990011"/>
+              <a:rPr lang="en-US" sz="1600" i="1" dirty="0">
+                <a:solidFill>
+                  <a:srgbClr val="555555"/>
                 </a:solidFill>
                 <a:latin typeface="Times New Roman" pitchFamily="34" charset="0"/>
                 <a:ea typeface="Times New Roman" pitchFamily="34" charset="-122"/>
                 <a:cs typeface="Times New Roman" pitchFamily="34" charset="-120"/>
               </a:rPr>
-              <a:t>3. Human Adaptations (continued)</a:t>
-            </a:r>
-            <a:endParaRPr lang="en-US" sz="3600" dirty="0"/>
-          </a:p>
-        </p:txBody>
-      </p:sp>
-      <p:sp>
-        <p:nvSpPr>
-          <p:cNvPr id="5" name="Text 2"/>
-          <p:cNvSpPr/>
-          <p:nvPr/>
-        </p:nvSpPr>
-        <p:spPr>
-          <a:xfrm>
-            <a:off x="4069080" y="1783080"/>
-            <a:ext cx="7802575" cy="4663440"/>
-          </a:xfrm>
-          <a:prstGeom prst="rect">
-            <a:avLst/>
-          </a:prstGeom>
-          <a:noFill/>
-          <a:ln/>
-        </p:spPr>
-        <p:txBody>
-          <a:bodyPr wrap="square" lIns="0" tIns="0" rIns="0" bIns="0" rtlCol="0" anchor="t"/>
-          <a:lstStyle/>
-          <a:p>
-            <a:pPr algn="l" indent="0" marL="0">
-              <a:spcAft>
-                <a:spcPts val="800"/>
-              </a:spcAft>
-              <a:buNone/>
-            </a:pPr>
-            <a:r>
-              <a:rPr lang="en-US" sz="4000" b="1" dirty="0">
-                <a:solidFill>
-                  <a:srgbClr val="111111"/>
-                </a:solidFill>
-                <a:latin typeface="Times New Roman" pitchFamily="34" charset="0"/>
-                <a:ea typeface="Times New Roman" pitchFamily="34" charset="-122"/>
-                <a:cs typeface="Times New Roman" pitchFamily="34" charset="-120"/>
-              </a:rPr>
-              <a:t>Irrigation: </a:t>
-            </a:r>
-            <a:pPr algn="l" indent="0" marL="0">
-              <a:spcAft>
-                <a:spcPts val="800"/>
-              </a:spcAft>
-              <a:buNone/>
-            </a:pPr>
-            <a:r>
-              <a:rPr lang="en-US" sz="4000" dirty="0">
-                <a:solidFill>
-                  <a:srgbClr val="111111"/>
-                </a:solidFill>
-                <a:latin typeface="Times New Roman" pitchFamily="34" charset="0"/>
-                <a:ea typeface="Times New Roman" pitchFamily="34" charset="-122"/>
-                <a:cs typeface="Times New Roman" pitchFamily="34" charset="-120"/>
-              </a:rPr>
-              <a:t>Water from rivers such as the Nile and from wells is used to grow crops.</a:t>
-            </a:r>
-            <a:endParaRPr lang="en-US" sz="4000" dirty="0"/>
-          </a:p>
-          <a:p>
-            <a:pPr algn="l" indent="0" marL="0">
-              <a:spcAft>
-                <a:spcPts val="800"/>
-              </a:spcAft>
-              <a:buNone/>
-            </a:pPr>
-            <a:r>
-              <a:rPr lang="en-US" sz="4000" b="1" dirty="0">
-                <a:solidFill>
-                  <a:srgbClr val="111111"/>
-                </a:solidFill>
-                <a:latin typeface="Times New Roman" pitchFamily="34" charset="0"/>
-                <a:ea typeface="Times New Roman" pitchFamily="34" charset="-122"/>
-                <a:cs typeface="Times New Roman" pitchFamily="34" charset="-120"/>
-              </a:rPr>
-              <a:t>Tree planting: </a:t>
-            </a:r>
-            <a:pPr algn="l" indent="0" marL="0">
-              <a:spcAft>
-                <a:spcPts val="800"/>
-              </a:spcAft>
-              <a:buNone/>
-            </a:pPr>
-            <a:r>
-              <a:rPr lang="en-US" sz="4000" dirty="0">
-                <a:solidFill>
-                  <a:srgbClr val="111111"/>
-                </a:solidFill>
-                <a:latin typeface="Times New Roman" pitchFamily="34" charset="0"/>
-                <a:ea typeface="Times New Roman" pitchFamily="34" charset="-122"/>
-                <a:cs typeface="Times New Roman" pitchFamily="34" charset="-120"/>
-              </a:rPr>
-              <a:t>Projects such as the Great Green Wall plant trees to stop the desert.</a:t>
-            </a:r>
-            <a:endParaRPr lang="en-US" sz="4000" dirty="0"/>
+              <a:t>Illustration: an oasis</a:t>
+            </a:r>
+            <a:endParaRPr lang="en-US" sz="1600" dirty="0"/>
           </a:p>
         </p:txBody>
       </p:sp>
@@ -13352,7 +14049,7 @@
                 <a:ea typeface="Calibri" pitchFamily="34" charset="-122"/>
                 <a:cs typeface="Calibri" pitchFamily="34" charset="-120"/>
               </a:rPr>
-              <a:t>FORMATIVE EVALUATION</a:t>
+              <a:t>BOARD SUMMARY</a:t>
             </a:r>
             <a:endParaRPr lang="en-US" sz="1400" dirty="0"/>
           </a:p>
@@ -13417,7 +14114,7 @@
                 <a:ea typeface="Times New Roman" pitchFamily="34" charset="-122"/>
                 <a:cs typeface="Times New Roman" pitchFamily="34" charset="-120"/>
               </a:rPr>
-              <a:t>Evaluation 1</a:t>
+              <a:t>1. Resources of Hot Deserts</a:t>
             </a:r>
             <a:endParaRPr lang="en-US" sz="3600" dirty="0"/>
           </a:p>
@@ -13451,7 +14148,7 @@
               <a:buNone/>
             </a:pPr>
             <a:r>
-              <a:rPr lang="en-US" sz="4000" dirty="0">
+              <a:rPr lang="en-US" sz="4000" b="1" dirty="0">
                 <a:solidFill>
                   <a:srgbClr val="111111"/>
                 </a:solidFill>
@@ -13459,7 +14156,61 @@
                 <a:ea typeface="Times New Roman" pitchFamily="34" charset="-122"/>
                 <a:cs typeface="Times New Roman" pitchFamily="34" charset="-120"/>
               </a:rPr>
-              <a:t>Give two resources of hot deserts.</a:t>
+              <a:t>Pasture: </a:t>
+            </a:r>
+            <a:pPr algn="l" indent="0" marL="0">
+              <a:spcAft>
+                <a:spcPts val="800"/>
+              </a:spcAft>
+              <a:buNone/>
+            </a:pPr>
+            <a:r>
+              <a:rPr lang="en-US" sz="4000" dirty="0">
+                <a:solidFill>
+                  <a:srgbClr val="111111"/>
+                </a:solidFill>
+                <a:latin typeface="Times New Roman" pitchFamily="34" charset="0"/>
+                <a:ea typeface="Times New Roman" pitchFamily="34" charset="-122"/>
+                <a:cs typeface="Times New Roman" pitchFamily="34" charset="-120"/>
+              </a:rPr>
+              <a:t>After rain, grass and shrubs feed camels, goats and sheep.</a:t>
+            </a:r>
+            <a:endParaRPr lang="en-US" sz="4000" dirty="0"/>
+          </a:p>
+          <a:p>
+            <a:pPr algn="l" indent="0" marL="0">
+              <a:spcAft>
+                <a:spcPts val="800"/>
+              </a:spcAft>
+              <a:buNone/>
+            </a:pPr>
+            <a:r>
+              <a:rPr lang="en-US" sz="4000" b="1" dirty="0">
+                <a:solidFill>
+                  <a:srgbClr val="111111"/>
+                </a:solidFill>
+                <a:latin typeface="Times New Roman" pitchFamily="34" charset="0"/>
+                <a:ea typeface="Times New Roman" pitchFamily="34" charset="-122"/>
+                <a:cs typeface="Times New Roman" pitchFamily="34" charset="-120"/>
+              </a:rPr>
+              <a:t>Tourism: </a:t>
+            </a:r>
+            <a:pPr algn="l" indent="0" marL="0">
+              <a:spcAft>
+                <a:spcPts val="800"/>
+              </a:spcAft>
+              <a:buNone/>
+            </a:pPr>
+            <a:r>
+              <a:rPr lang="en-US" sz="4000" dirty="0">
+                <a:solidFill>
+                  <a:srgbClr val="111111"/>
+                </a:solidFill>
+                <a:latin typeface="Times New Roman" pitchFamily="34" charset="0"/>
+                <a:ea typeface="Times New Roman" pitchFamily="34" charset="-122"/>
+                <a:cs typeface="Times New Roman" pitchFamily="34" charset="-120"/>
+              </a:rPr>
+              <a:t>Dunes, oases and ancient monuments such as the pyramids attract tourists.</a:t>
             </a:r>
             <a:endParaRPr lang="en-US" sz="4000" dirty="0"/>
           </a:p>
@@ -13571,15 +14322,135 @@
                 <a:ea typeface="Calibri" pitchFamily="34" charset="-122"/>
                 <a:cs typeface="Calibri" pitchFamily="34" charset="-120"/>
               </a:rPr>
-              <a:t>FORMATIVE EVALUATION</a:t>
+              <a:t>BOARD SUMMARY</a:t>
             </a:r>
             <a:endParaRPr lang="en-US" sz="1400" dirty="0"/>
+          </a:p>
+        </p:txBody>
+      </p:sp>
+      <p:sp>
+        <p:nvSpPr>
+          <p:cNvPr id="3" name="Text 1"/>
+          <p:cNvSpPr/>
+          <p:nvPr/>
+        </p:nvSpPr>
+        <p:spPr>
+          <a:xfrm>
+            <a:off x="365760" y="1005840"/>
+            <a:ext cx="11460175" cy="731520"/>
+          </a:xfrm>
+          <a:prstGeom prst="rect">
+            <a:avLst/>
+          </a:prstGeom>
+          <a:noFill/>
+          <a:ln/>
+        </p:spPr>
+        <p:txBody>
+          <a:bodyPr wrap="square" lIns="0" tIns="0" rIns="0" bIns="0" rtlCol="0" anchor="ctr">
+            <a:normAutofit/>
+          </a:bodyPr>
+          <a:lstStyle/>
+          <a:p>
+            <a:pPr algn="ctr" indent="0" marL="0">
+              <a:buNone/>
+            </a:pPr>
+            <a:r>
+              <a:rPr lang="en-US" sz="3600" b="1" dirty="0">
+                <a:solidFill>
+                  <a:srgbClr val="990011"/>
+                </a:solidFill>
+                <a:latin typeface="Times New Roman" pitchFamily="34" charset="0"/>
+                <a:ea typeface="Times New Roman" pitchFamily="34" charset="-122"/>
+                <a:cs typeface="Times New Roman" pitchFamily="34" charset="-120"/>
+              </a:rPr>
+              <a:t>2. Challenges of Hot Deserts</a:t>
+            </a:r>
+            <a:endParaRPr lang="en-US" sz="3600" dirty="0"/>
+          </a:p>
+        </p:txBody>
+      </p:sp>
+      <p:sp>
+        <p:nvSpPr>
+          <p:cNvPr id="4" name="Text 2"/>
+          <p:cNvSpPr/>
+          <p:nvPr/>
+        </p:nvSpPr>
+        <p:spPr>
+          <a:xfrm>
+            <a:off x="365760" y="1783080"/>
+            <a:ext cx="4846320" cy="4617720"/>
+          </a:xfrm>
+          <a:prstGeom prst="rect">
+            <a:avLst/>
+          </a:prstGeom>
+          <a:noFill/>
+          <a:ln/>
+        </p:spPr>
+        <p:txBody>
+          <a:bodyPr wrap="square" lIns="0" tIns="0" rIns="0" bIns="0" rtlCol="0" anchor="t"/>
+          <a:lstStyle/>
+          <a:p>
+            <a:pPr algn="l" indent="0" marL="0">
+              <a:spcAft>
+                <a:spcPts val="800"/>
+              </a:spcAft>
+              <a:buNone/>
+            </a:pPr>
+            <a:r>
+              <a:rPr lang="en-US" sz="3600" i="1" dirty="0">
+                <a:solidFill>
+                  <a:srgbClr val="111111"/>
+                </a:solidFill>
+                <a:latin typeface="Times New Roman" pitchFamily="34" charset="0"/>
+                <a:ea typeface="Times New Roman" pitchFamily="34" charset="-122"/>
+                <a:cs typeface="Times New Roman" pitchFamily="34" charset="-120"/>
+              </a:rPr>
+              <a:t>People in hot deserts face the following challenges:</a:t>
+            </a:r>
+            <a:endParaRPr lang="en-US" sz="3600" dirty="0"/>
+          </a:p>
+          <a:p>
+            <a:pPr algn="l" indent="0" marL="0">
+              <a:spcAft>
+                <a:spcPts val="800"/>
+              </a:spcAft>
+              <a:buNone/>
+            </a:pPr>
+            <a:r>
+              <a:rPr lang="en-US" sz="3600" b="1" dirty="0">
+                <a:solidFill>
+                  <a:srgbClr val="111111"/>
+                </a:solidFill>
+                <a:latin typeface="Times New Roman" pitchFamily="34" charset="0"/>
+                <a:ea typeface="Times New Roman" pitchFamily="34" charset="-122"/>
+                <a:cs typeface="Times New Roman" pitchFamily="34" charset="-120"/>
+              </a:rPr>
+              <a:t>Extreme temperatures: </a:t>
+            </a:r>
+            <a:pPr algn="l" indent="0" marL="0">
+              <a:spcAft>
+                <a:spcPts val="800"/>
+              </a:spcAft>
+              <a:buNone/>
+            </a:pPr>
+            <a:r>
+              <a:rPr lang="en-US" sz="3600" dirty="0">
+                <a:solidFill>
+                  <a:srgbClr val="111111"/>
+                </a:solidFill>
+                <a:latin typeface="Times New Roman" pitchFamily="34" charset="0"/>
+                <a:ea typeface="Times New Roman" pitchFamily="34" charset="-122"/>
+                <a:cs typeface="Times New Roman" pitchFamily="34" charset="-120"/>
+              </a:rPr>
+              <a:t>Days are very hot, and nights can be cold.</a:t>
+            </a:r>
+            <a:endParaRPr lang="en-US" sz="3600" dirty="0"/>
           </a:p>
         </p:txBody>
       </p:sp>
       <p:pic>
         <p:nvPicPr>
-          <p:cNvPr id="3" name="Image 0" descr="/home/claude/f4/img/minesec_sheet.png">    </p:cNvPr>
+          <p:cNvPr id="5" name="Image 0" descr="/home/claude/f4/img/v2/desert_night_last.png">    </p:cNvPr>
           <p:cNvPicPr>
             <a:picLocks noChangeAspect="1"/>
           </p:cNvPicPr>
@@ -13593,8 +14464,8 @@
         </p:blipFill>
         <p:spPr>
           <a:xfrm>
-            <a:off x="0" y="658368"/>
-            <a:ext cx="5120640" cy="5833872"/>
+            <a:off x="5349240" y="2617506"/>
+            <a:ext cx="6659575" cy="2601397"/>
           </a:xfrm>
           <a:prstGeom prst="rect">
             <a:avLst/>
@@ -13603,14 +14474,14 @@
       </p:pic>
       <p:sp>
         <p:nvSpPr>
-          <p:cNvPr id="4" name="Text 1"/>
+          <p:cNvPr id="6" name="Text 3"/>
           <p:cNvSpPr/>
           <p:nvPr/>
         </p:nvSpPr>
         <p:spPr>
           <a:xfrm>
-            <a:off x="5349240" y="1005840"/>
-            <a:ext cx="6522415" cy="731520"/>
+            <a:off x="5349240" y="6089904"/>
+            <a:ext cx="6659575" cy="347472"/>
           </a:xfrm>
           <a:prstGeom prst="rect">
             <a:avLst/>
@@ -13619,68 +14490,24 @@
           <a:ln/>
         </p:spPr>
         <p:txBody>
-          <a:bodyPr wrap="square" lIns="0" tIns="0" rIns="0" bIns="0" rtlCol="0" anchor="ctr">
-            <a:normAutofit/>
-          </a:bodyPr>
+          <a:bodyPr wrap="square" lIns="0" tIns="0" rIns="0" bIns="0" rtlCol="0" anchor="ctr"/>
           <a:lstStyle/>
           <a:p>
             <a:pPr algn="ctr" indent="0" marL="0">
               <a:buNone/>
             </a:pPr>
             <a:r>
-              <a:rPr lang="en-US" sz="3600" b="1" dirty="0">
-                <a:solidFill>
-                  <a:srgbClr val="990011"/>
+              <a:rPr lang="en-US" sz="1600" i="1" dirty="0">
+                <a:solidFill>
+                  <a:srgbClr val="555555"/>
                 </a:solidFill>
                 <a:latin typeface="Times New Roman" pitchFamily="34" charset="0"/>
                 <a:ea typeface="Times New Roman" pitchFamily="34" charset="-122"/>
                 <a:cs typeface="Times New Roman" pitchFamily="34" charset="-120"/>
               </a:rPr>
-              <a:t>Expected Answer</a:t>
-            </a:r>
-            <a:endParaRPr lang="en-US" sz="3600" dirty="0"/>
-          </a:p>
-        </p:txBody>
-      </p:sp>
-      <p:sp>
-        <p:nvSpPr>
-          <p:cNvPr id="5" name="Text 2"/>
-          <p:cNvSpPr/>
-          <p:nvPr/>
-        </p:nvSpPr>
-        <p:spPr>
-          <a:xfrm>
-            <a:off x="5349240" y="1783080"/>
-            <a:ext cx="6522415" cy="4663440"/>
-          </a:xfrm>
-          <a:prstGeom prst="rect">
-            <a:avLst/>
-          </a:prstGeom>
-          <a:noFill/>
-          <a:ln/>
-        </p:spPr>
-        <p:txBody>
-          <a:bodyPr wrap="square" lIns="0" tIns="0" rIns="0" bIns="0" rtlCol="0" anchor="t"/>
-          <a:lstStyle/>
-          <a:p>
-            <a:pPr algn="l" indent="0" marL="0">
-              <a:spcAft>
-                <a:spcPts val="800"/>
-              </a:spcAft>
-              <a:buNone/>
-            </a:pPr>
-            <a:r>
-              <a:rPr lang="en-US" sz="4000" dirty="0">
-                <a:solidFill>
-                  <a:srgbClr val="111111"/>
-                </a:solidFill>
-                <a:latin typeface="Times New Roman" pitchFamily="34" charset="0"/>
-                <a:ea typeface="Times New Roman" pitchFamily="34" charset="-122"/>
-                <a:cs typeface="Times New Roman" pitchFamily="34" charset="-120"/>
-              </a:rPr>
-              <a:t>Oil and solar energy.</a:t>
-            </a:r>
-            <a:endParaRPr lang="en-US" sz="4000" dirty="0"/>
+              <a:t>Illustration: cold desert nights</a:t>
+            </a:r>
+            <a:endParaRPr lang="en-US" sz="1600" dirty="0"/>
           </a:p>
         </p:txBody>
       </p:sp>
@@ -13790,15 +14617,115 @@
                 <a:ea typeface="Calibri" pitchFamily="34" charset="-122"/>
                 <a:cs typeface="Calibri" pitchFamily="34" charset="-120"/>
               </a:rPr>
-              <a:t>FORMATIVE EVALUATION</a:t>
+              <a:t>BOARD SUMMARY</a:t>
             </a:r>
             <a:endParaRPr lang="en-US" sz="1400" dirty="0"/>
+          </a:p>
+        </p:txBody>
+      </p:sp>
+      <p:sp>
+        <p:nvSpPr>
+          <p:cNvPr id="3" name="Text 1"/>
+          <p:cNvSpPr/>
+          <p:nvPr/>
+        </p:nvSpPr>
+        <p:spPr>
+          <a:xfrm>
+            <a:off x="365760" y="1005840"/>
+            <a:ext cx="11460175" cy="731520"/>
+          </a:xfrm>
+          <a:prstGeom prst="rect">
+            <a:avLst/>
+          </a:prstGeom>
+          <a:noFill/>
+          <a:ln/>
+        </p:spPr>
+        <p:txBody>
+          <a:bodyPr wrap="square" lIns="0" tIns="0" rIns="0" bIns="0" rtlCol="0" anchor="ctr">
+            <a:normAutofit/>
+          </a:bodyPr>
+          <a:lstStyle/>
+          <a:p>
+            <a:pPr algn="ctr" indent="0" marL="0">
+              <a:buNone/>
+            </a:pPr>
+            <a:r>
+              <a:rPr lang="en-US" sz="3600" b="1" dirty="0">
+                <a:solidFill>
+                  <a:srgbClr val="990011"/>
+                </a:solidFill>
+                <a:latin typeface="Times New Roman" pitchFamily="34" charset="0"/>
+                <a:ea typeface="Times New Roman" pitchFamily="34" charset="-122"/>
+                <a:cs typeface="Times New Roman" pitchFamily="34" charset="-120"/>
+              </a:rPr>
+              <a:t>2. Challenges of Hot Deserts</a:t>
+            </a:r>
+            <a:endParaRPr lang="en-US" sz="3600" dirty="0"/>
+          </a:p>
+        </p:txBody>
+      </p:sp>
+      <p:sp>
+        <p:nvSpPr>
+          <p:cNvPr id="4" name="Text 2"/>
+          <p:cNvSpPr/>
+          <p:nvPr/>
+        </p:nvSpPr>
+        <p:spPr>
+          <a:xfrm>
+            <a:off x="365760" y="1783080"/>
+            <a:ext cx="4846320" cy="4617720"/>
+          </a:xfrm>
+          <a:prstGeom prst="rect">
+            <a:avLst/>
+          </a:prstGeom>
+          <a:noFill/>
+          <a:ln/>
+        </p:spPr>
+        <p:txBody>
+          <a:bodyPr wrap="square" lIns="0" tIns="0" rIns="0" bIns="0" rtlCol="0" anchor="t"/>
+          <a:lstStyle/>
+          <a:p>
+            <a:pPr algn="l" indent="0" marL="0">
+              <a:spcAft>
+                <a:spcPts val="800"/>
+              </a:spcAft>
+              <a:buNone/>
+            </a:pPr>
+            <a:r>
+              <a:rPr lang="en-US" sz="3600" b="1" dirty="0">
+                <a:solidFill>
+                  <a:srgbClr val="111111"/>
+                </a:solidFill>
+                <a:latin typeface="Times New Roman" pitchFamily="34" charset="0"/>
+                <a:ea typeface="Times New Roman" pitchFamily="34" charset="-122"/>
+                <a:cs typeface="Times New Roman" pitchFamily="34" charset="-120"/>
+              </a:rPr>
+              <a:t>Lack of water: </a:t>
+            </a:r>
+            <a:pPr algn="l" indent="0" marL="0">
+              <a:spcAft>
+                <a:spcPts val="800"/>
+              </a:spcAft>
+              <a:buNone/>
+            </a:pPr>
+            <a:r>
+              <a:rPr lang="en-US" sz="3600" dirty="0">
+                <a:solidFill>
+                  <a:srgbClr val="111111"/>
+                </a:solidFill>
+                <a:latin typeface="Times New Roman" pitchFamily="34" charset="0"/>
+                <a:ea typeface="Times New Roman" pitchFamily="34" charset="-122"/>
+                <a:cs typeface="Times New Roman" pitchFamily="34" charset="-120"/>
+              </a:rPr>
+              <a:t>Deserts receive less than 250 mm of rain per year, and wells dry up.</a:t>
+            </a:r>
+            <a:endParaRPr lang="en-US" sz="3600" dirty="0"/>
           </a:p>
         </p:txBody>
       </p:sp>
       <p:pic>
         <p:nvPicPr>
-          <p:cNvPr id="3" name="Image 0" descr="/home/claude/f4/img/minesec_sheet.png">    </p:cNvPr>
+          <p:cNvPr id="5" name="Image 0" descr="/home/claude/f4/img/v2/f4_fetchwater.jpg">    </p:cNvPr>
           <p:cNvPicPr>
             <a:picLocks noChangeAspect="1"/>
           </p:cNvPicPr>
@@ -13812,8 +14739,8 @@
         </p:blipFill>
         <p:spPr>
           <a:xfrm>
-            <a:off x="0" y="658368"/>
-            <a:ext cx="5120640" cy="5833872"/>
+            <a:off x="5349240" y="2069407"/>
+            <a:ext cx="6659575" cy="3697594"/>
           </a:xfrm>
           <a:prstGeom prst="rect">
             <a:avLst/>
@@ -13822,14 +14749,14 @@
       </p:pic>
       <p:sp>
         <p:nvSpPr>
-          <p:cNvPr id="4" name="Text 1"/>
+          <p:cNvPr id="6" name="Text 3"/>
           <p:cNvSpPr/>
           <p:nvPr/>
         </p:nvSpPr>
         <p:spPr>
           <a:xfrm>
-            <a:off x="5349240" y="1005840"/>
-            <a:ext cx="6522415" cy="731520"/>
+            <a:off x="5349240" y="6089904"/>
+            <a:ext cx="6659575" cy="347472"/>
           </a:xfrm>
           <a:prstGeom prst="rect">
             <a:avLst/>
@@ -13838,68 +14765,24 @@
           <a:ln/>
         </p:spPr>
         <p:txBody>
-          <a:bodyPr wrap="square" lIns="0" tIns="0" rIns="0" bIns="0" rtlCol="0" anchor="ctr">
-            <a:normAutofit/>
-          </a:bodyPr>
+          <a:bodyPr wrap="square" lIns="0" tIns="0" rIns="0" bIns="0" rtlCol="0" anchor="ctr"/>
           <a:lstStyle/>
           <a:p>
             <a:pPr algn="ctr" indent="0" marL="0">
               <a:buNone/>
             </a:pPr>
             <a:r>
-              <a:rPr lang="en-US" sz="3600" b="1" dirty="0">
-                <a:solidFill>
-                  <a:srgbClr val="990011"/>
+              <a:rPr lang="en-US" sz="1600" i="1" dirty="0">
+                <a:solidFill>
+                  <a:srgbClr val="555555"/>
                 </a:solidFill>
                 <a:latin typeface="Times New Roman" pitchFamily="34" charset="0"/>
                 <a:ea typeface="Times New Roman" pitchFamily="34" charset="-122"/>
                 <a:cs typeface="Times New Roman" pitchFamily="34" charset="-120"/>
               </a:rPr>
-              <a:t>Evaluation 2</a:t>
-            </a:r>
-            <a:endParaRPr lang="en-US" sz="3600" dirty="0"/>
-          </a:p>
-        </p:txBody>
-      </p:sp>
-      <p:sp>
-        <p:nvSpPr>
-          <p:cNvPr id="5" name="Text 2"/>
-          <p:cNvSpPr/>
-          <p:nvPr/>
-        </p:nvSpPr>
-        <p:spPr>
-          <a:xfrm>
-            <a:off x="5349240" y="1783080"/>
-            <a:ext cx="6522415" cy="4663440"/>
-          </a:xfrm>
-          <a:prstGeom prst="rect">
-            <a:avLst/>
-          </a:prstGeom>
-          <a:noFill/>
-          <a:ln/>
-        </p:spPr>
-        <p:txBody>
-          <a:bodyPr wrap="square" lIns="0" tIns="0" rIns="0" bIns="0" rtlCol="0" anchor="t"/>
-          <a:lstStyle/>
-          <a:p>
-            <a:pPr algn="l" indent="0" marL="0">
-              <a:spcAft>
-                <a:spcPts val="800"/>
-              </a:spcAft>
-              <a:buNone/>
-            </a:pPr>
-            <a:r>
-              <a:rPr lang="en-US" sz="4000" dirty="0">
-                <a:solidFill>
-                  <a:srgbClr val="111111"/>
-                </a:solidFill>
-                <a:latin typeface="Times New Roman" pitchFamily="34" charset="0"/>
-                <a:ea typeface="Times New Roman" pitchFamily="34" charset="-122"/>
-                <a:cs typeface="Times New Roman" pitchFamily="34" charset="-120"/>
-              </a:rPr>
-              <a:t>How can we fight desertification?</a:t>
-            </a:r>
-            <a:endParaRPr lang="en-US" sz="4000" dirty="0"/>
+              <a:t>Illustration: fetching water</a:t>
+            </a:r>
+            <a:endParaRPr lang="en-US" sz="1600" dirty="0"/>
           </a:p>
         </p:txBody>
       </p:sp>
@@ -14009,15 +14892,115 @@
                 <a:ea typeface="Calibri" pitchFamily="34" charset="-122"/>
                 <a:cs typeface="Calibri" pitchFamily="34" charset="-120"/>
               </a:rPr>
-              <a:t>FORMATIVE EVALUATION</a:t>
+              <a:t>BOARD SUMMARY</a:t>
             </a:r>
             <a:endParaRPr lang="en-US" sz="1400" dirty="0"/>
+          </a:p>
+        </p:txBody>
+      </p:sp>
+      <p:sp>
+        <p:nvSpPr>
+          <p:cNvPr id="3" name="Text 1"/>
+          <p:cNvSpPr/>
+          <p:nvPr/>
+        </p:nvSpPr>
+        <p:spPr>
+          <a:xfrm>
+            <a:off x="365760" y="1005840"/>
+            <a:ext cx="11460175" cy="731520"/>
+          </a:xfrm>
+          <a:prstGeom prst="rect">
+            <a:avLst/>
+          </a:prstGeom>
+          <a:noFill/>
+          <a:ln/>
+        </p:spPr>
+        <p:txBody>
+          <a:bodyPr wrap="square" lIns="0" tIns="0" rIns="0" bIns="0" rtlCol="0" anchor="ctr">
+            <a:normAutofit/>
+          </a:bodyPr>
+          <a:lstStyle/>
+          <a:p>
+            <a:pPr algn="ctr" indent="0" marL="0">
+              <a:buNone/>
+            </a:pPr>
+            <a:r>
+              <a:rPr lang="en-US" sz="3600" b="1" dirty="0">
+                <a:solidFill>
+                  <a:srgbClr val="990011"/>
+                </a:solidFill>
+                <a:latin typeface="Times New Roman" pitchFamily="34" charset="0"/>
+                <a:ea typeface="Times New Roman" pitchFamily="34" charset="-122"/>
+                <a:cs typeface="Times New Roman" pitchFamily="34" charset="-120"/>
+              </a:rPr>
+              <a:t>2. Challenges of Hot Deserts</a:t>
+            </a:r>
+            <a:endParaRPr lang="en-US" sz="3600" dirty="0"/>
+          </a:p>
+        </p:txBody>
+      </p:sp>
+      <p:sp>
+        <p:nvSpPr>
+          <p:cNvPr id="4" name="Text 2"/>
+          <p:cNvSpPr/>
+          <p:nvPr/>
+        </p:nvSpPr>
+        <p:spPr>
+          <a:xfrm>
+            <a:off x="365760" y="1783080"/>
+            <a:ext cx="4846320" cy="4617720"/>
+          </a:xfrm>
+          <a:prstGeom prst="rect">
+            <a:avLst/>
+          </a:prstGeom>
+          <a:noFill/>
+          <a:ln/>
+        </p:spPr>
+        <p:txBody>
+          <a:bodyPr wrap="square" lIns="0" tIns="0" rIns="0" bIns="0" rtlCol="0" anchor="t"/>
+          <a:lstStyle/>
+          <a:p>
+            <a:pPr algn="l" indent="0" marL="0">
+              <a:spcAft>
+                <a:spcPts val="800"/>
+              </a:spcAft>
+              <a:buNone/>
+            </a:pPr>
+            <a:r>
+              <a:rPr lang="en-US" sz="3600" b="1" dirty="0">
+                <a:solidFill>
+                  <a:srgbClr val="111111"/>
+                </a:solidFill>
+                <a:latin typeface="Times New Roman" pitchFamily="34" charset="0"/>
+                <a:ea typeface="Times New Roman" pitchFamily="34" charset="-122"/>
+                <a:cs typeface="Times New Roman" pitchFamily="34" charset="-120"/>
+              </a:rPr>
+              <a:t>Sandstorms: </a:t>
+            </a:r>
+            <a:pPr algn="l" indent="0" marL="0">
+              <a:spcAft>
+                <a:spcPts val="800"/>
+              </a:spcAft>
+              <a:buNone/>
+            </a:pPr>
+            <a:r>
+              <a:rPr lang="en-US" sz="3600" dirty="0">
+                <a:solidFill>
+                  <a:srgbClr val="111111"/>
+                </a:solidFill>
+                <a:latin typeface="Times New Roman" pitchFamily="34" charset="0"/>
+                <a:ea typeface="Times New Roman" pitchFamily="34" charset="-122"/>
+                <a:cs typeface="Times New Roman" pitchFamily="34" charset="-120"/>
+              </a:rPr>
+              <a:t>Sandstorms hurt the eyes and lungs and bury roads and fields.</a:t>
+            </a:r>
+            <a:endParaRPr lang="en-US" sz="3600" dirty="0"/>
           </a:p>
         </p:txBody>
       </p:sp>
       <p:pic>
         <p:nvPicPr>
-          <p:cNvPr id="3" name="Image 0" descr="/home/claude/f4/img/minesec_sheet.png">    </p:cNvPr>
+          <p:cNvPr id="5" name="Image 0" descr="/home/claude/f4/img/v2/f2t_sandstorm.jpg">    </p:cNvPr>
           <p:cNvPicPr>
             <a:picLocks noChangeAspect="1"/>
           </p:cNvPicPr>
@@ -14031,8 +15014,8 @@
         </p:blipFill>
         <p:spPr>
           <a:xfrm>
-            <a:off x="0" y="658368"/>
-            <a:ext cx="5120640" cy="5833872"/>
+            <a:off x="5349240" y="2450233"/>
+            <a:ext cx="6659575" cy="2935942"/>
           </a:xfrm>
           <a:prstGeom prst="rect">
             <a:avLst/>
@@ -14041,14 +15024,14 @@
       </p:pic>
       <p:sp>
         <p:nvSpPr>
-          <p:cNvPr id="4" name="Text 1"/>
+          <p:cNvPr id="6" name="Text 3"/>
           <p:cNvSpPr/>
           <p:nvPr/>
         </p:nvSpPr>
         <p:spPr>
           <a:xfrm>
-            <a:off x="5349240" y="1005840"/>
-            <a:ext cx="6522415" cy="731520"/>
+            <a:off x="5349240" y="6089904"/>
+            <a:ext cx="6659575" cy="347472"/>
           </a:xfrm>
           <a:prstGeom prst="rect">
             <a:avLst/>
@@ -14057,68 +15040,24 @@
           <a:ln/>
         </p:spPr>
         <p:txBody>
-          <a:bodyPr wrap="square" lIns="0" tIns="0" rIns="0" bIns="0" rtlCol="0" anchor="ctr">
-            <a:normAutofit/>
-          </a:bodyPr>
+          <a:bodyPr wrap="square" lIns="0" tIns="0" rIns="0" bIns="0" rtlCol="0" anchor="ctr"/>
           <a:lstStyle/>
           <a:p>
             <a:pPr algn="ctr" indent="0" marL="0">
               <a:buNone/>
             </a:pPr>
             <a:r>
-              <a:rPr lang="en-US" sz="3600" b="1" dirty="0">
-                <a:solidFill>
-                  <a:srgbClr val="990011"/>
+              <a:rPr lang="en-US" sz="1600" i="1" dirty="0">
+                <a:solidFill>
+                  <a:srgbClr val="555555"/>
                 </a:solidFill>
                 <a:latin typeface="Times New Roman" pitchFamily="34" charset="0"/>
                 <a:ea typeface="Times New Roman" pitchFamily="34" charset="-122"/>
                 <a:cs typeface="Times New Roman" pitchFamily="34" charset="-120"/>
               </a:rPr>
-              <a:t>Expected Answer</a:t>
-            </a:r>
-            <a:endParaRPr lang="en-US" sz="3600" dirty="0"/>
-          </a:p>
-        </p:txBody>
-      </p:sp>
-      <p:sp>
-        <p:nvSpPr>
-          <p:cNvPr id="5" name="Text 2"/>
-          <p:cNvSpPr/>
-          <p:nvPr/>
-        </p:nvSpPr>
-        <p:spPr>
-          <a:xfrm>
-            <a:off x="5349240" y="1783080"/>
-            <a:ext cx="6522415" cy="4663440"/>
-          </a:xfrm>
-          <a:prstGeom prst="rect">
-            <a:avLst/>
-          </a:prstGeom>
-          <a:noFill/>
-          <a:ln/>
-        </p:spPr>
-        <p:txBody>
-          <a:bodyPr wrap="square" lIns="0" tIns="0" rIns="0" bIns="0" rtlCol="0" anchor="t"/>
-          <a:lstStyle/>
-          <a:p>
-            <a:pPr algn="l" indent="0" marL="0">
-              <a:spcAft>
-                <a:spcPts val="800"/>
-              </a:spcAft>
-              <a:buNone/>
-            </a:pPr>
-            <a:r>
-              <a:rPr lang="en-US" sz="4000" dirty="0">
-                <a:solidFill>
-                  <a:srgbClr val="111111"/>
-                </a:solidFill>
-                <a:latin typeface="Times New Roman" pitchFamily="34" charset="0"/>
-                <a:ea typeface="Times New Roman" pitchFamily="34" charset="-122"/>
-                <a:cs typeface="Times New Roman" pitchFamily="34" charset="-120"/>
-              </a:rPr>
-              <a:t>Plant trees (Great Green Wall).</a:t>
-            </a:r>
-            <a:endParaRPr lang="en-US" sz="4000" dirty="0"/>
+              <a:t>Illustration: a sandstorm</a:t>
+            </a:r>
+            <a:endParaRPr lang="en-US" sz="1600" dirty="0"/>
           </a:p>
         </p:txBody>
       </p:sp>
@@ -14228,7 +15167,7 @@
                 <a:ea typeface="Calibri" pitchFamily="34" charset="-122"/>
                 <a:cs typeface="Calibri" pitchFamily="34" charset="-120"/>
               </a:rPr>
-              <a:t>REMEDIATION</a:t>
+              <a:t>BOARD SUMMARY</a:t>
             </a:r>
             <a:endParaRPr lang="en-US" sz="1400" dirty="0"/>
           </a:p>
@@ -14251,7 +15190,7 @@
         <p:spPr>
           <a:xfrm>
             <a:off x="0" y="658368"/>
-            <a:ext cx="2468880" cy="5833872"/>
+            <a:ext cx="3840480" cy="5833872"/>
           </a:xfrm>
           <a:prstGeom prst="rect">
             <a:avLst/>
@@ -14266,8 +15205,8 @@
         </p:nvSpPr>
         <p:spPr>
           <a:xfrm>
-            <a:off x="2697480" y="1005840"/>
-            <a:ext cx="9174175" cy="731520"/>
+            <a:off x="4069080" y="1005840"/>
+            <a:ext cx="7802575" cy="731520"/>
           </a:xfrm>
           <a:prstGeom prst="rect">
             <a:avLst/>
@@ -14293,7 +15232,7 @@
                 <a:ea typeface="Times New Roman" pitchFamily="34" charset="-122"/>
                 <a:cs typeface="Times New Roman" pitchFamily="34" charset="-120"/>
               </a:rPr>
-              <a:t>Remediation</a:t>
+              <a:t>2. Challenges of Hot Deserts</a:t>
             </a:r>
             <a:endParaRPr lang="en-US" sz="3600" dirty="0"/>
           </a:p>
@@ -14307,8 +15246,8 @@
         </p:nvSpPr>
         <p:spPr>
           <a:xfrm>
-            <a:off x="2697480" y="1783080"/>
-            <a:ext cx="9174175" cy="4663440"/>
+            <a:off x="4069080" y="1783080"/>
+            <a:ext cx="7802575" cy="4663440"/>
           </a:xfrm>
           <a:prstGeom prst="rect">
             <a:avLst/>
@@ -14335,18 +15274,13 @@
                 <a:ea typeface="Times New Roman" pitchFamily="34" charset="-122"/>
                 <a:cs typeface="Times New Roman" pitchFamily="34" charset="-120"/>
               </a:rPr>
-              <a:t>Fill in the blanks:</a:t>
-            </a:r>
-            <a:endParaRPr lang="en-US" sz="4000" dirty="0"/>
-          </a:p>
-          <a:p>
-            <a:pPr algn="l" marL="342900" indent="-342900">
+              <a:t>Flash floods: </a:t>
+            </a:r>
+            <a:pPr algn="l" indent="0" marL="0">
               <a:spcAft>
                 <a:spcPts val="800"/>
               </a:spcAft>
-              <a:buSzPct val="100000"/>
-              <a:buFont typeface="+mj-lt"/>
-              <a:buAutoNum type="arabicPeriod" startAt="1"/>
+              <a:buNone/>
             </a:pPr>
             <a:r>
               <a:rPr lang="en-US" sz="4000" dirty="0">
@@ -14357,21 +15291,19 @@
                 <a:ea typeface="Times New Roman" pitchFamily="34" charset="-122"/>
                 <a:cs typeface="Times New Roman" pitchFamily="34" charset="-120"/>
               </a:rPr>
-              <a:t>The spread of the desert is ______.</a:t>
+              <a:t>Rare but heavy storms cause sudden floods in dry valleys (wadis).</a:t>
             </a:r>
             <a:endParaRPr lang="en-US" sz="4000" dirty="0"/>
           </a:p>
           <a:p>
-            <a:pPr algn="l" marL="342900" indent="-342900">
+            <a:pPr algn="l" indent="0" marL="0">
               <a:spcAft>
                 <a:spcPts val="800"/>
               </a:spcAft>
-              <a:buSzPct val="100000"/>
-              <a:buFont typeface="+mj-lt"/>
-              <a:buAutoNum type="arabicPeriod" startAt="1"/>
+              <a:buNone/>
             </a:pPr>
             <a:r>
-              <a:rPr lang="en-US" sz="4000" dirty="0">
+              <a:rPr lang="en-US" sz="4000" b="1" dirty="0">
                 <a:solidFill>
                   <a:srgbClr val="111111"/>
                 </a:solidFill>
@@ -14379,18 +15311,13 @@
                 <a:ea typeface="Times New Roman" pitchFamily="34" charset="-122"/>
                 <a:cs typeface="Times New Roman" pitchFamily="34" charset="-120"/>
               </a:rPr>
-              <a:t>Morocco makes electricity from the ______.</a:t>
-            </a:r>
-            <a:endParaRPr lang="en-US" sz="4000" dirty="0"/>
-          </a:p>
-          <a:p>
-            <a:pPr algn="l" marL="342900" indent="-342900">
+              <a:t>Desertification: </a:t>
+            </a:r>
+            <a:pPr algn="l" indent="0" marL="0">
               <a:spcAft>
                 <a:spcPts val="800"/>
               </a:spcAft>
-              <a:buSzPct val="100000"/>
-              <a:buFont typeface="+mj-lt"/>
-              <a:buAutoNum type="arabicPeriod" startAt="1"/>
+              <a:buNone/>
             </a:pPr>
             <a:r>
               <a:rPr lang="en-US" sz="4000" dirty="0">
@@ -14401,7 +15328,7 @@
                 <a:ea typeface="Times New Roman" pitchFamily="34" charset="-122"/>
                 <a:cs typeface="Times New Roman" pitchFamily="34" charset="-120"/>
               </a:rPr>
-              <a:t>The Tuareg are ______ who move with their animals.</a:t>
+              <a:t>The desert spreads into neighbouring lands because of drought, overgrazing and tree cutting.</a:t>
             </a:r>
             <a:endParaRPr lang="en-US" sz="4000" dirty="0"/>
           </a:p>
@@ -14752,15 +15679,135 @@
                 <a:ea typeface="Calibri" pitchFamily="34" charset="-122"/>
                 <a:cs typeface="Calibri" pitchFamily="34" charset="-120"/>
               </a:rPr>
-              <a:t>HOMEWORK</a:t>
+              <a:t>BOARD SUMMARY</a:t>
             </a:r>
             <a:endParaRPr lang="en-US" sz="1400" dirty="0"/>
+          </a:p>
+        </p:txBody>
+      </p:sp>
+      <p:sp>
+        <p:nvSpPr>
+          <p:cNvPr id="3" name="Text 1"/>
+          <p:cNvSpPr/>
+          <p:nvPr/>
+        </p:nvSpPr>
+        <p:spPr>
+          <a:xfrm>
+            <a:off x="365760" y="1005840"/>
+            <a:ext cx="11460175" cy="731520"/>
+          </a:xfrm>
+          <a:prstGeom prst="rect">
+            <a:avLst/>
+          </a:prstGeom>
+          <a:noFill/>
+          <a:ln/>
+        </p:spPr>
+        <p:txBody>
+          <a:bodyPr wrap="square" lIns="0" tIns="0" rIns="0" bIns="0" rtlCol="0" anchor="ctr">
+            <a:normAutofit/>
+          </a:bodyPr>
+          <a:lstStyle/>
+          <a:p>
+            <a:pPr algn="ctr" indent="0" marL="0">
+              <a:buNone/>
+            </a:pPr>
+            <a:r>
+              <a:rPr lang="en-US" sz="3600" b="1" dirty="0">
+                <a:solidFill>
+                  <a:srgbClr val="990011"/>
+                </a:solidFill>
+                <a:latin typeface="Times New Roman" pitchFamily="34" charset="0"/>
+                <a:ea typeface="Times New Roman" pitchFamily="34" charset="-122"/>
+                <a:cs typeface="Times New Roman" pitchFamily="34" charset="-120"/>
+              </a:rPr>
+              <a:t>3. Human Adaptations</a:t>
+            </a:r>
+            <a:endParaRPr lang="en-US" sz="3600" dirty="0"/>
+          </a:p>
+        </p:txBody>
+      </p:sp>
+      <p:sp>
+        <p:nvSpPr>
+          <p:cNvPr id="4" name="Text 2"/>
+          <p:cNvSpPr/>
+          <p:nvPr/>
+        </p:nvSpPr>
+        <p:spPr>
+          <a:xfrm>
+            <a:off x="365760" y="1783080"/>
+            <a:ext cx="4846320" cy="4617720"/>
+          </a:xfrm>
+          <a:prstGeom prst="rect">
+            <a:avLst/>
+          </a:prstGeom>
+          <a:noFill/>
+          <a:ln/>
+        </p:spPr>
+        <p:txBody>
+          <a:bodyPr wrap="square" lIns="0" tIns="0" rIns="0" bIns="0" rtlCol="0" anchor="t"/>
+          <a:lstStyle/>
+          <a:p>
+            <a:pPr algn="l" indent="0" marL="0">
+              <a:spcAft>
+                <a:spcPts val="800"/>
+              </a:spcAft>
+              <a:buNone/>
+            </a:pPr>
+            <a:r>
+              <a:rPr lang="en-US" sz="3600" i="1" dirty="0">
+                <a:solidFill>
+                  <a:srgbClr val="111111"/>
+                </a:solidFill>
+                <a:latin typeface="Times New Roman" pitchFamily="34" charset="0"/>
+                <a:ea typeface="Times New Roman" pitchFamily="34" charset="-122"/>
+                <a:cs typeface="Times New Roman" pitchFamily="34" charset="-120"/>
+              </a:rPr>
+              <a:t>People adapt to hot deserts in the following ways:</a:t>
+            </a:r>
+            <a:endParaRPr lang="en-US" sz="3600" dirty="0"/>
+          </a:p>
+          <a:p>
+            <a:pPr algn="l" indent="0" marL="0">
+              <a:spcAft>
+                <a:spcPts val="800"/>
+              </a:spcAft>
+              <a:buNone/>
+            </a:pPr>
+            <a:r>
+              <a:rPr lang="en-US" sz="3600" b="1" dirty="0">
+                <a:solidFill>
+                  <a:srgbClr val="111111"/>
+                </a:solidFill>
+                <a:latin typeface="Times New Roman" pitchFamily="34" charset="0"/>
+                <a:ea typeface="Times New Roman" pitchFamily="34" charset="-122"/>
+                <a:cs typeface="Times New Roman" pitchFamily="34" charset="-120"/>
+              </a:rPr>
+              <a:t>Nomadism: </a:t>
+            </a:r>
+            <a:pPr algn="l" indent="0" marL="0">
+              <a:spcAft>
+                <a:spcPts val="800"/>
+              </a:spcAft>
+              <a:buNone/>
+            </a:pPr>
+            <a:r>
+              <a:rPr lang="en-US" sz="3600" dirty="0">
+                <a:solidFill>
+                  <a:srgbClr val="111111"/>
+                </a:solidFill>
+                <a:latin typeface="Times New Roman" pitchFamily="34" charset="0"/>
+                <a:ea typeface="Times New Roman" pitchFamily="34" charset="-122"/>
+                <a:cs typeface="Times New Roman" pitchFamily="34" charset="-120"/>
+              </a:rPr>
+              <a:t>Nomads such as the Tuareg move with their animals in search of water and pasture.</a:t>
+            </a:r>
+            <a:endParaRPr lang="en-US" sz="3600" dirty="0"/>
           </a:p>
         </p:txBody>
       </p:sp>
       <p:pic>
         <p:nvPicPr>
-          <p:cNvPr id="3" name="Image 0" descr="/home/claude/f4/img/minesec_sheet.png">    </p:cNvPr>
+          <p:cNvPr id="5" name="Image 0" descr="/home/claude/f4/img/v2/f2t_tuareg.jpg">    </p:cNvPr>
           <p:cNvPicPr>
             <a:picLocks noChangeAspect="1"/>
           </p:cNvPicPr>
@@ -14774,8 +15821,8 @@
         </p:blipFill>
         <p:spPr>
           <a:xfrm>
-            <a:off x="0" y="658368"/>
-            <a:ext cx="5120640" cy="5833872"/>
+            <a:off x="5349240" y="2069407"/>
+            <a:ext cx="6659575" cy="3697594"/>
           </a:xfrm>
           <a:prstGeom prst="rect">
             <a:avLst/>
@@ -14784,14 +15831,14 @@
       </p:pic>
       <p:sp>
         <p:nvSpPr>
-          <p:cNvPr id="4" name="Text 1"/>
+          <p:cNvPr id="6" name="Text 3"/>
           <p:cNvSpPr/>
           <p:nvPr/>
         </p:nvSpPr>
         <p:spPr>
           <a:xfrm>
-            <a:off x="5349240" y="1005840"/>
-            <a:ext cx="6522415" cy="731520"/>
+            <a:off x="5349240" y="6089904"/>
+            <a:ext cx="6659575" cy="347472"/>
           </a:xfrm>
           <a:prstGeom prst="rect">
             <a:avLst/>
@@ -14800,68 +15847,24 @@
           <a:ln/>
         </p:spPr>
         <p:txBody>
-          <a:bodyPr wrap="square" lIns="0" tIns="0" rIns="0" bIns="0" rtlCol="0" anchor="ctr">
-            <a:normAutofit/>
-          </a:bodyPr>
+          <a:bodyPr wrap="square" lIns="0" tIns="0" rIns="0" bIns="0" rtlCol="0" anchor="ctr"/>
           <a:lstStyle/>
           <a:p>
             <a:pPr algn="ctr" indent="0" marL="0">
               <a:buNone/>
             </a:pPr>
             <a:r>
-              <a:rPr lang="en-US" sz="3600" b="1" dirty="0">
-                <a:solidFill>
-                  <a:srgbClr val="990011"/>
+              <a:rPr lang="en-US" sz="1600" i="1" dirty="0">
+                <a:solidFill>
+                  <a:srgbClr val="555555"/>
                 </a:solidFill>
                 <a:latin typeface="Times New Roman" pitchFamily="34" charset="0"/>
                 <a:ea typeface="Times New Roman" pitchFamily="34" charset="-122"/>
                 <a:cs typeface="Times New Roman" pitchFamily="34" charset="-120"/>
               </a:rPr>
-              <a:t>Homework</a:t>
-            </a:r>
-            <a:endParaRPr lang="en-US" sz="3600" dirty="0"/>
-          </a:p>
-        </p:txBody>
-      </p:sp>
-      <p:sp>
-        <p:nvSpPr>
-          <p:cNvPr id="5" name="Text 2"/>
-          <p:cNvSpPr/>
-          <p:nvPr/>
-        </p:nvSpPr>
-        <p:spPr>
-          <a:xfrm>
-            <a:off x="5349240" y="1783080"/>
-            <a:ext cx="6522415" cy="4663440"/>
-          </a:xfrm>
-          <a:prstGeom prst="rect">
-            <a:avLst/>
-          </a:prstGeom>
-          <a:noFill/>
-          <a:ln/>
-        </p:spPr>
-        <p:txBody>
-          <a:bodyPr wrap="square" lIns="0" tIns="0" rIns="0" bIns="0" rtlCol="0" anchor="t"/>
-          <a:lstStyle/>
-          <a:p>
-            <a:pPr algn="l" indent="0" marL="0">
-              <a:spcAft>
-                <a:spcPts val="800"/>
-              </a:spcAft>
-              <a:buNone/>
-            </a:pPr>
-            <a:r>
-              <a:rPr lang="en-US" sz="4000" dirty="0">
-                <a:solidFill>
-                  <a:srgbClr val="111111"/>
-                </a:solidFill>
-                <a:latin typeface="Times New Roman" pitchFamily="34" charset="0"/>
-                <a:ea typeface="Times New Roman" pitchFamily="34" charset="-122"/>
-                <a:cs typeface="Times New Roman" pitchFamily="34" charset="-120"/>
-              </a:rPr>
-              <a:t>Make a table with three columns: resources, hazards and adaptations. Fill it with examples from the hot deserts and from the dry season in Garoua.</a:t>
-            </a:r>
-            <a:endParaRPr lang="en-US" sz="4000" dirty="0"/>
+              <a:t>Illustration: Tuareg people</a:t>
+            </a:r>
+            <a:endParaRPr lang="en-US" sz="1600" dirty="0"/>
           </a:p>
         </p:txBody>
       </p:sp>
@@ -14971,7 +15974,7 @@
                 <a:ea typeface="Calibri" pitchFamily="34" charset="-122"/>
                 <a:cs typeface="Calibri" pitchFamily="34" charset="-120"/>
               </a:rPr>
-              <a:t>NEXT LESSON</a:t>
+              <a:t>BOARD SUMMARY</a:t>
             </a:r>
             <a:endParaRPr lang="en-US" sz="1400" dirty="0"/>
           </a:p>
@@ -15036,7 +16039,7 @@
                 <a:ea typeface="Times New Roman" pitchFamily="34" charset="-122"/>
                 <a:cs typeface="Times New Roman" pitchFamily="34" charset="-120"/>
               </a:rPr>
-              <a:t>Next Lesson</a:t>
+              <a:t>3. Human Adaptations</a:t>
             </a:r>
             <a:endParaRPr lang="en-US" sz="3600" dirty="0"/>
           </a:p>
@@ -15060,10 +16063,10 @@
           <a:ln/>
         </p:spPr>
         <p:txBody>
-          <a:bodyPr wrap="square" lIns="0" tIns="0" rIns="0" bIns="0" rtlCol="0" anchor="ctr"/>
-          <a:lstStyle/>
-          <a:p>
-            <a:pPr algn="ctr" indent="0" marL="0">
+          <a:bodyPr wrap="square" lIns="0" tIns="0" rIns="0" bIns="0" rtlCol="0" anchor="t"/>
+          <a:lstStyle/>
+          <a:p>
+            <a:pPr algn="l" indent="0" marL="0">
               <a:spcAft>
                 <a:spcPts val="800"/>
               </a:spcAft>
@@ -15078,27 +16081,61 @@
                 <a:ea typeface="Times New Roman" pitchFamily="34" charset="-122"/>
                 <a:cs typeface="Times New Roman" pitchFamily="34" charset="-120"/>
               </a:rPr>
-              <a:t>Our next lesson will be on:</a:t>
-            </a:r>
-            <a:endParaRPr lang="en-US" sz="4000" dirty="0"/>
-          </a:p>
-          <a:p>
-            <a:pPr algn="ctr" indent="0" marL="0">
+              <a:t>Clothes: </a:t>
+            </a:r>
+            <a:pPr algn="l" indent="0" marL="0">
               <a:spcAft>
                 <a:spcPts val="800"/>
               </a:spcAft>
               <a:buNone/>
             </a:pPr>
             <a:r>
-              <a:rPr lang="en-US" sz="4000" b="1" dirty="0">
-                <a:solidFill>
-                  <a:srgbClr val="990011"/>
+              <a:rPr lang="en-US" sz="4000" dirty="0">
+                <a:solidFill>
+                  <a:srgbClr val="111111"/>
                 </a:solidFill>
                 <a:latin typeface="Times New Roman" pitchFamily="34" charset="0"/>
                 <a:ea typeface="Times New Roman" pitchFamily="34" charset="-122"/>
                 <a:cs typeface="Times New Roman" pitchFamily="34" charset="-120"/>
               </a:rPr>
-              <a:t>Lesson 30: The Atmosphere</a:t>
+              <a:t>People wear long, loose clothes and cover their heads against the Sun and the sand.</a:t>
+            </a:r>
+            <a:endParaRPr lang="en-US" sz="4000" dirty="0"/>
+          </a:p>
+          <a:p>
+            <a:pPr algn="l" indent="0" marL="0">
+              <a:spcAft>
+                <a:spcPts val="800"/>
+              </a:spcAft>
+              <a:buNone/>
+            </a:pPr>
+            <a:r>
+              <a:rPr lang="en-US" sz="4000" b="1" dirty="0">
+                <a:solidFill>
+                  <a:srgbClr val="111111"/>
+                </a:solidFill>
+                <a:latin typeface="Times New Roman" pitchFamily="34" charset="0"/>
+                <a:ea typeface="Times New Roman" pitchFamily="34" charset="-122"/>
+                <a:cs typeface="Times New Roman" pitchFamily="34" charset="-120"/>
+              </a:rPr>
+              <a:t>Houses: </a:t>
+            </a:r>
+            <a:pPr algn="l" indent="0" marL="0">
+              <a:spcAft>
+                <a:spcPts val="800"/>
+              </a:spcAft>
+              <a:buNone/>
+            </a:pPr>
+            <a:r>
+              <a:rPr lang="en-US" sz="4000" dirty="0">
+                <a:solidFill>
+                  <a:srgbClr val="111111"/>
+                </a:solidFill>
+                <a:latin typeface="Times New Roman" pitchFamily="34" charset="0"/>
+                <a:ea typeface="Times New Roman" pitchFamily="34" charset="-122"/>
+                <a:cs typeface="Times New Roman" pitchFamily="34" charset="-120"/>
+              </a:rPr>
+              <a:t>Houses have thick mud walls, small windows and flat roofs to keep cool.</a:t>
             </a:r>
             <a:endParaRPr lang="en-US" sz="4000" dirty="0"/>
           </a:p>
@@ -15210,6 +16247,2117 @@
                 <a:ea typeface="Calibri" pitchFamily="34" charset="-122"/>
                 <a:cs typeface="Calibri" pitchFamily="34" charset="-120"/>
               </a:rPr>
+              <a:t>BOARD SUMMARY</a:t>
+            </a:r>
+            <a:endParaRPr lang="en-US" sz="1400" dirty="0"/>
+          </a:p>
+        </p:txBody>
+      </p:sp>
+      <p:pic>
+        <p:nvPicPr>
+          <p:cNvPr id="3" name="Image 0" descr="/home/claude/f4/img/minesec_sheet.png">    </p:cNvPr>
+          <p:cNvPicPr>
+            <a:picLocks noChangeAspect="1"/>
+          </p:cNvPicPr>
+          <p:nvPr/>
+        </p:nvPicPr>
+        <p:blipFill>
+          <a:blip r:embed="rId1"/>
+          <a:stretch>
+            <a:fillRect/>
+          </a:stretch>
+        </p:blipFill>
+        <p:spPr>
+          <a:xfrm>
+            <a:off x="0" y="658368"/>
+            <a:ext cx="3840480" cy="5833872"/>
+          </a:xfrm>
+          <a:prstGeom prst="rect">
+            <a:avLst/>
+          </a:prstGeom>
+        </p:spPr>
+      </p:pic>
+      <p:sp>
+        <p:nvSpPr>
+          <p:cNvPr id="4" name="Text 1"/>
+          <p:cNvSpPr/>
+          <p:nvPr/>
+        </p:nvSpPr>
+        <p:spPr>
+          <a:xfrm>
+            <a:off x="4069080" y="1005840"/>
+            <a:ext cx="7802575" cy="731520"/>
+          </a:xfrm>
+          <a:prstGeom prst="rect">
+            <a:avLst/>
+          </a:prstGeom>
+          <a:noFill/>
+          <a:ln/>
+        </p:spPr>
+        <p:txBody>
+          <a:bodyPr wrap="square" lIns="0" tIns="0" rIns="0" bIns="0" rtlCol="0" anchor="ctr">
+            <a:normAutofit/>
+          </a:bodyPr>
+          <a:lstStyle/>
+          <a:p>
+            <a:pPr algn="ctr" indent="0" marL="0">
+              <a:buNone/>
+            </a:pPr>
+            <a:r>
+              <a:rPr lang="en-US" sz="3600" b="1" dirty="0">
+                <a:solidFill>
+                  <a:srgbClr val="990011"/>
+                </a:solidFill>
+                <a:latin typeface="Times New Roman" pitchFamily="34" charset="0"/>
+                <a:ea typeface="Times New Roman" pitchFamily="34" charset="-122"/>
+                <a:cs typeface="Times New Roman" pitchFamily="34" charset="-120"/>
+              </a:rPr>
+              <a:t>3. Human Adaptations (continued)</a:t>
+            </a:r>
+            <a:endParaRPr lang="en-US" sz="3600" dirty="0"/>
+          </a:p>
+        </p:txBody>
+      </p:sp>
+      <p:sp>
+        <p:nvSpPr>
+          <p:cNvPr id="5" name="Text 2"/>
+          <p:cNvSpPr/>
+          <p:nvPr/>
+        </p:nvSpPr>
+        <p:spPr>
+          <a:xfrm>
+            <a:off x="4069080" y="1783080"/>
+            <a:ext cx="7802575" cy="4663440"/>
+          </a:xfrm>
+          <a:prstGeom prst="rect">
+            <a:avLst/>
+          </a:prstGeom>
+          <a:noFill/>
+          <a:ln/>
+        </p:spPr>
+        <p:txBody>
+          <a:bodyPr wrap="square" lIns="0" tIns="0" rIns="0" bIns="0" rtlCol="0" anchor="t"/>
+          <a:lstStyle/>
+          <a:p>
+            <a:pPr algn="l" indent="0" marL="0">
+              <a:spcAft>
+                <a:spcPts val="800"/>
+              </a:spcAft>
+              <a:buNone/>
+            </a:pPr>
+            <a:r>
+              <a:rPr lang="en-US" sz="4000" b="1" dirty="0">
+                <a:solidFill>
+                  <a:srgbClr val="111111"/>
+                </a:solidFill>
+                <a:latin typeface="Times New Roman" pitchFamily="34" charset="0"/>
+                <a:ea typeface="Times New Roman" pitchFamily="34" charset="-122"/>
+                <a:cs typeface="Times New Roman" pitchFamily="34" charset="-120"/>
+              </a:rPr>
+              <a:t>Water management: </a:t>
+            </a:r>
+            <a:pPr algn="l" indent="0" marL="0">
+              <a:spcAft>
+                <a:spcPts val="800"/>
+              </a:spcAft>
+              <a:buNone/>
+            </a:pPr>
+            <a:r>
+              <a:rPr lang="en-US" sz="4000" dirty="0">
+                <a:solidFill>
+                  <a:srgbClr val="111111"/>
+                </a:solidFill>
+                <a:latin typeface="Times New Roman" pitchFamily="34" charset="0"/>
+                <a:ea typeface="Times New Roman" pitchFamily="34" charset="-122"/>
+                <a:cs typeface="Times New Roman" pitchFamily="34" charset="-120"/>
+              </a:rPr>
+              <a:t>People dig wells, store water and irrigate crops with water from rivers, such as the Nile.</a:t>
+            </a:r>
+            <a:endParaRPr lang="en-US" sz="4000" dirty="0"/>
+          </a:p>
+          <a:p>
+            <a:pPr algn="l" indent="0" marL="0">
+              <a:spcAft>
+                <a:spcPts val="800"/>
+              </a:spcAft>
+              <a:buNone/>
+            </a:pPr>
+            <a:r>
+              <a:rPr lang="en-US" sz="4000" b="1" dirty="0">
+                <a:solidFill>
+                  <a:srgbClr val="111111"/>
+                </a:solidFill>
+                <a:latin typeface="Times New Roman" pitchFamily="34" charset="0"/>
+                <a:ea typeface="Times New Roman" pitchFamily="34" charset="-122"/>
+                <a:cs typeface="Times New Roman" pitchFamily="34" charset="-120"/>
+              </a:rPr>
+              <a:t>Tree planting: </a:t>
+            </a:r>
+            <a:pPr algn="l" indent="0" marL="0">
+              <a:spcAft>
+                <a:spcPts val="800"/>
+              </a:spcAft>
+              <a:buNone/>
+            </a:pPr>
+            <a:r>
+              <a:rPr lang="en-US" sz="4000" dirty="0">
+                <a:solidFill>
+                  <a:srgbClr val="111111"/>
+                </a:solidFill>
+                <a:latin typeface="Times New Roman" pitchFamily="34" charset="0"/>
+                <a:ea typeface="Times New Roman" pitchFamily="34" charset="-122"/>
+                <a:cs typeface="Times New Roman" pitchFamily="34" charset="-120"/>
+              </a:rPr>
+              <a:t>Projects such as the Great Green Wall plant trees to stop the desert.</a:t>
+            </a:r>
+            <a:endParaRPr lang="en-US" sz="4000" dirty="0"/>
+          </a:p>
+        </p:txBody>
+      </p:sp>
+      <p:sp>
+        <p:nvSpPr>
+          <p:cNvPr id="25" name="Slide Number Placeholder 0"/>
+          <p:cNvSpPr>
+            <a:spLocks noGrp="1"/>
+          </p:cNvSpPr>
+          <p:nvPr>
+            <p:ph type="sldNum" sz="quarter" idx="4294967295"/>
+          </p:nvPr>
+        </p:nvSpPr>
+        <p:spPr>
+          <a:xfrm>
+            <a:off x="27432" y="91440"/>
+            <a:ext cx="585216" cy="475488"/>
+          </a:xfrm>
+          <a:prstGeom prst="rect">
+            <a:avLst/>
+          </a:prstGeom>
+          <a:extLst>
+            <a:ext uri="{C572A759-6A51-4108-AA02-DFA0A04FC94B}">
+              <ma14:wrappingTextBoxFlag xmlns:ma14="http://schemas.microsoft.com/office/mac/drawingml/2011/main" val="0"/>
+            </a:ext>
+          </a:extLst>
+        </p:spPr>
+        <p:txBody>
+          <a:bodyPr/>
+          <a:lstStyle>
+            <a:lvl1pPr>
+              <a:defRPr sz="2000">
+                <a:solidFill>
+                  <a:srgbClr val="FFFFFF"/>
+                </a:solidFill>
+                <a:latin typeface="Calibri"/>
+                <a:ea typeface="Calibri"/>
+                <a:cs typeface="Calibri"/>
+              </a:defRPr>
+            </a:lvl1pPr>
+          </a:lstStyle>
+          <a:p>
+            <a:pPr algn="ctr"/>
+            <a:fld id="{F7021451-1387-4CA6-816F-3879F97B5CBC}" type="slidenum">
+              <a:rPr b="1" lang="en-US"/>
+              <a:t>42</a:t>
+            </a:fld>
+            <a:endParaRPr lang="en-US"/>
+          </a:p>
+        </p:txBody>
+      </p:sp>
+    </p:spTree>
+  </p:cSld>
+  <p:clrMapOvr>
+    <a:masterClrMapping/>
+  </p:clrMapOvr>
+</p:sld>
+</file>
+
+<file path=ppt/slides/slide43.xml><?xml version="1.0" encoding="utf-8"?>
+<p:sld xmlns:a="http://schemas.openxmlformats.org/drawingml/2006/main" xmlns:r="http://schemas.openxmlformats.org/officeDocument/2006/relationships" xmlns:p="http://schemas.openxmlformats.org/presentationml/2006/main">
+  <p:cSld name="Slide 43">
+    <p:spTree>
+      <p:nvGrpSpPr>
+        <p:cNvPr id="1" name=""/>
+        <p:cNvGrpSpPr/>
+        <p:nvPr/>
+      </p:nvGrpSpPr>
+      <p:grpSpPr>
+        <a:xfrm>
+          <a:off x="0" y="0"/>
+          <a:ext cx="0" cy="0"/>
+          <a:chOff x="0" y="0"/>
+          <a:chExt cx="0" cy="0"/>
+        </a:xfrm>
+      </p:grpSpPr>
+      <p:sp>
+        <p:nvSpPr>
+          <p:cNvPr id="2" name="Text 0"/>
+          <p:cNvSpPr/>
+          <p:nvPr/>
+        </p:nvSpPr>
+        <p:spPr>
+          <a:xfrm>
+            <a:off x="457200" y="713232"/>
+            <a:ext cx="11368735" cy="274320"/>
+          </a:xfrm>
+          <a:prstGeom prst="rect">
+            <a:avLst/>
+          </a:prstGeom>
+          <a:noFill/>
+          <a:ln/>
+        </p:spPr>
+        <p:txBody>
+          <a:bodyPr wrap="square" lIns="0" tIns="0" rIns="0" bIns="0" rtlCol="0" anchor="ctr"/>
+          <a:lstStyle/>
+          <a:p>
+            <a:pPr algn="r" indent="0" marL="0">
+              <a:buNone/>
+            </a:pPr>
+            <a:r>
+              <a:rPr lang="en-US" sz="1400" b="1" dirty="0">
+                <a:solidFill>
+                  <a:srgbClr val="1C3F6E"/>
+                </a:solidFill>
+                <a:latin typeface="Calibri" pitchFamily="34" charset="0"/>
+                <a:ea typeface="Calibri" pitchFamily="34" charset="-122"/>
+                <a:cs typeface="Calibri" pitchFamily="34" charset="-120"/>
+              </a:rPr>
+              <a:t>FORMATIVE EVALUATION</a:t>
+            </a:r>
+            <a:endParaRPr lang="en-US" sz="1400" dirty="0"/>
+          </a:p>
+        </p:txBody>
+      </p:sp>
+      <p:pic>
+        <p:nvPicPr>
+          <p:cNvPr id="3" name="Image 0" descr="/home/claude/f4/img/minesec_sheet.png">    </p:cNvPr>
+          <p:cNvPicPr>
+            <a:picLocks noChangeAspect="1"/>
+          </p:cNvPicPr>
+          <p:nvPr/>
+        </p:nvPicPr>
+        <p:blipFill>
+          <a:blip r:embed="rId1"/>
+          <a:stretch>
+            <a:fillRect/>
+          </a:stretch>
+        </p:blipFill>
+        <p:spPr>
+          <a:xfrm>
+            <a:off x="0" y="658368"/>
+            <a:ext cx="5120640" cy="5833872"/>
+          </a:xfrm>
+          <a:prstGeom prst="rect">
+            <a:avLst/>
+          </a:prstGeom>
+        </p:spPr>
+      </p:pic>
+      <p:sp>
+        <p:nvSpPr>
+          <p:cNvPr id="4" name="Text 1"/>
+          <p:cNvSpPr/>
+          <p:nvPr/>
+        </p:nvSpPr>
+        <p:spPr>
+          <a:xfrm>
+            <a:off x="5349240" y="1005840"/>
+            <a:ext cx="6522415" cy="731520"/>
+          </a:xfrm>
+          <a:prstGeom prst="rect">
+            <a:avLst/>
+          </a:prstGeom>
+          <a:noFill/>
+          <a:ln/>
+        </p:spPr>
+        <p:txBody>
+          <a:bodyPr wrap="square" lIns="0" tIns="0" rIns="0" bIns="0" rtlCol="0" anchor="ctr">
+            <a:normAutofit/>
+          </a:bodyPr>
+          <a:lstStyle/>
+          <a:p>
+            <a:pPr algn="ctr" indent="0" marL="0">
+              <a:buNone/>
+            </a:pPr>
+            <a:r>
+              <a:rPr lang="en-US" sz="3600" b="1" dirty="0">
+                <a:solidFill>
+                  <a:srgbClr val="990011"/>
+                </a:solidFill>
+                <a:latin typeface="Times New Roman" pitchFamily="34" charset="0"/>
+                <a:ea typeface="Times New Roman" pitchFamily="34" charset="-122"/>
+                <a:cs typeface="Times New Roman" pitchFamily="34" charset="-120"/>
+              </a:rPr>
+              <a:t>Evaluation 1</a:t>
+            </a:r>
+            <a:endParaRPr lang="en-US" sz="3600" dirty="0"/>
+          </a:p>
+        </p:txBody>
+      </p:sp>
+      <p:sp>
+        <p:nvSpPr>
+          <p:cNvPr id="5" name="Text 2"/>
+          <p:cNvSpPr/>
+          <p:nvPr/>
+        </p:nvSpPr>
+        <p:spPr>
+          <a:xfrm>
+            <a:off x="5349240" y="1783080"/>
+            <a:ext cx="6522415" cy="4663440"/>
+          </a:xfrm>
+          <a:prstGeom prst="rect">
+            <a:avLst/>
+          </a:prstGeom>
+          <a:noFill/>
+          <a:ln/>
+        </p:spPr>
+        <p:txBody>
+          <a:bodyPr wrap="square" lIns="0" tIns="0" rIns="0" bIns="0" rtlCol="0" anchor="t"/>
+          <a:lstStyle/>
+          <a:p>
+            <a:pPr algn="l" indent="0" marL="0">
+              <a:spcAft>
+                <a:spcPts val="800"/>
+              </a:spcAft>
+              <a:buNone/>
+            </a:pPr>
+            <a:r>
+              <a:rPr lang="en-US" sz="4000" dirty="0">
+                <a:solidFill>
+                  <a:srgbClr val="111111"/>
+                </a:solidFill>
+                <a:latin typeface="Times New Roman" pitchFamily="34" charset="0"/>
+                <a:ea typeface="Times New Roman" pitchFamily="34" charset="-122"/>
+                <a:cs typeface="Times New Roman" pitchFamily="34" charset="-120"/>
+              </a:rPr>
+              <a:t>Give two resources of hot deserts.</a:t>
+            </a:r>
+            <a:endParaRPr lang="en-US" sz="4000" dirty="0"/>
+          </a:p>
+        </p:txBody>
+      </p:sp>
+      <p:sp>
+        <p:nvSpPr>
+          <p:cNvPr id="25" name="Slide Number Placeholder 0"/>
+          <p:cNvSpPr>
+            <a:spLocks noGrp="1"/>
+          </p:cNvSpPr>
+          <p:nvPr>
+            <p:ph type="sldNum" sz="quarter" idx="4294967295"/>
+          </p:nvPr>
+        </p:nvSpPr>
+        <p:spPr>
+          <a:xfrm>
+            <a:off x="27432" y="91440"/>
+            <a:ext cx="585216" cy="475488"/>
+          </a:xfrm>
+          <a:prstGeom prst="rect">
+            <a:avLst/>
+          </a:prstGeom>
+          <a:extLst>
+            <a:ext uri="{C572A759-6A51-4108-AA02-DFA0A04FC94B}">
+              <ma14:wrappingTextBoxFlag xmlns:ma14="http://schemas.microsoft.com/office/mac/drawingml/2011/main" val="0"/>
+            </a:ext>
+          </a:extLst>
+        </p:spPr>
+        <p:txBody>
+          <a:bodyPr/>
+          <a:lstStyle>
+            <a:lvl1pPr>
+              <a:defRPr sz="2000">
+                <a:solidFill>
+                  <a:srgbClr val="FFFFFF"/>
+                </a:solidFill>
+                <a:latin typeface="Calibri"/>
+                <a:ea typeface="Calibri"/>
+                <a:cs typeface="Calibri"/>
+              </a:defRPr>
+            </a:lvl1pPr>
+          </a:lstStyle>
+          <a:p>
+            <a:pPr algn="ctr"/>
+            <a:fld id="{F7021451-1387-4CA6-816F-3879F97B5CBC}" type="slidenum">
+              <a:rPr b="1" lang="en-US"/>
+              <a:t>43</a:t>
+            </a:fld>
+            <a:endParaRPr lang="en-US"/>
+          </a:p>
+        </p:txBody>
+      </p:sp>
+    </p:spTree>
+  </p:cSld>
+  <p:clrMapOvr>
+    <a:masterClrMapping/>
+  </p:clrMapOvr>
+</p:sld>
+</file>
+
+<file path=ppt/slides/slide44.xml><?xml version="1.0" encoding="utf-8"?>
+<p:sld xmlns:a="http://schemas.openxmlformats.org/drawingml/2006/main" xmlns:r="http://schemas.openxmlformats.org/officeDocument/2006/relationships" xmlns:p="http://schemas.openxmlformats.org/presentationml/2006/main">
+  <p:cSld name="Slide 44">
+    <p:spTree>
+      <p:nvGrpSpPr>
+        <p:cNvPr id="1" name=""/>
+        <p:cNvGrpSpPr/>
+        <p:nvPr/>
+      </p:nvGrpSpPr>
+      <p:grpSpPr>
+        <a:xfrm>
+          <a:off x="0" y="0"/>
+          <a:ext cx="0" cy="0"/>
+          <a:chOff x="0" y="0"/>
+          <a:chExt cx="0" cy="0"/>
+        </a:xfrm>
+      </p:grpSpPr>
+      <p:sp>
+        <p:nvSpPr>
+          <p:cNvPr id="2" name="Text 0"/>
+          <p:cNvSpPr/>
+          <p:nvPr/>
+        </p:nvSpPr>
+        <p:spPr>
+          <a:xfrm>
+            <a:off x="457200" y="713232"/>
+            <a:ext cx="11368735" cy="274320"/>
+          </a:xfrm>
+          <a:prstGeom prst="rect">
+            <a:avLst/>
+          </a:prstGeom>
+          <a:noFill/>
+          <a:ln/>
+        </p:spPr>
+        <p:txBody>
+          <a:bodyPr wrap="square" lIns="0" tIns="0" rIns="0" bIns="0" rtlCol="0" anchor="ctr"/>
+          <a:lstStyle/>
+          <a:p>
+            <a:pPr algn="r" indent="0" marL="0">
+              <a:buNone/>
+            </a:pPr>
+            <a:r>
+              <a:rPr lang="en-US" sz="1400" b="1" dirty="0">
+                <a:solidFill>
+                  <a:srgbClr val="1C3F6E"/>
+                </a:solidFill>
+                <a:latin typeface="Calibri" pitchFamily="34" charset="0"/>
+                <a:ea typeface="Calibri" pitchFamily="34" charset="-122"/>
+                <a:cs typeface="Calibri" pitchFamily="34" charset="-120"/>
+              </a:rPr>
+              <a:t>FORMATIVE EVALUATION</a:t>
+            </a:r>
+            <a:endParaRPr lang="en-US" sz="1400" dirty="0"/>
+          </a:p>
+        </p:txBody>
+      </p:sp>
+      <p:pic>
+        <p:nvPicPr>
+          <p:cNvPr id="3" name="Image 0" descr="/home/claude/f4/img/minesec_sheet.png">    </p:cNvPr>
+          <p:cNvPicPr>
+            <a:picLocks noChangeAspect="1"/>
+          </p:cNvPicPr>
+          <p:nvPr/>
+        </p:nvPicPr>
+        <p:blipFill>
+          <a:blip r:embed="rId1"/>
+          <a:stretch>
+            <a:fillRect/>
+          </a:stretch>
+        </p:blipFill>
+        <p:spPr>
+          <a:xfrm>
+            <a:off x="0" y="658368"/>
+            <a:ext cx="5120640" cy="5833872"/>
+          </a:xfrm>
+          <a:prstGeom prst="rect">
+            <a:avLst/>
+          </a:prstGeom>
+        </p:spPr>
+      </p:pic>
+      <p:sp>
+        <p:nvSpPr>
+          <p:cNvPr id="4" name="Text 1"/>
+          <p:cNvSpPr/>
+          <p:nvPr/>
+        </p:nvSpPr>
+        <p:spPr>
+          <a:xfrm>
+            <a:off x="5349240" y="1005840"/>
+            <a:ext cx="6522415" cy="731520"/>
+          </a:xfrm>
+          <a:prstGeom prst="rect">
+            <a:avLst/>
+          </a:prstGeom>
+          <a:noFill/>
+          <a:ln/>
+        </p:spPr>
+        <p:txBody>
+          <a:bodyPr wrap="square" lIns="0" tIns="0" rIns="0" bIns="0" rtlCol="0" anchor="ctr">
+            <a:normAutofit/>
+          </a:bodyPr>
+          <a:lstStyle/>
+          <a:p>
+            <a:pPr algn="ctr" indent="0" marL="0">
+              <a:buNone/>
+            </a:pPr>
+            <a:r>
+              <a:rPr lang="en-US" sz="3600" b="1" dirty="0">
+                <a:solidFill>
+                  <a:srgbClr val="990011"/>
+                </a:solidFill>
+                <a:latin typeface="Times New Roman" pitchFamily="34" charset="0"/>
+                <a:ea typeface="Times New Roman" pitchFamily="34" charset="-122"/>
+                <a:cs typeface="Times New Roman" pitchFamily="34" charset="-120"/>
+              </a:rPr>
+              <a:t>Expected Answer</a:t>
+            </a:r>
+            <a:endParaRPr lang="en-US" sz="3600" dirty="0"/>
+          </a:p>
+        </p:txBody>
+      </p:sp>
+      <p:sp>
+        <p:nvSpPr>
+          <p:cNvPr id="5" name="Text 2"/>
+          <p:cNvSpPr/>
+          <p:nvPr/>
+        </p:nvSpPr>
+        <p:spPr>
+          <a:xfrm>
+            <a:off x="5349240" y="1783080"/>
+            <a:ext cx="6522415" cy="4663440"/>
+          </a:xfrm>
+          <a:prstGeom prst="rect">
+            <a:avLst/>
+          </a:prstGeom>
+          <a:noFill/>
+          <a:ln/>
+        </p:spPr>
+        <p:txBody>
+          <a:bodyPr wrap="square" lIns="0" tIns="0" rIns="0" bIns="0" rtlCol="0" anchor="t"/>
+          <a:lstStyle/>
+          <a:p>
+            <a:pPr algn="l" indent="0" marL="0">
+              <a:spcAft>
+                <a:spcPts val="800"/>
+              </a:spcAft>
+              <a:buNone/>
+            </a:pPr>
+            <a:r>
+              <a:rPr lang="en-US" sz="4000" dirty="0">
+                <a:solidFill>
+                  <a:srgbClr val="111111"/>
+                </a:solidFill>
+                <a:latin typeface="Times New Roman" pitchFamily="34" charset="0"/>
+                <a:ea typeface="Times New Roman" pitchFamily="34" charset="-122"/>
+                <a:cs typeface="Times New Roman" pitchFamily="34" charset="-120"/>
+              </a:rPr>
+              <a:t>Oil and solar energy.</a:t>
+            </a:r>
+            <a:endParaRPr lang="en-US" sz="4000" dirty="0"/>
+          </a:p>
+        </p:txBody>
+      </p:sp>
+      <p:sp>
+        <p:nvSpPr>
+          <p:cNvPr id="25" name="Slide Number Placeholder 0"/>
+          <p:cNvSpPr>
+            <a:spLocks noGrp="1"/>
+          </p:cNvSpPr>
+          <p:nvPr>
+            <p:ph type="sldNum" sz="quarter" idx="4294967295"/>
+          </p:nvPr>
+        </p:nvSpPr>
+        <p:spPr>
+          <a:xfrm>
+            <a:off x="27432" y="91440"/>
+            <a:ext cx="585216" cy="475488"/>
+          </a:xfrm>
+          <a:prstGeom prst="rect">
+            <a:avLst/>
+          </a:prstGeom>
+          <a:extLst>
+            <a:ext uri="{C572A759-6A51-4108-AA02-DFA0A04FC94B}">
+              <ma14:wrappingTextBoxFlag xmlns:ma14="http://schemas.microsoft.com/office/mac/drawingml/2011/main" val="0"/>
+            </a:ext>
+          </a:extLst>
+        </p:spPr>
+        <p:txBody>
+          <a:bodyPr/>
+          <a:lstStyle>
+            <a:lvl1pPr>
+              <a:defRPr sz="2000">
+                <a:solidFill>
+                  <a:srgbClr val="FFFFFF"/>
+                </a:solidFill>
+                <a:latin typeface="Calibri"/>
+                <a:ea typeface="Calibri"/>
+                <a:cs typeface="Calibri"/>
+              </a:defRPr>
+            </a:lvl1pPr>
+          </a:lstStyle>
+          <a:p>
+            <a:pPr algn="ctr"/>
+            <a:fld id="{F7021451-1387-4CA6-816F-3879F97B5CBC}" type="slidenum">
+              <a:rPr b="1" lang="en-US"/>
+              <a:t>44</a:t>
+            </a:fld>
+            <a:endParaRPr lang="en-US"/>
+          </a:p>
+        </p:txBody>
+      </p:sp>
+    </p:spTree>
+  </p:cSld>
+  <p:clrMapOvr>
+    <a:masterClrMapping/>
+  </p:clrMapOvr>
+</p:sld>
+</file>
+
+<file path=ppt/slides/slide45.xml><?xml version="1.0" encoding="utf-8"?>
+<p:sld xmlns:a="http://schemas.openxmlformats.org/drawingml/2006/main" xmlns:r="http://schemas.openxmlformats.org/officeDocument/2006/relationships" xmlns:p="http://schemas.openxmlformats.org/presentationml/2006/main">
+  <p:cSld name="Slide 45">
+    <p:spTree>
+      <p:nvGrpSpPr>
+        <p:cNvPr id="1" name=""/>
+        <p:cNvGrpSpPr/>
+        <p:nvPr/>
+      </p:nvGrpSpPr>
+      <p:grpSpPr>
+        <a:xfrm>
+          <a:off x="0" y="0"/>
+          <a:ext cx="0" cy="0"/>
+          <a:chOff x="0" y="0"/>
+          <a:chExt cx="0" cy="0"/>
+        </a:xfrm>
+      </p:grpSpPr>
+      <p:sp>
+        <p:nvSpPr>
+          <p:cNvPr id="2" name="Text 0"/>
+          <p:cNvSpPr/>
+          <p:nvPr/>
+        </p:nvSpPr>
+        <p:spPr>
+          <a:xfrm>
+            <a:off x="457200" y="713232"/>
+            <a:ext cx="11368735" cy="274320"/>
+          </a:xfrm>
+          <a:prstGeom prst="rect">
+            <a:avLst/>
+          </a:prstGeom>
+          <a:noFill/>
+          <a:ln/>
+        </p:spPr>
+        <p:txBody>
+          <a:bodyPr wrap="square" lIns="0" tIns="0" rIns="0" bIns="0" rtlCol="0" anchor="ctr"/>
+          <a:lstStyle/>
+          <a:p>
+            <a:pPr algn="r" indent="0" marL="0">
+              <a:buNone/>
+            </a:pPr>
+            <a:r>
+              <a:rPr lang="en-US" sz="1400" b="1" dirty="0">
+                <a:solidFill>
+                  <a:srgbClr val="1C3F6E"/>
+                </a:solidFill>
+                <a:latin typeface="Calibri" pitchFamily="34" charset="0"/>
+                <a:ea typeface="Calibri" pitchFamily="34" charset="-122"/>
+                <a:cs typeface="Calibri" pitchFamily="34" charset="-120"/>
+              </a:rPr>
+              <a:t>FORMATIVE EVALUATION</a:t>
+            </a:r>
+            <a:endParaRPr lang="en-US" sz="1400" dirty="0"/>
+          </a:p>
+        </p:txBody>
+      </p:sp>
+      <p:pic>
+        <p:nvPicPr>
+          <p:cNvPr id="3" name="Image 0" descr="/home/claude/f4/img/minesec_sheet.png">    </p:cNvPr>
+          <p:cNvPicPr>
+            <a:picLocks noChangeAspect="1"/>
+          </p:cNvPicPr>
+          <p:nvPr/>
+        </p:nvPicPr>
+        <p:blipFill>
+          <a:blip r:embed="rId1"/>
+          <a:stretch>
+            <a:fillRect/>
+          </a:stretch>
+        </p:blipFill>
+        <p:spPr>
+          <a:xfrm>
+            <a:off x="0" y="658368"/>
+            <a:ext cx="5120640" cy="5833872"/>
+          </a:xfrm>
+          <a:prstGeom prst="rect">
+            <a:avLst/>
+          </a:prstGeom>
+        </p:spPr>
+      </p:pic>
+      <p:sp>
+        <p:nvSpPr>
+          <p:cNvPr id="4" name="Text 1"/>
+          <p:cNvSpPr/>
+          <p:nvPr/>
+        </p:nvSpPr>
+        <p:spPr>
+          <a:xfrm>
+            <a:off x="5349240" y="1005840"/>
+            <a:ext cx="6522415" cy="731520"/>
+          </a:xfrm>
+          <a:prstGeom prst="rect">
+            <a:avLst/>
+          </a:prstGeom>
+          <a:noFill/>
+          <a:ln/>
+        </p:spPr>
+        <p:txBody>
+          <a:bodyPr wrap="square" lIns="0" tIns="0" rIns="0" bIns="0" rtlCol="0" anchor="ctr">
+            <a:normAutofit/>
+          </a:bodyPr>
+          <a:lstStyle/>
+          <a:p>
+            <a:pPr algn="ctr" indent="0" marL="0">
+              <a:buNone/>
+            </a:pPr>
+            <a:r>
+              <a:rPr lang="en-US" sz="3600" b="1" dirty="0">
+                <a:solidFill>
+                  <a:srgbClr val="990011"/>
+                </a:solidFill>
+                <a:latin typeface="Times New Roman" pitchFamily="34" charset="0"/>
+                <a:ea typeface="Times New Roman" pitchFamily="34" charset="-122"/>
+                <a:cs typeface="Times New Roman" pitchFamily="34" charset="-120"/>
+              </a:rPr>
+              <a:t>Evaluation 2</a:t>
+            </a:r>
+            <a:endParaRPr lang="en-US" sz="3600" dirty="0"/>
+          </a:p>
+        </p:txBody>
+      </p:sp>
+      <p:sp>
+        <p:nvSpPr>
+          <p:cNvPr id="5" name="Text 2"/>
+          <p:cNvSpPr/>
+          <p:nvPr/>
+        </p:nvSpPr>
+        <p:spPr>
+          <a:xfrm>
+            <a:off x="5349240" y="1783080"/>
+            <a:ext cx="6522415" cy="4663440"/>
+          </a:xfrm>
+          <a:prstGeom prst="rect">
+            <a:avLst/>
+          </a:prstGeom>
+          <a:noFill/>
+          <a:ln/>
+        </p:spPr>
+        <p:txBody>
+          <a:bodyPr wrap="square" lIns="0" tIns="0" rIns="0" bIns="0" rtlCol="0" anchor="t"/>
+          <a:lstStyle/>
+          <a:p>
+            <a:pPr algn="l" indent="0" marL="0">
+              <a:spcAft>
+                <a:spcPts val="800"/>
+              </a:spcAft>
+              <a:buNone/>
+            </a:pPr>
+            <a:r>
+              <a:rPr lang="en-US" sz="4000" dirty="0">
+                <a:solidFill>
+                  <a:srgbClr val="111111"/>
+                </a:solidFill>
+                <a:latin typeface="Times New Roman" pitchFamily="34" charset="0"/>
+                <a:ea typeface="Times New Roman" pitchFamily="34" charset="-122"/>
+                <a:cs typeface="Times New Roman" pitchFamily="34" charset="-120"/>
+              </a:rPr>
+              <a:t>How can we fight desertification?</a:t>
+            </a:r>
+            <a:endParaRPr lang="en-US" sz="4000" dirty="0"/>
+          </a:p>
+        </p:txBody>
+      </p:sp>
+      <p:sp>
+        <p:nvSpPr>
+          <p:cNvPr id="25" name="Slide Number Placeholder 0"/>
+          <p:cNvSpPr>
+            <a:spLocks noGrp="1"/>
+          </p:cNvSpPr>
+          <p:nvPr>
+            <p:ph type="sldNum" sz="quarter" idx="4294967295"/>
+          </p:nvPr>
+        </p:nvSpPr>
+        <p:spPr>
+          <a:xfrm>
+            <a:off x="27432" y="91440"/>
+            <a:ext cx="585216" cy="475488"/>
+          </a:xfrm>
+          <a:prstGeom prst="rect">
+            <a:avLst/>
+          </a:prstGeom>
+          <a:extLst>
+            <a:ext uri="{C572A759-6A51-4108-AA02-DFA0A04FC94B}">
+              <ma14:wrappingTextBoxFlag xmlns:ma14="http://schemas.microsoft.com/office/mac/drawingml/2011/main" val="0"/>
+            </a:ext>
+          </a:extLst>
+        </p:spPr>
+        <p:txBody>
+          <a:bodyPr/>
+          <a:lstStyle>
+            <a:lvl1pPr>
+              <a:defRPr sz="2000">
+                <a:solidFill>
+                  <a:srgbClr val="FFFFFF"/>
+                </a:solidFill>
+                <a:latin typeface="Calibri"/>
+                <a:ea typeface="Calibri"/>
+                <a:cs typeface="Calibri"/>
+              </a:defRPr>
+            </a:lvl1pPr>
+          </a:lstStyle>
+          <a:p>
+            <a:pPr algn="ctr"/>
+            <a:fld id="{F7021451-1387-4CA6-816F-3879F97B5CBC}" type="slidenum">
+              <a:rPr b="1" lang="en-US"/>
+              <a:t>45</a:t>
+            </a:fld>
+            <a:endParaRPr lang="en-US"/>
+          </a:p>
+        </p:txBody>
+      </p:sp>
+    </p:spTree>
+  </p:cSld>
+  <p:clrMapOvr>
+    <a:masterClrMapping/>
+  </p:clrMapOvr>
+</p:sld>
+</file>
+
+<file path=ppt/slides/slide46.xml><?xml version="1.0" encoding="utf-8"?>
+<p:sld xmlns:a="http://schemas.openxmlformats.org/drawingml/2006/main" xmlns:r="http://schemas.openxmlformats.org/officeDocument/2006/relationships" xmlns:p="http://schemas.openxmlformats.org/presentationml/2006/main">
+  <p:cSld name="Slide 46">
+    <p:spTree>
+      <p:nvGrpSpPr>
+        <p:cNvPr id="1" name=""/>
+        <p:cNvGrpSpPr/>
+        <p:nvPr/>
+      </p:nvGrpSpPr>
+      <p:grpSpPr>
+        <a:xfrm>
+          <a:off x="0" y="0"/>
+          <a:ext cx="0" cy="0"/>
+          <a:chOff x="0" y="0"/>
+          <a:chExt cx="0" cy="0"/>
+        </a:xfrm>
+      </p:grpSpPr>
+      <p:sp>
+        <p:nvSpPr>
+          <p:cNvPr id="2" name="Text 0"/>
+          <p:cNvSpPr/>
+          <p:nvPr/>
+        </p:nvSpPr>
+        <p:spPr>
+          <a:xfrm>
+            <a:off x="457200" y="713232"/>
+            <a:ext cx="11368735" cy="274320"/>
+          </a:xfrm>
+          <a:prstGeom prst="rect">
+            <a:avLst/>
+          </a:prstGeom>
+          <a:noFill/>
+          <a:ln/>
+        </p:spPr>
+        <p:txBody>
+          <a:bodyPr wrap="square" lIns="0" tIns="0" rIns="0" bIns="0" rtlCol="0" anchor="ctr"/>
+          <a:lstStyle/>
+          <a:p>
+            <a:pPr algn="r" indent="0" marL="0">
+              <a:buNone/>
+            </a:pPr>
+            <a:r>
+              <a:rPr lang="en-US" sz="1400" b="1" dirty="0">
+                <a:solidFill>
+                  <a:srgbClr val="1C3F6E"/>
+                </a:solidFill>
+                <a:latin typeface="Calibri" pitchFamily="34" charset="0"/>
+                <a:ea typeface="Calibri" pitchFamily="34" charset="-122"/>
+                <a:cs typeface="Calibri" pitchFamily="34" charset="-120"/>
+              </a:rPr>
+              <a:t>FORMATIVE EVALUATION</a:t>
+            </a:r>
+            <a:endParaRPr lang="en-US" sz="1400" dirty="0"/>
+          </a:p>
+        </p:txBody>
+      </p:sp>
+      <p:pic>
+        <p:nvPicPr>
+          <p:cNvPr id="3" name="Image 0" descr="/home/claude/f4/img/minesec_sheet.png">    </p:cNvPr>
+          <p:cNvPicPr>
+            <a:picLocks noChangeAspect="1"/>
+          </p:cNvPicPr>
+          <p:nvPr/>
+        </p:nvPicPr>
+        <p:blipFill>
+          <a:blip r:embed="rId1"/>
+          <a:stretch>
+            <a:fillRect/>
+          </a:stretch>
+        </p:blipFill>
+        <p:spPr>
+          <a:xfrm>
+            <a:off x="0" y="658368"/>
+            <a:ext cx="5120640" cy="5833872"/>
+          </a:xfrm>
+          <a:prstGeom prst="rect">
+            <a:avLst/>
+          </a:prstGeom>
+        </p:spPr>
+      </p:pic>
+      <p:sp>
+        <p:nvSpPr>
+          <p:cNvPr id="4" name="Text 1"/>
+          <p:cNvSpPr/>
+          <p:nvPr/>
+        </p:nvSpPr>
+        <p:spPr>
+          <a:xfrm>
+            <a:off x="5349240" y="1005840"/>
+            <a:ext cx="6522415" cy="731520"/>
+          </a:xfrm>
+          <a:prstGeom prst="rect">
+            <a:avLst/>
+          </a:prstGeom>
+          <a:noFill/>
+          <a:ln/>
+        </p:spPr>
+        <p:txBody>
+          <a:bodyPr wrap="square" lIns="0" tIns="0" rIns="0" bIns="0" rtlCol="0" anchor="ctr">
+            <a:normAutofit/>
+          </a:bodyPr>
+          <a:lstStyle/>
+          <a:p>
+            <a:pPr algn="ctr" indent="0" marL="0">
+              <a:buNone/>
+            </a:pPr>
+            <a:r>
+              <a:rPr lang="en-US" sz="3600" b="1" dirty="0">
+                <a:solidFill>
+                  <a:srgbClr val="990011"/>
+                </a:solidFill>
+                <a:latin typeface="Times New Roman" pitchFamily="34" charset="0"/>
+                <a:ea typeface="Times New Roman" pitchFamily="34" charset="-122"/>
+                <a:cs typeface="Times New Roman" pitchFamily="34" charset="-120"/>
+              </a:rPr>
+              <a:t>Expected Answer</a:t>
+            </a:r>
+            <a:endParaRPr lang="en-US" sz="3600" dirty="0"/>
+          </a:p>
+        </p:txBody>
+      </p:sp>
+      <p:sp>
+        <p:nvSpPr>
+          <p:cNvPr id="5" name="Text 2"/>
+          <p:cNvSpPr/>
+          <p:nvPr/>
+        </p:nvSpPr>
+        <p:spPr>
+          <a:xfrm>
+            <a:off x="5349240" y="1783080"/>
+            <a:ext cx="6522415" cy="4663440"/>
+          </a:xfrm>
+          <a:prstGeom prst="rect">
+            <a:avLst/>
+          </a:prstGeom>
+          <a:noFill/>
+          <a:ln/>
+        </p:spPr>
+        <p:txBody>
+          <a:bodyPr wrap="square" lIns="0" tIns="0" rIns="0" bIns="0" rtlCol="0" anchor="t"/>
+          <a:lstStyle/>
+          <a:p>
+            <a:pPr algn="l" indent="0" marL="0">
+              <a:spcAft>
+                <a:spcPts val="800"/>
+              </a:spcAft>
+              <a:buNone/>
+            </a:pPr>
+            <a:r>
+              <a:rPr lang="en-US" sz="4000" dirty="0">
+                <a:solidFill>
+                  <a:srgbClr val="111111"/>
+                </a:solidFill>
+                <a:latin typeface="Times New Roman" pitchFamily="34" charset="0"/>
+                <a:ea typeface="Times New Roman" pitchFamily="34" charset="-122"/>
+                <a:cs typeface="Times New Roman" pitchFamily="34" charset="-120"/>
+              </a:rPr>
+              <a:t>Plant trees (Great Green Wall).</a:t>
+            </a:r>
+            <a:endParaRPr lang="en-US" sz="4000" dirty="0"/>
+          </a:p>
+        </p:txBody>
+      </p:sp>
+      <p:sp>
+        <p:nvSpPr>
+          <p:cNvPr id="25" name="Slide Number Placeholder 0"/>
+          <p:cNvSpPr>
+            <a:spLocks noGrp="1"/>
+          </p:cNvSpPr>
+          <p:nvPr>
+            <p:ph type="sldNum" sz="quarter" idx="4294967295"/>
+          </p:nvPr>
+        </p:nvSpPr>
+        <p:spPr>
+          <a:xfrm>
+            <a:off x="27432" y="91440"/>
+            <a:ext cx="585216" cy="475488"/>
+          </a:xfrm>
+          <a:prstGeom prst="rect">
+            <a:avLst/>
+          </a:prstGeom>
+          <a:extLst>
+            <a:ext uri="{C572A759-6A51-4108-AA02-DFA0A04FC94B}">
+              <ma14:wrappingTextBoxFlag xmlns:ma14="http://schemas.microsoft.com/office/mac/drawingml/2011/main" val="0"/>
+            </a:ext>
+          </a:extLst>
+        </p:spPr>
+        <p:txBody>
+          <a:bodyPr/>
+          <a:lstStyle>
+            <a:lvl1pPr>
+              <a:defRPr sz="2000">
+                <a:solidFill>
+                  <a:srgbClr val="FFFFFF"/>
+                </a:solidFill>
+                <a:latin typeface="Calibri"/>
+                <a:ea typeface="Calibri"/>
+                <a:cs typeface="Calibri"/>
+              </a:defRPr>
+            </a:lvl1pPr>
+          </a:lstStyle>
+          <a:p>
+            <a:pPr algn="ctr"/>
+            <a:fld id="{F7021451-1387-4CA6-816F-3879F97B5CBC}" type="slidenum">
+              <a:rPr b="1" lang="en-US"/>
+              <a:t>46</a:t>
+            </a:fld>
+            <a:endParaRPr lang="en-US"/>
+          </a:p>
+        </p:txBody>
+      </p:sp>
+    </p:spTree>
+  </p:cSld>
+  <p:clrMapOvr>
+    <a:masterClrMapping/>
+  </p:clrMapOvr>
+</p:sld>
+</file>
+
+<file path=ppt/slides/slide47.xml><?xml version="1.0" encoding="utf-8"?>
+<p:sld xmlns:a="http://schemas.openxmlformats.org/drawingml/2006/main" xmlns:r="http://schemas.openxmlformats.org/officeDocument/2006/relationships" xmlns:p="http://schemas.openxmlformats.org/presentationml/2006/main">
+  <p:cSld name="Slide 47">
+    <p:spTree>
+      <p:nvGrpSpPr>
+        <p:cNvPr id="1" name=""/>
+        <p:cNvGrpSpPr/>
+        <p:nvPr/>
+      </p:nvGrpSpPr>
+      <p:grpSpPr>
+        <a:xfrm>
+          <a:off x="0" y="0"/>
+          <a:ext cx="0" cy="0"/>
+          <a:chOff x="0" y="0"/>
+          <a:chExt cx="0" cy="0"/>
+        </a:xfrm>
+      </p:grpSpPr>
+      <p:sp>
+        <p:nvSpPr>
+          <p:cNvPr id="2" name="Text 0"/>
+          <p:cNvSpPr/>
+          <p:nvPr/>
+        </p:nvSpPr>
+        <p:spPr>
+          <a:xfrm>
+            <a:off x="457200" y="713232"/>
+            <a:ext cx="11368735" cy="274320"/>
+          </a:xfrm>
+          <a:prstGeom prst="rect">
+            <a:avLst/>
+          </a:prstGeom>
+          <a:noFill/>
+          <a:ln/>
+        </p:spPr>
+        <p:txBody>
+          <a:bodyPr wrap="square" lIns="0" tIns="0" rIns="0" bIns="0" rtlCol="0" anchor="ctr"/>
+          <a:lstStyle/>
+          <a:p>
+            <a:pPr algn="r" indent="0" marL="0">
+              <a:buNone/>
+            </a:pPr>
+            <a:r>
+              <a:rPr lang="en-US" sz="1400" b="1" dirty="0">
+                <a:solidFill>
+                  <a:srgbClr val="1C3F6E"/>
+                </a:solidFill>
+                <a:latin typeface="Calibri" pitchFamily="34" charset="0"/>
+                <a:ea typeface="Calibri" pitchFamily="34" charset="-122"/>
+                <a:cs typeface="Calibri" pitchFamily="34" charset="-120"/>
+              </a:rPr>
+              <a:t>REMEDIATION</a:t>
+            </a:r>
+            <a:endParaRPr lang="en-US" sz="1400" dirty="0"/>
+          </a:p>
+        </p:txBody>
+      </p:sp>
+      <p:pic>
+        <p:nvPicPr>
+          <p:cNvPr id="3" name="Image 0" descr="/home/claude/f4/img/minesec_sheet.png">    </p:cNvPr>
+          <p:cNvPicPr>
+            <a:picLocks noChangeAspect="1"/>
+          </p:cNvPicPr>
+          <p:nvPr/>
+        </p:nvPicPr>
+        <p:blipFill>
+          <a:blip r:embed="rId1"/>
+          <a:stretch>
+            <a:fillRect/>
+          </a:stretch>
+        </p:blipFill>
+        <p:spPr>
+          <a:xfrm>
+            <a:off x="0" y="658368"/>
+            <a:ext cx="2468880" cy="5833872"/>
+          </a:xfrm>
+          <a:prstGeom prst="rect">
+            <a:avLst/>
+          </a:prstGeom>
+        </p:spPr>
+      </p:pic>
+      <p:sp>
+        <p:nvSpPr>
+          <p:cNvPr id="4" name="Text 1"/>
+          <p:cNvSpPr/>
+          <p:nvPr/>
+        </p:nvSpPr>
+        <p:spPr>
+          <a:xfrm>
+            <a:off x="2697480" y="1005840"/>
+            <a:ext cx="9174175" cy="731520"/>
+          </a:xfrm>
+          <a:prstGeom prst="rect">
+            <a:avLst/>
+          </a:prstGeom>
+          <a:noFill/>
+          <a:ln/>
+        </p:spPr>
+        <p:txBody>
+          <a:bodyPr wrap="square" lIns="0" tIns="0" rIns="0" bIns="0" rtlCol="0" anchor="ctr">
+            <a:normAutofit/>
+          </a:bodyPr>
+          <a:lstStyle/>
+          <a:p>
+            <a:pPr algn="ctr" indent="0" marL="0">
+              <a:buNone/>
+            </a:pPr>
+            <a:r>
+              <a:rPr lang="en-US" sz="3600" b="1" dirty="0">
+                <a:solidFill>
+                  <a:srgbClr val="990011"/>
+                </a:solidFill>
+                <a:latin typeface="Times New Roman" pitchFamily="34" charset="0"/>
+                <a:ea typeface="Times New Roman" pitchFamily="34" charset="-122"/>
+                <a:cs typeface="Times New Roman" pitchFamily="34" charset="-120"/>
+              </a:rPr>
+              <a:t>Remediation</a:t>
+            </a:r>
+            <a:endParaRPr lang="en-US" sz="3600" dirty="0"/>
+          </a:p>
+        </p:txBody>
+      </p:sp>
+      <p:sp>
+        <p:nvSpPr>
+          <p:cNvPr id="5" name="Text 2"/>
+          <p:cNvSpPr/>
+          <p:nvPr/>
+        </p:nvSpPr>
+        <p:spPr>
+          <a:xfrm>
+            <a:off x="2697480" y="1783080"/>
+            <a:ext cx="9174175" cy="4663440"/>
+          </a:xfrm>
+          <a:prstGeom prst="rect">
+            <a:avLst/>
+          </a:prstGeom>
+          <a:noFill/>
+          <a:ln/>
+        </p:spPr>
+        <p:txBody>
+          <a:bodyPr wrap="square" lIns="0" tIns="0" rIns="0" bIns="0" rtlCol="0" anchor="t"/>
+          <a:lstStyle/>
+          <a:p>
+            <a:pPr algn="l" indent="0" marL="0">
+              <a:spcAft>
+                <a:spcPts val="800"/>
+              </a:spcAft>
+              <a:buNone/>
+            </a:pPr>
+            <a:r>
+              <a:rPr lang="en-US" sz="4000" b="1" dirty="0">
+                <a:solidFill>
+                  <a:srgbClr val="111111"/>
+                </a:solidFill>
+                <a:latin typeface="Times New Roman" pitchFamily="34" charset="0"/>
+                <a:ea typeface="Times New Roman" pitchFamily="34" charset="-122"/>
+                <a:cs typeface="Times New Roman" pitchFamily="34" charset="-120"/>
+              </a:rPr>
+              <a:t>Fill in the blanks:</a:t>
+            </a:r>
+            <a:endParaRPr lang="en-US" sz="4000" dirty="0"/>
+          </a:p>
+          <a:p>
+            <a:pPr algn="l" marL="342900" indent="-342900">
+              <a:spcAft>
+                <a:spcPts val="800"/>
+              </a:spcAft>
+              <a:buSzPct val="100000"/>
+              <a:buFont typeface="+mj-lt"/>
+              <a:buAutoNum type="arabicPeriod" startAt="1"/>
+            </a:pPr>
+            <a:r>
+              <a:rPr lang="en-US" sz="4000" dirty="0">
+                <a:solidFill>
+                  <a:srgbClr val="111111"/>
+                </a:solidFill>
+                <a:latin typeface="Times New Roman" pitchFamily="34" charset="0"/>
+                <a:ea typeface="Times New Roman" pitchFamily="34" charset="-122"/>
+                <a:cs typeface="Times New Roman" pitchFamily="34" charset="-120"/>
+              </a:rPr>
+              <a:t>The spread of the desert is ______.</a:t>
+            </a:r>
+            <a:endParaRPr lang="en-US" sz="4000" dirty="0"/>
+          </a:p>
+          <a:p>
+            <a:pPr algn="l" marL="342900" indent="-342900">
+              <a:spcAft>
+                <a:spcPts val="800"/>
+              </a:spcAft>
+              <a:buSzPct val="100000"/>
+              <a:buFont typeface="+mj-lt"/>
+              <a:buAutoNum type="arabicPeriod" startAt="1"/>
+            </a:pPr>
+            <a:r>
+              <a:rPr lang="en-US" sz="4000" dirty="0">
+                <a:solidFill>
+                  <a:srgbClr val="111111"/>
+                </a:solidFill>
+                <a:latin typeface="Times New Roman" pitchFamily="34" charset="0"/>
+                <a:ea typeface="Times New Roman" pitchFamily="34" charset="-122"/>
+                <a:cs typeface="Times New Roman" pitchFamily="34" charset="-120"/>
+              </a:rPr>
+              <a:t>Morocco makes electricity from the ______.</a:t>
+            </a:r>
+            <a:endParaRPr lang="en-US" sz="4000" dirty="0"/>
+          </a:p>
+          <a:p>
+            <a:pPr algn="l" marL="342900" indent="-342900">
+              <a:spcAft>
+                <a:spcPts val="800"/>
+              </a:spcAft>
+              <a:buSzPct val="100000"/>
+              <a:buFont typeface="+mj-lt"/>
+              <a:buAutoNum type="arabicPeriod" startAt="1"/>
+            </a:pPr>
+            <a:r>
+              <a:rPr lang="en-US" sz="4000" dirty="0">
+                <a:solidFill>
+                  <a:srgbClr val="111111"/>
+                </a:solidFill>
+                <a:latin typeface="Times New Roman" pitchFamily="34" charset="0"/>
+                <a:ea typeface="Times New Roman" pitchFamily="34" charset="-122"/>
+                <a:cs typeface="Times New Roman" pitchFamily="34" charset="-120"/>
+              </a:rPr>
+              <a:t>The Tuareg are ______ who move with their animals.</a:t>
+            </a:r>
+            <a:endParaRPr lang="en-US" sz="4000" dirty="0"/>
+          </a:p>
+        </p:txBody>
+      </p:sp>
+      <p:sp>
+        <p:nvSpPr>
+          <p:cNvPr id="25" name="Slide Number Placeholder 0"/>
+          <p:cNvSpPr>
+            <a:spLocks noGrp="1"/>
+          </p:cNvSpPr>
+          <p:nvPr>
+            <p:ph type="sldNum" sz="quarter" idx="4294967295"/>
+          </p:nvPr>
+        </p:nvSpPr>
+        <p:spPr>
+          <a:xfrm>
+            <a:off x="27432" y="91440"/>
+            <a:ext cx="585216" cy="475488"/>
+          </a:xfrm>
+          <a:prstGeom prst="rect">
+            <a:avLst/>
+          </a:prstGeom>
+          <a:extLst>
+            <a:ext uri="{C572A759-6A51-4108-AA02-DFA0A04FC94B}">
+              <ma14:wrappingTextBoxFlag xmlns:ma14="http://schemas.microsoft.com/office/mac/drawingml/2011/main" val="0"/>
+            </a:ext>
+          </a:extLst>
+        </p:spPr>
+        <p:txBody>
+          <a:bodyPr/>
+          <a:lstStyle>
+            <a:lvl1pPr>
+              <a:defRPr sz="2000">
+                <a:solidFill>
+                  <a:srgbClr val="FFFFFF"/>
+                </a:solidFill>
+                <a:latin typeface="Calibri"/>
+                <a:ea typeface="Calibri"/>
+                <a:cs typeface="Calibri"/>
+              </a:defRPr>
+            </a:lvl1pPr>
+          </a:lstStyle>
+          <a:p>
+            <a:pPr algn="ctr"/>
+            <a:fld id="{F7021451-1387-4CA6-816F-3879F97B5CBC}" type="slidenum">
+              <a:rPr b="1" lang="en-US"/>
+              <a:t>47</a:t>
+            </a:fld>
+            <a:endParaRPr lang="en-US"/>
+          </a:p>
+        </p:txBody>
+      </p:sp>
+    </p:spTree>
+  </p:cSld>
+  <p:clrMapOvr>
+    <a:masterClrMapping/>
+  </p:clrMapOvr>
+</p:sld>
+</file>
+
+<file path=ppt/slides/slide48.xml><?xml version="1.0" encoding="utf-8"?>
+<p:sld xmlns:a="http://schemas.openxmlformats.org/drawingml/2006/main" xmlns:r="http://schemas.openxmlformats.org/officeDocument/2006/relationships" xmlns:p="http://schemas.openxmlformats.org/presentationml/2006/main">
+  <p:cSld name="Slide 48">
+    <p:spTree>
+      <p:nvGrpSpPr>
+        <p:cNvPr id="1" name=""/>
+        <p:cNvGrpSpPr/>
+        <p:nvPr/>
+      </p:nvGrpSpPr>
+      <p:grpSpPr>
+        <a:xfrm>
+          <a:off x="0" y="0"/>
+          <a:ext cx="0" cy="0"/>
+          <a:chOff x="0" y="0"/>
+          <a:chExt cx="0" cy="0"/>
+        </a:xfrm>
+      </p:grpSpPr>
+      <p:sp>
+        <p:nvSpPr>
+          <p:cNvPr id="2" name="Text 0"/>
+          <p:cNvSpPr/>
+          <p:nvPr/>
+        </p:nvSpPr>
+        <p:spPr>
+          <a:xfrm>
+            <a:off x="457200" y="713232"/>
+            <a:ext cx="11368735" cy="274320"/>
+          </a:xfrm>
+          <a:prstGeom prst="rect">
+            <a:avLst/>
+          </a:prstGeom>
+          <a:noFill/>
+          <a:ln/>
+        </p:spPr>
+        <p:txBody>
+          <a:bodyPr wrap="square" lIns="0" tIns="0" rIns="0" bIns="0" rtlCol="0" anchor="ctr"/>
+          <a:lstStyle/>
+          <a:p>
+            <a:pPr algn="r" indent="0" marL="0">
+              <a:buNone/>
+            </a:pPr>
+            <a:r>
+              <a:rPr lang="en-US" sz="1400" b="1" dirty="0">
+                <a:solidFill>
+                  <a:srgbClr val="1C3F6E"/>
+                </a:solidFill>
+                <a:latin typeface="Calibri" pitchFamily="34" charset="0"/>
+                <a:ea typeface="Calibri" pitchFamily="34" charset="-122"/>
+                <a:cs typeface="Calibri" pitchFamily="34" charset="-120"/>
+              </a:rPr>
+              <a:t>HOMEWORK</a:t>
+            </a:r>
+            <a:endParaRPr lang="en-US" sz="1400" dirty="0"/>
+          </a:p>
+        </p:txBody>
+      </p:sp>
+      <p:pic>
+        <p:nvPicPr>
+          <p:cNvPr id="3" name="Image 0" descr="/home/claude/f4/img/minesec_sheet.png">    </p:cNvPr>
+          <p:cNvPicPr>
+            <a:picLocks noChangeAspect="1"/>
+          </p:cNvPicPr>
+          <p:nvPr/>
+        </p:nvPicPr>
+        <p:blipFill>
+          <a:blip r:embed="rId1"/>
+          <a:stretch>
+            <a:fillRect/>
+          </a:stretch>
+        </p:blipFill>
+        <p:spPr>
+          <a:xfrm>
+            <a:off x="0" y="658368"/>
+            <a:ext cx="5120640" cy="5833872"/>
+          </a:xfrm>
+          <a:prstGeom prst="rect">
+            <a:avLst/>
+          </a:prstGeom>
+        </p:spPr>
+      </p:pic>
+      <p:sp>
+        <p:nvSpPr>
+          <p:cNvPr id="4" name="Text 1"/>
+          <p:cNvSpPr/>
+          <p:nvPr/>
+        </p:nvSpPr>
+        <p:spPr>
+          <a:xfrm>
+            <a:off x="5349240" y="1005840"/>
+            <a:ext cx="6522415" cy="731520"/>
+          </a:xfrm>
+          <a:prstGeom prst="rect">
+            <a:avLst/>
+          </a:prstGeom>
+          <a:noFill/>
+          <a:ln/>
+        </p:spPr>
+        <p:txBody>
+          <a:bodyPr wrap="square" lIns="0" tIns="0" rIns="0" bIns="0" rtlCol="0" anchor="ctr">
+            <a:normAutofit/>
+          </a:bodyPr>
+          <a:lstStyle/>
+          <a:p>
+            <a:pPr algn="ctr" indent="0" marL="0">
+              <a:buNone/>
+            </a:pPr>
+            <a:r>
+              <a:rPr lang="en-US" sz="3600" b="1" dirty="0">
+                <a:solidFill>
+                  <a:srgbClr val="990011"/>
+                </a:solidFill>
+                <a:latin typeface="Times New Roman" pitchFamily="34" charset="0"/>
+                <a:ea typeface="Times New Roman" pitchFamily="34" charset="-122"/>
+                <a:cs typeface="Times New Roman" pitchFamily="34" charset="-120"/>
+              </a:rPr>
+              <a:t>Homework</a:t>
+            </a:r>
+            <a:endParaRPr lang="en-US" sz="3600" dirty="0"/>
+          </a:p>
+        </p:txBody>
+      </p:sp>
+      <p:sp>
+        <p:nvSpPr>
+          <p:cNvPr id="5" name="Text 2"/>
+          <p:cNvSpPr/>
+          <p:nvPr/>
+        </p:nvSpPr>
+        <p:spPr>
+          <a:xfrm>
+            <a:off x="5349240" y="1783080"/>
+            <a:ext cx="6522415" cy="4663440"/>
+          </a:xfrm>
+          <a:prstGeom prst="rect">
+            <a:avLst/>
+          </a:prstGeom>
+          <a:noFill/>
+          <a:ln/>
+        </p:spPr>
+        <p:txBody>
+          <a:bodyPr wrap="square" lIns="0" tIns="0" rIns="0" bIns="0" rtlCol="0" anchor="t"/>
+          <a:lstStyle/>
+          <a:p>
+            <a:pPr algn="l" indent="0" marL="0">
+              <a:spcAft>
+                <a:spcPts val="800"/>
+              </a:spcAft>
+              <a:buNone/>
+            </a:pPr>
+            <a:r>
+              <a:rPr lang="en-US" sz="4000" dirty="0">
+                <a:solidFill>
+                  <a:srgbClr val="111111"/>
+                </a:solidFill>
+                <a:latin typeface="Times New Roman" pitchFamily="34" charset="0"/>
+                <a:ea typeface="Times New Roman" pitchFamily="34" charset="-122"/>
+                <a:cs typeface="Times New Roman" pitchFamily="34" charset="-120"/>
+              </a:rPr>
+              <a:t>Make a table with three columns: resources, hazards and adaptations. Fill it with examples from the hot deserts and from the dry season in Garoua.</a:t>
+            </a:r>
+            <a:endParaRPr lang="en-US" sz="4000" dirty="0"/>
+          </a:p>
+        </p:txBody>
+      </p:sp>
+      <p:sp>
+        <p:nvSpPr>
+          <p:cNvPr id="25" name="Slide Number Placeholder 0"/>
+          <p:cNvSpPr>
+            <a:spLocks noGrp="1"/>
+          </p:cNvSpPr>
+          <p:nvPr>
+            <p:ph type="sldNum" sz="quarter" idx="4294967295"/>
+          </p:nvPr>
+        </p:nvSpPr>
+        <p:spPr>
+          <a:xfrm>
+            <a:off x="27432" y="91440"/>
+            <a:ext cx="585216" cy="475488"/>
+          </a:xfrm>
+          <a:prstGeom prst="rect">
+            <a:avLst/>
+          </a:prstGeom>
+          <a:extLst>
+            <a:ext uri="{C572A759-6A51-4108-AA02-DFA0A04FC94B}">
+              <ma14:wrappingTextBoxFlag xmlns:ma14="http://schemas.microsoft.com/office/mac/drawingml/2011/main" val="0"/>
+            </a:ext>
+          </a:extLst>
+        </p:spPr>
+        <p:txBody>
+          <a:bodyPr/>
+          <a:lstStyle>
+            <a:lvl1pPr>
+              <a:defRPr sz="2000">
+                <a:solidFill>
+                  <a:srgbClr val="FFFFFF"/>
+                </a:solidFill>
+                <a:latin typeface="Calibri"/>
+                <a:ea typeface="Calibri"/>
+                <a:cs typeface="Calibri"/>
+              </a:defRPr>
+            </a:lvl1pPr>
+          </a:lstStyle>
+          <a:p>
+            <a:pPr algn="ctr"/>
+            <a:fld id="{F7021451-1387-4CA6-816F-3879F97B5CBC}" type="slidenum">
+              <a:rPr b="1" lang="en-US"/>
+              <a:t>48</a:t>
+            </a:fld>
+            <a:endParaRPr lang="en-US"/>
+          </a:p>
+        </p:txBody>
+      </p:sp>
+    </p:spTree>
+  </p:cSld>
+  <p:clrMapOvr>
+    <a:masterClrMapping/>
+  </p:clrMapOvr>
+</p:sld>
+</file>
+
+<file path=ppt/slides/slide49.xml><?xml version="1.0" encoding="utf-8"?>
+<p:sld xmlns:a="http://schemas.openxmlformats.org/drawingml/2006/main" xmlns:r="http://schemas.openxmlformats.org/officeDocument/2006/relationships" xmlns:p="http://schemas.openxmlformats.org/presentationml/2006/main">
+  <p:cSld name="Slide 49">
+    <p:spTree>
+      <p:nvGrpSpPr>
+        <p:cNvPr id="1" name=""/>
+        <p:cNvGrpSpPr/>
+        <p:nvPr/>
+      </p:nvGrpSpPr>
+      <p:grpSpPr>
+        <a:xfrm>
+          <a:off x="0" y="0"/>
+          <a:ext cx="0" cy="0"/>
+          <a:chOff x="0" y="0"/>
+          <a:chExt cx="0" cy="0"/>
+        </a:xfrm>
+      </p:grpSpPr>
+      <p:sp>
+        <p:nvSpPr>
+          <p:cNvPr id="2" name="Text 0"/>
+          <p:cNvSpPr/>
+          <p:nvPr/>
+        </p:nvSpPr>
+        <p:spPr>
+          <a:xfrm>
+            <a:off x="457200" y="713232"/>
+            <a:ext cx="11368735" cy="274320"/>
+          </a:xfrm>
+          <a:prstGeom prst="rect">
+            <a:avLst/>
+          </a:prstGeom>
+          <a:noFill/>
+          <a:ln/>
+        </p:spPr>
+        <p:txBody>
+          <a:bodyPr wrap="square" lIns="0" tIns="0" rIns="0" bIns="0" rtlCol="0" anchor="ctr"/>
+          <a:lstStyle/>
+          <a:p>
+            <a:pPr algn="r" indent="0" marL="0">
+              <a:buNone/>
+            </a:pPr>
+            <a:r>
+              <a:rPr lang="en-US" sz="1400" b="1" dirty="0">
+                <a:solidFill>
+                  <a:srgbClr val="1C3F6E"/>
+                </a:solidFill>
+                <a:latin typeface="Calibri" pitchFamily="34" charset="0"/>
+                <a:ea typeface="Calibri" pitchFamily="34" charset="-122"/>
+                <a:cs typeface="Calibri" pitchFamily="34" charset="-120"/>
+              </a:rPr>
+              <a:t>NEXT LESSON</a:t>
+            </a:r>
+            <a:endParaRPr lang="en-US" sz="1400" dirty="0"/>
+          </a:p>
+        </p:txBody>
+      </p:sp>
+      <p:pic>
+        <p:nvPicPr>
+          <p:cNvPr id="3" name="Image 0" descr="/home/claude/f4/img/minesec_sheet.png">    </p:cNvPr>
+          <p:cNvPicPr>
+            <a:picLocks noChangeAspect="1"/>
+          </p:cNvPicPr>
+          <p:nvPr/>
+        </p:nvPicPr>
+        <p:blipFill>
+          <a:blip r:embed="rId1"/>
+          <a:stretch>
+            <a:fillRect/>
+          </a:stretch>
+        </p:blipFill>
+        <p:spPr>
+          <a:xfrm>
+            <a:off x="0" y="658368"/>
+            <a:ext cx="5120640" cy="5833872"/>
+          </a:xfrm>
+          <a:prstGeom prst="rect">
+            <a:avLst/>
+          </a:prstGeom>
+        </p:spPr>
+      </p:pic>
+      <p:sp>
+        <p:nvSpPr>
+          <p:cNvPr id="4" name="Text 1"/>
+          <p:cNvSpPr/>
+          <p:nvPr/>
+        </p:nvSpPr>
+        <p:spPr>
+          <a:xfrm>
+            <a:off x="5349240" y="1005840"/>
+            <a:ext cx="6522415" cy="731520"/>
+          </a:xfrm>
+          <a:prstGeom prst="rect">
+            <a:avLst/>
+          </a:prstGeom>
+          <a:noFill/>
+          <a:ln/>
+        </p:spPr>
+        <p:txBody>
+          <a:bodyPr wrap="square" lIns="0" tIns="0" rIns="0" bIns="0" rtlCol="0" anchor="ctr">
+            <a:normAutofit/>
+          </a:bodyPr>
+          <a:lstStyle/>
+          <a:p>
+            <a:pPr algn="ctr" indent="0" marL="0">
+              <a:buNone/>
+            </a:pPr>
+            <a:r>
+              <a:rPr lang="en-US" sz="3600" b="1" dirty="0">
+                <a:solidFill>
+                  <a:srgbClr val="990011"/>
+                </a:solidFill>
+                <a:latin typeface="Times New Roman" pitchFamily="34" charset="0"/>
+                <a:ea typeface="Times New Roman" pitchFamily="34" charset="-122"/>
+                <a:cs typeface="Times New Roman" pitchFamily="34" charset="-120"/>
+              </a:rPr>
+              <a:t>Next Lesson</a:t>
+            </a:r>
+            <a:endParaRPr lang="en-US" sz="3600" dirty="0"/>
+          </a:p>
+        </p:txBody>
+      </p:sp>
+      <p:sp>
+        <p:nvSpPr>
+          <p:cNvPr id="5" name="Text 2"/>
+          <p:cNvSpPr/>
+          <p:nvPr/>
+        </p:nvSpPr>
+        <p:spPr>
+          <a:xfrm>
+            <a:off x="5349240" y="1783080"/>
+            <a:ext cx="6522415" cy="4663440"/>
+          </a:xfrm>
+          <a:prstGeom prst="rect">
+            <a:avLst/>
+          </a:prstGeom>
+          <a:noFill/>
+          <a:ln/>
+        </p:spPr>
+        <p:txBody>
+          <a:bodyPr wrap="square" lIns="0" tIns="0" rIns="0" bIns="0" rtlCol="0" anchor="ctr"/>
+          <a:lstStyle/>
+          <a:p>
+            <a:pPr algn="ctr" indent="0" marL="0">
+              <a:spcAft>
+                <a:spcPts val="800"/>
+              </a:spcAft>
+              <a:buNone/>
+            </a:pPr>
+            <a:r>
+              <a:rPr lang="en-US" sz="4000" b="1" dirty="0">
+                <a:solidFill>
+                  <a:srgbClr val="111111"/>
+                </a:solidFill>
+                <a:latin typeface="Times New Roman" pitchFamily="34" charset="0"/>
+                <a:ea typeface="Times New Roman" pitchFamily="34" charset="-122"/>
+                <a:cs typeface="Times New Roman" pitchFamily="34" charset="-120"/>
+              </a:rPr>
+              <a:t>Our next lesson will be on:</a:t>
+            </a:r>
+            <a:endParaRPr lang="en-US" sz="4000" dirty="0"/>
+          </a:p>
+          <a:p>
+            <a:pPr algn="ctr" indent="0" marL="0">
+              <a:spcAft>
+                <a:spcPts val="800"/>
+              </a:spcAft>
+              <a:buNone/>
+            </a:pPr>
+            <a:r>
+              <a:rPr lang="en-US" sz="4000" b="1" dirty="0">
+                <a:solidFill>
+                  <a:srgbClr val="990011"/>
+                </a:solidFill>
+                <a:latin typeface="Times New Roman" pitchFamily="34" charset="0"/>
+                <a:ea typeface="Times New Roman" pitchFamily="34" charset="-122"/>
+                <a:cs typeface="Times New Roman" pitchFamily="34" charset="-120"/>
+              </a:rPr>
+              <a:t>Lesson 30: The Atmosphere</a:t>
+            </a:r>
+            <a:endParaRPr lang="en-US" sz="4000" dirty="0"/>
+          </a:p>
+        </p:txBody>
+      </p:sp>
+      <p:sp>
+        <p:nvSpPr>
+          <p:cNvPr id="25" name="Slide Number Placeholder 0"/>
+          <p:cNvSpPr>
+            <a:spLocks noGrp="1"/>
+          </p:cNvSpPr>
+          <p:nvPr>
+            <p:ph type="sldNum" sz="quarter" idx="4294967295"/>
+          </p:nvPr>
+        </p:nvSpPr>
+        <p:spPr>
+          <a:xfrm>
+            <a:off x="27432" y="91440"/>
+            <a:ext cx="585216" cy="475488"/>
+          </a:xfrm>
+          <a:prstGeom prst="rect">
+            <a:avLst/>
+          </a:prstGeom>
+          <a:extLst>
+            <a:ext uri="{C572A759-6A51-4108-AA02-DFA0A04FC94B}">
+              <ma14:wrappingTextBoxFlag xmlns:ma14="http://schemas.microsoft.com/office/mac/drawingml/2011/main" val="0"/>
+            </a:ext>
+          </a:extLst>
+        </p:spPr>
+        <p:txBody>
+          <a:bodyPr/>
+          <a:lstStyle>
+            <a:lvl1pPr>
+              <a:defRPr sz="2000">
+                <a:solidFill>
+                  <a:srgbClr val="FFFFFF"/>
+                </a:solidFill>
+                <a:latin typeface="Calibri"/>
+                <a:ea typeface="Calibri"/>
+                <a:cs typeface="Calibri"/>
+              </a:defRPr>
+            </a:lvl1pPr>
+          </a:lstStyle>
+          <a:p>
+            <a:pPr algn="ctr"/>
+            <a:fld id="{F7021451-1387-4CA6-816F-3879F97B5CBC}" type="slidenum">
+              <a:rPr b="1" lang="en-US"/>
+              <a:t>49</a:t>
+            </a:fld>
+            <a:endParaRPr lang="en-US"/>
+          </a:p>
+        </p:txBody>
+      </p:sp>
+    </p:spTree>
+  </p:cSld>
+  <p:clrMapOvr>
+    <a:masterClrMapping/>
+  </p:clrMapOvr>
+</p:sld>
+</file>
+
+<file path=ppt/slides/slide5.xml><?xml version="1.0" encoding="utf-8"?>
+<p:sld xmlns:a="http://schemas.openxmlformats.org/drawingml/2006/main" xmlns:r="http://schemas.openxmlformats.org/officeDocument/2006/relationships" xmlns:p="http://schemas.openxmlformats.org/presentationml/2006/main">
+  <p:cSld name="Slide 5">
+    <p:spTree>
+      <p:nvGrpSpPr>
+        <p:cNvPr id="1" name=""/>
+        <p:cNvGrpSpPr/>
+        <p:nvPr/>
+      </p:nvGrpSpPr>
+      <p:grpSpPr>
+        <a:xfrm>
+          <a:off x="0" y="0"/>
+          <a:ext cx="0" cy="0"/>
+          <a:chOff x="0" y="0"/>
+          <a:chExt cx="0" cy="0"/>
+        </a:xfrm>
+      </p:grpSpPr>
+      <p:sp>
+        <p:nvSpPr>
+          <p:cNvPr id="2" name="Text 0"/>
+          <p:cNvSpPr/>
+          <p:nvPr/>
+        </p:nvSpPr>
+        <p:spPr>
+          <a:xfrm>
+            <a:off x="457200" y="713232"/>
+            <a:ext cx="11368735" cy="274320"/>
+          </a:xfrm>
+          <a:prstGeom prst="rect">
+            <a:avLst/>
+          </a:prstGeom>
+          <a:noFill/>
+          <a:ln/>
+        </p:spPr>
+        <p:txBody>
+          <a:bodyPr wrap="square" lIns="0" tIns="0" rIns="0" bIns="0" rtlCol="0" anchor="ctr"/>
+          <a:lstStyle/>
+          <a:p>
+            <a:pPr algn="r" indent="0" marL="0">
+              <a:buNone/>
+            </a:pPr>
+            <a:r>
+              <a:rPr lang="en-US" sz="1400" b="1" dirty="0">
+                <a:solidFill>
+                  <a:srgbClr val="1C3F6E"/>
+                </a:solidFill>
+                <a:latin typeface="Calibri" pitchFamily="34" charset="0"/>
+                <a:ea typeface="Calibri" pitchFamily="34" charset="-122"/>
+                <a:cs typeface="Calibri" pitchFamily="34" charset="-120"/>
+              </a:rPr>
+              <a:t>HOMEWORK CORRECTION</a:t>
+            </a:r>
+            <a:endParaRPr lang="en-US" sz="1400" dirty="0"/>
+          </a:p>
+        </p:txBody>
+      </p:sp>
+      <p:pic>
+        <p:nvPicPr>
+          <p:cNvPr id="3" name="Image 0" descr="/home/claude/f4/img/minesec_sheet.png">    </p:cNvPr>
+          <p:cNvPicPr>
+            <a:picLocks noChangeAspect="1"/>
+          </p:cNvPicPr>
+          <p:nvPr/>
+        </p:nvPicPr>
+        <p:blipFill>
+          <a:blip r:embed="rId1"/>
+          <a:stretch>
+            <a:fillRect/>
+          </a:stretch>
+        </p:blipFill>
+        <p:spPr>
+          <a:xfrm>
+            <a:off x="0" y="658368"/>
+            <a:ext cx="5120640" cy="5833872"/>
+          </a:xfrm>
+          <a:prstGeom prst="rect">
+            <a:avLst/>
+          </a:prstGeom>
+        </p:spPr>
+      </p:pic>
+      <p:sp>
+        <p:nvSpPr>
+          <p:cNvPr id="4" name="Text 1"/>
+          <p:cNvSpPr/>
+          <p:nvPr/>
+        </p:nvSpPr>
+        <p:spPr>
+          <a:xfrm>
+            <a:off x="5349240" y="1005840"/>
+            <a:ext cx="6522415" cy="731520"/>
+          </a:xfrm>
+          <a:prstGeom prst="rect">
+            <a:avLst/>
+          </a:prstGeom>
+          <a:noFill/>
+          <a:ln/>
+        </p:spPr>
+        <p:txBody>
+          <a:bodyPr wrap="square" lIns="0" tIns="0" rIns="0" bIns="0" rtlCol="0" anchor="ctr">
+            <a:normAutofit/>
+          </a:bodyPr>
+          <a:lstStyle/>
+          <a:p>
+            <a:pPr algn="ctr" indent="0" marL="0">
+              <a:buNone/>
+            </a:pPr>
+            <a:r>
+              <a:rPr lang="en-US" sz="3600" b="1" dirty="0">
+                <a:solidFill>
+                  <a:srgbClr val="990011"/>
+                </a:solidFill>
+                <a:latin typeface="Times New Roman" pitchFamily="34" charset="0"/>
+                <a:ea typeface="Times New Roman" pitchFamily="34" charset="-122"/>
+                <a:cs typeface="Times New Roman" pitchFamily="34" charset="-120"/>
+              </a:rPr>
+              <a:t>Correction: Possible Answer</a:t>
+            </a:r>
+            <a:endParaRPr lang="en-US" sz="3600" dirty="0"/>
+          </a:p>
+        </p:txBody>
+      </p:sp>
+      <p:sp>
+        <p:nvSpPr>
+          <p:cNvPr id="5" name="Text 2"/>
+          <p:cNvSpPr/>
+          <p:nvPr/>
+        </p:nvSpPr>
+        <p:spPr>
+          <a:xfrm>
+            <a:off x="5349240" y="1783080"/>
+            <a:ext cx="6522415" cy="4663440"/>
+          </a:xfrm>
+          <a:prstGeom prst="rect">
+            <a:avLst/>
+          </a:prstGeom>
+          <a:noFill/>
+          <a:ln/>
+        </p:spPr>
+        <p:txBody>
+          <a:bodyPr wrap="square" lIns="0" tIns="0" rIns="0" bIns="0" rtlCol="0" anchor="t"/>
+          <a:lstStyle/>
+          <a:p>
+            <a:pPr algn="l" indent="0" marL="0">
+              <a:spcAft>
+                <a:spcPts val="800"/>
+              </a:spcAft>
+              <a:buNone/>
+            </a:pPr>
+            <a:r>
+              <a:rPr lang="en-US" sz="4000" dirty="0">
+                <a:solidFill>
+                  <a:srgbClr val="111111"/>
+                </a:solidFill>
+                <a:latin typeface="Times New Roman" pitchFamily="34" charset="0"/>
+                <a:ea typeface="Times New Roman" pitchFamily="34" charset="-122"/>
+                <a:cs typeface="Times New Roman" pitchFamily="34" charset="-120"/>
+              </a:rPr>
+              <a:t>Examples: people drink more water and store water in jars; they wear long clothes and head scarves against dust; they rest in the shade at midday; they build houses with thick mud walls.</a:t>
+            </a:r>
+            <a:endParaRPr lang="en-US" sz="4000" dirty="0"/>
+          </a:p>
+        </p:txBody>
+      </p:sp>
+      <p:sp>
+        <p:nvSpPr>
+          <p:cNvPr id="25" name="Slide Number Placeholder 0"/>
+          <p:cNvSpPr>
+            <a:spLocks noGrp="1"/>
+          </p:cNvSpPr>
+          <p:nvPr>
+            <p:ph type="sldNum" sz="quarter" idx="4294967295"/>
+          </p:nvPr>
+        </p:nvSpPr>
+        <p:spPr>
+          <a:xfrm>
+            <a:off x="27432" y="91440"/>
+            <a:ext cx="585216" cy="475488"/>
+          </a:xfrm>
+          <a:prstGeom prst="rect">
+            <a:avLst/>
+          </a:prstGeom>
+          <a:extLst>
+            <a:ext uri="{C572A759-6A51-4108-AA02-DFA0A04FC94B}">
+              <ma14:wrappingTextBoxFlag xmlns:ma14="http://schemas.microsoft.com/office/mac/drawingml/2011/main" val="0"/>
+            </a:ext>
+          </a:extLst>
+        </p:spPr>
+        <p:txBody>
+          <a:bodyPr/>
+          <a:lstStyle>
+            <a:lvl1pPr>
+              <a:defRPr sz="2000">
+                <a:solidFill>
+                  <a:srgbClr val="FFFFFF"/>
+                </a:solidFill>
+                <a:latin typeface="Calibri"/>
+                <a:ea typeface="Calibri"/>
+                <a:cs typeface="Calibri"/>
+              </a:defRPr>
+            </a:lvl1pPr>
+          </a:lstStyle>
+          <a:p>
+            <a:pPr algn="ctr"/>
+            <a:fld id="{F7021451-1387-4CA6-816F-3879F97B5CBC}" type="slidenum">
+              <a:rPr b="1" lang="en-US"/>
+              <a:t>5</a:t>
+            </a:fld>
+            <a:endParaRPr lang="en-US"/>
+          </a:p>
+        </p:txBody>
+      </p:sp>
+    </p:spTree>
+  </p:cSld>
+  <p:clrMapOvr>
+    <a:masterClrMapping/>
+  </p:clrMapOvr>
+</p:sld>
+</file>
+
+<file path=ppt/slides/slide50.xml><?xml version="1.0" encoding="utf-8"?>
+<p:sld xmlns:a="http://schemas.openxmlformats.org/drawingml/2006/main" xmlns:r="http://schemas.openxmlformats.org/officeDocument/2006/relationships" xmlns:p="http://schemas.openxmlformats.org/presentationml/2006/main">
+  <p:cSld name="Slide 50">
+    <p:spTree>
+      <p:nvGrpSpPr>
+        <p:cNvPr id="1" name=""/>
+        <p:cNvGrpSpPr/>
+        <p:nvPr/>
+      </p:nvGrpSpPr>
+      <p:grpSpPr>
+        <a:xfrm>
+          <a:off x="0" y="0"/>
+          <a:ext cx="0" cy="0"/>
+          <a:chOff x="0" y="0"/>
+          <a:chExt cx="0" cy="0"/>
+        </a:xfrm>
+      </p:grpSpPr>
+      <p:sp>
+        <p:nvSpPr>
+          <p:cNvPr id="2" name="Text 0"/>
+          <p:cNvSpPr/>
+          <p:nvPr/>
+        </p:nvSpPr>
+        <p:spPr>
+          <a:xfrm>
+            <a:off x="457200" y="713232"/>
+            <a:ext cx="11368735" cy="274320"/>
+          </a:xfrm>
+          <a:prstGeom prst="rect">
+            <a:avLst/>
+          </a:prstGeom>
+          <a:noFill/>
+          <a:ln/>
+        </p:spPr>
+        <p:txBody>
+          <a:bodyPr wrap="square" lIns="0" tIns="0" rIns="0" bIns="0" rtlCol="0" anchor="ctr"/>
+          <a:lstStyle/>
+          <a:p>
+            <a:pPr algn="r" indent="0" marL="0">
+              <a:buNone/>
+            </a:pPr>
+            <a:r>
+              <a:rPr lang="en-US" sz="1400" b="1" dirty="0">
+                <a:solidFill>
+                  <a:srgbClr val="1C3F6E"/>
+                </a:solidFill>
+                <a:latin typeface="Calibri" pitchFamily="34" charset="0"/>
+                <a:ea typeface="Calibri" pitchFamily="34" charset="-122"/>
+                <a:cs typeface="Calibri" pitchFamily="34" charset="-120"/>
+              </a:rPr>
               <a:t>BILINGUAL GAME</a:t>
             </a:r>
             <a:endParaRPr lang="en-US" sz="1400" dirty="0"/>
@@ -15257,7 +18405,7 @@
       </p:sp>
       <p:graphicFrame>
         <p:nvGraphicFramePr>
-          <p:cNvPr id="43" name="Table 0"/>
+          <p:cNvPr id="51" name="Table 0"/>
           <p:cNvGraphicFramePr>
             <a:graphicFrameLocks noGrp="1"/>
           </p:cNvGraphicFramePr>
@@ -16569,7 +19717,7 @@
             <a:pPr algn="ctr"/>
             <a:fld id="{F7021451-1387-4CA6-816F-3879F97B5CBC}" type="slidenum">
               <a:rPr b="1" lang="en-US"/>
-              <a:t>42</a:t>
+              <a:t>50</a:t>
             </a:fld>
             <a:endParaRPr lang="en-US"/>
           </a:p>
@@ -16583,9 +19731,9 @@
 </p:sld>
 </file>
 
-<file path=ppt/slides/slide43.xml><?xml version="1.0" encoding="utf-8"?>
+<file path=ppt/slides/slide51.xml><?xml version="1.0" encoding="utf-8"?>
 <p:sld xmlns:a="http://schemas.openxmlformats.org/drawingml/2006/main" xmlns:r="http://schemas.openxmlformats.org/officeDocument/2006/relationships" xmlns:p="http://schemas.openxmlformats.org/presentationml/2006/main">
-  <p:cSld name="Slide 43">
+  <p:cSld name="Slide 51">
     <p:spTree>
       <p:nvGrpSpPr>
         <p:cNvPr id="1" name=""/>
@@ -16680,7 +19828,7 @@
       </p:sp>
       <p:graphicFrame>
         <p:nvGraphicFramePr>
-          <p:cNvPr id="44" name="Table 0"/>
+          <p:cNvPr id="52" name="Table 0"/>
           <p:cNvGraphicFramePr>
             <a:graphicFrameLocks noGrp="1"/>
           </p:cNvGraphicFramePr>
@@ -17302,7 +20450,7 @@
             <a:pPr algn="ctr"/>
             <a:fld id="{F7021451-1387-4CA6-816F-3879F97B5CBC}" type="slidenum">
               <a:rPr b="1" lang="en-US"/>
-              <a:t>43</a:t>
+              <a:t>51</a:t>
             </a:fld>
             <a:endParaRPr lang="en-US"/>
           </a:p>
@@ -17316,9 +20464,9 @@
 </p:sld>
 </file>
 
-<file path=ppt/slides/slide44.xml><?xml version="1.0" encoding="utf-8"?>
+<file path=ppt/slides/slide52.xml><?xml version="1.0" encoding="utf-8"?>
 <p:sld xmlns:a="http://schemas.openxmlformats.org/drawingml/2006/main" xmlns:r="http://schemas.openxmlformats.org/officeDocument/2006/relationships" xmlns:p="http://schemas.openxmlformats.org/presentationml/2006/main">
-  <p:cSld name="Slide 44">
+  <p:cSld name="Slide 52">
     <p:spTree>
       <p:nvGrpSpPr>
         <p:cNvPr id="1" name=""/>
@@ -17413,7 +20561,7 @@
       </p:sp>
       <p:graphicFrame>
         <p:nvGraphicFramePr>
-          <p:cNvPr id="45" name="Table 0"/>
+          <p:cNvPr id="53" name="Table 0"/>
           <p:cNvGraphicFramePr>
             <a:graphicFrameLocks noGrp="1"/>
           </p:cNvGraphicFramePr>
@@ -17523,7 +20671,7 @@
                           <a:ea typeface="Calibri" pitchFamily="34" charset="-122"/>
                           <a:cs typeface="Calibri" pitchFamily="34" charset="-120"/>
                         </a:rPr>
-                        <a:t>Resources of Hot Deserts; Challenges of Hot Deserts; Human Adaptations.</a:t>
+                        <a:t>DEFINITIONS; Resources of Hot Deserts; Challenges of Hot Deserts; Human Adaptations.</a:t>
                       </a:r>
                       <a:endParaRPr lang="en-US" sz="1600" dirty="0">
                         <a:latin typeface="Calibri" charset="0"/>
@@ -18173,7 +21321,7 @@
             <a:pPr algn="ctr"/>
             <a:fld id="{F7021451-1387-4CA6-816F-3879F97B5CBC}" type="slidenum">
               <a:rPr b="1" lang="en-US"/>
-              <a:t>44</a:t>
+              <a:t>52</a:t>
             </a:fld>
             <a:endParaRPr lang="en-US"/>
           </a:p>
@@ -18187,9 +21335,9 @@
 </p:sld>
 </file>
 
-<file path=ppt/slides/slide45.xml><?xml version="1.0" encoding="utf-8"?>
+<file path=ppt/slides/slide53.xml><?xml version="1.0" encoding="utf-8"?>
 <p:sld xmlns:a="http://schemas.openxmlformats.org/drawingml/2006/main" xmlns:r="http://schemas.openxmlformats.org/officeDocument/2006/relationships" xmlns:p="http://schemas.openxmlformats.org/presentationml/2006/main">
-  <p:cSld name="Slide 45">
+  <p:cSld name="Slide 53">
     <p:spTree>
       <p:nvGrpSpPr>
         <p:cNvPr id="1" name=""/>
@@ -18366,7 +21514,7 @@
                 <a:ea typeface="Calibri" pitchFamily="34" charset="-122"/>
                 <a:cs typeface="Calibri" pitchFamily="34" charset="-120"/>
               </a:rPr>
-              <a:t>Without the projector (Activity 1): ask learners who uses a solar panel at home.</a:t>
+              <a:t>Without the projector (Activity 1): ask about solar panels in Garoua.</a:t>
             </a:r>
             <a:endParaRPr lang="en-US" sz="2000" dirty="0"/>
           </a:p>
@@ -18387,7 +21535,7 @@
                 <a:ea typeface="Calibri" pitchFamily="34" charset="-122"/>
                 <a:cs typeface="Calibri" pitchFamily="34" charset="-120"/>
               </a:rPr>
-              <a:t>Without the projector (Activity 2): use the situation of Mrs Bouba.</a:t>
+              <a:t>Without the projector (Activity 2): ask learners how far they walk for water in the dry season.</a:t>
             </a:r>
             <a:endParaRPr lang="en-US" sz="2000" dirty="0"/>
           </a:p>
@@ -18408,7 +21556,7 @@
                 <a:ea typeface="Calibri" pitchFamily="34" charset="-122"/>
                 <a:cs typeface="Calibri" pitchFamily="34" charset="-120"/>
               </a:rPr>
-              <a:t>Without the projector (Activity 3): mention the Great Green Wall and Opération Sahel Vert.</a:t>
+              <a:t>Without the projector (Activity 3): describe the clothes of herders in the North.</a:t>
             </a:r>
             <a:endParaRPr lang="en-US" sz="2000" dirty="0"/>
           </a:p>
@@ -18456,7 +21604,7 @@
             <a:pPr algn="ctr"/>
             <a:fld id="{F7021451-1387-4CA6-816F-3879F97B5CBC}" type="slidenum">
               <a:rPr b="1" lang="en-US"/>
-              <a:t>45</a:t>
+              <a:t>53</a:t>
             </a:fld>
             <a:endParaRPr lang="en-US"/>
           </a:p>
@@ -18470,9 +21618,9 @@
 </p:sld>
 </file>
 
-<file path=ppt/slides/slide46.xml><?xml version="1.0" encoding="utf-8"?>
+<file path=ppt/slides/slide54.xml><?xml version="1.0" encoding="utf-8"?>
 <p:sld xmlns:a="http://schemas.openxmlformats.org/drawingml/2006/main" xmlns:r="http://schemas.openxmlformats.org/officeDocument/2006/relationships" xmlns:p="http://schemas.openxmlformats.org/presentationml/2006/main">
-  <p:cSld name="Slide 46">
+  <p:cSld name="Slide 54">
     <p:spTree>
       <p:nvGrpSpPr>
         <p:cNvPr id="1" name=""/>
@@ -18543,7 +21691,7 @@
         <p:spPr>
           <a:xfrm>
             <a:off x="0" y="658368"/>
-            <a:ext cx="2468880" cy="5833872"/>
+            <a:ext cx="1463040" cy="5833872"/>
           </a:xfrm>
           <a:prstGeom prst="rect">
             <a:avLst/>
@@ -18558,8 +21706,8 @@
         </p:nvSpPr>
         <p:spPr>
           <a:xfrm>
-            <a:off x="2697480" y="1005840"/>
-            <a:ext cx="9174175" cy="731520"/>
+            <a:off x="1691640" y="1005840"/>
+            <a:ext cx="10180015" cy="731520"/>
           </a:xfrm>
           <a:prstGeom prst="rect">
             <a:avLst/>
@@ -18599,8 +21747,8 @@
         </p:nvSpPr>
         <p:spPr>
           <a:xfrm>
-            <a:off x="2697480" y="1783080"/>
-            <a:ext cx="9174175" cy="4663440"/>
+            <a:off x="1691640" y="1783080"/>
+            <a:ext cx="10180015" cy="4663440"/>
           </a:xfrm>
           <a:prstGeom prst="rect">
             <a:avLst/>
@@ -18754,7 +21902,7 @@
                 <a:ea typeface="Calibri" pitchFamily="34" charset="-122"/>
                 <a:cs typeface="Calibri" pitchFamily="34" charset="-120"/>
               </a:rPr>
-              <a:t>Photo, Activity 3: “Nyando Climate Smart Villages Media Visit” by CGIAR Climate, CC BY-NC-SA 2.0, via Flickr (https://www.flickr.com/photos/55227776@N04/9720026817)</a:t>
+              <a:t>Photo, Activity 3: “my neighbor” by Emilia Tjernström [Arriving at the horizon], CC BY-NC-SA 2.0, via Flickr (https://www.flickr.com/photos/60614633@N00/502315074)</a:t>
             </a:r>
             <a:endParaRPr lang="en-US" sz="1800" dirty="0"/>
           </a:p>
@@ -18775,7 +21923,7 @@
                 <a:ea typeface="Calibri" pitchFamily="34" charset="-122"/>
                 <a:cs typeface="Calibri" pitchFamily="34" charset="-120"/>
               </a:rPr>
-              <a:t>Diagrams and animations: drawn for this lesson (Geography Department).</a:t>
+              <a:t>Photo, board summary (Sandstorms): “Sandstorm at Camp Bastion, Afghanistan” by Defence Images, CC BY-NC 2.0, via Flickr (https://www.flickr.com/photos/48399297@N04/10343833885)</a:t>
             </a:r>
             <a:endParaRPr lang="en-US" sz="1800" dirty="0"/>
           </a:p>
@@ -18823,7 +21971,7 @@
             <a:pPr algn="ctr"/>
             <a:fld id="{F7021451-1387-4CA6-816F-3879F97B5CBC}" type="slidenum">
               <a:rPr b="1" lang="en-US"/>
-              <a:t>46</a:t>
+              <a:t>54</a:t>
             </a:fld>
             <a:endParaRPr lang="en-US"/>
           </a:p>
@@ -18837,9 +21985,9 @@
 </p:sld>
 </file>
 
-<file path=ppt/slides/slide5.xml><?xml version="1.0" encoding="utf-8"?>
+<file path=ppt/slides/slide55.xml><?xml version="1.0" encoding="utf-8"?>
 <p:sld xmlns:a="http://schemas.openxmlformats.org/drawingml/2006/main" xmlns:r="http://schemas.openxmlformats.org/officeDocument/2006/relationships" xmlns:p="http://schemas.openxmlformats.org/presentationml/2006/main">
-  <p:cSld name="Slide 5">
+  <p:cSld name="Slide 55">
     <p:spTree>
       <p:nvGrpSpPr>
         <p:cNvPr id="1" name=""/>
@@ -18887,7 +22035,7 @@
                 <a:ea typeface="Calibri" pitchFamily="34" charset="-122"/>
                 <a:cs typeface="Calibri" pitchFamily="34" charset="-120"/>
               </a:rPr>
-              <a:t>HOMEWORK CORRECTION</a:t>
+              <a:t>REFERENCES</a:t>
             </a:r>
             <a:endParaRPr lang="en-US" sz="1400" dirty="0"/>
           </a:p>
@@ -18952,7 +22100,7 @@
                 <a:ea typeface="Times New Roman" pitchFamily="34" charset="-122"/>
                 <a:cs typeface="Times New Roman" pitchFamily="34" charset="-120"/>
               </a:rPr>
-              <a:t>Correction: Possible Answer</a:t>
+              <a:t>References (continued)</a:t>
             </a:r>
             <a:endParaRPr lang="en-US" sz="3600" dirty="0"/>
           </a:p>
@@ -18979,24 +22127,25 @@
           <a:bodyPr wrap="square" lIns="0" tIns="0" rIns="0" bIns="0" rtlCol="0" anchor="t"/>
           <a:lstStyle/>
           <a:p>
-            <a:pPr algn="l" indent="0" marL="0">
+            <a:pPr algn="l" marL="342900" indent="-342900">
               <a:spcAft>
                 <a:spcPts val="800"/>
               </a:spcAft>
-              <a:buNone/>
+              <a:buSzPct val="100000"/>
+              <a:buChar char="•"/>
             </a:pPr>
             <a:r>
-              <a:rPr lang="en-US" sz="4000" dirty="0">
+              <a:rPr lang="en-US" sz="1800" dirty="0">
                 <a:solidFill>
                   <a:srgbClr val="111111"/>
                 </a:solidFill>
-                <a:latin typeface="Times New Roman" pitchFamily="34" charset="0"/>
-                <a:ea typeface="Times New Roman" pitchFamily="34" charset="-122"/>
-                <a:cs typeface="Times New Roman" pitchFamily="34" charset="-120"/>
+                <a:latin typeface="Calibri" pitchFamily="34" charset="0"/>
+                <a:ea typeface="Calibri" pitchFamily="34" charset="-122"/>
+                <a:cs typeface="Calibri" pitchFamily="34" charset="-120"/>
               </a:rPr>
-              <a:t>Examples: people drink more water and store water in jars; they wear long clothes and head scarves against dust; they rest in the shade at midday; they build houses with thick mud walls.</a:t>
-            </a:r>
-            <a:endParaRPr lang="en-US" sz="4000" dirty="0"/>
+              <a:t>Diagrams and animations: drawn for this lesson (Geography Department).</a:t>
+            </a:r>
+            <a:endParaRPr lang="en-US" sz="1800" dirty="0"/>
           </a:p>
         </p:txBody>
       </p:sp>
@@ -19042,7 +22191,7 @@
             <a:pPr algn="ctr"/>
             <a:fld id="{F7021451-1387-4CA6-816F-3879F97B5CBC}" type="slidenum">
               <a:rPr b="1" lang="en-US"/>
-              <a:t>5</a:t>
+              <a:t>55</a:t>
             </a:fld>
             <a:endParaRPr lang="en-US"/>
           </a:p>

--- a/lecons/F3/33_FORM4_LESSON29_Man_in_Hot_Desert.pptx
+++ b/lecons/F3/33_FORM4_LESSON29_Man_in_Hot_Desert.pptx
@@ -3460,7 +3460,7 @@
           <a:p>
             <a:r>
               <a:rPr lang="en-US" dirty="0"/>
-              <a:t>Before we start the new lesson, let us correct the homework I gave you at the end of Lesson 28: Depositional Features of Wind Action. The question was: Ask an elder in your family how people in your area cope with the heat, the dust and the shortage of water during the dry season. Write down two ways. Take out your exercise books.</a:t>
+              <a:t>Before we start the new lesson, let us correct the homework I gave you at the end of Lesson 28: Depositional Features of Wind Action. The question was: Give two resources of hot deserts. Take out your exercise books.</a:t>
             </a:r>
             <a:endParaRPr lang="en-US" dirty="0"/>
           </a:p>
@@ -4252,7 +4252,7 @@
           <a:p>
             <a:r>
               <a:rPr lang="en-US" dirty="0"/>
-              <a:t>For your homework: Make a table with three columns: resources, hazards and adaptations. Fill it with examples from the hot deserts and from the dry season in Garoua. We shall correct it at the beginning of our next lesson.</a:t>
+              <a:t>For your homework: Name the four main layers of the atmosphere. We shall correct it at the beginning of our next lesson.</a:t>
             </a:r>
             <a:endParaRPr lang="en-US" dirty="0"/>
           </a:p>
@@ -4428,7 +4428,7 @@
           <a:p>
             <a:r>
               <a:rPr lang="en-US" dirty="0"/>
-              <a:t>Here is a good answer. Examples: people drink more water and store water in jars; they wear long clothes and head scarves against dust; they rest in the shade at midday; they build houses with thick mud walls. Compare it with your own answer and correct your work in red.</a:t>
+              <a:t>Here is a good answer. Oil and solar energy (also oases and minerals). Compare it with your own answer and correct your work in red.</a:t>
             </a:r>
             <a:endParaRPr lang="en-US" dirty="0"/>
           </a:p>
@@ -15463,7 +15463,7 @@
         <p:spPr>
           <a:xfrm>
             <a:off x="0" y="658368"/>
-            <a:ext cx="3840480" cy="5833872"/>
+            <a:ext cx="5120640" cy="5833872"/>
           </a:xfrm>
           <a:prstGeom prst="rect">
             <a:avLst/>
@@ -15478,8 +15478,8 @@
         </p:nvSpPr>
         <p:spPr>
           <a:xfrm>
-            <a:off x="4069080" y="1005840"/>
-            <a:ext cx="7802575" cy="731520"/>
+            <a:off x="5349240" y="1005840"/>
+            <a:ext cx="6522415" cy="731520"/>
           </a:xfrm>
           <a:prstGeom prst="rect">
             <a:avLst/>
@@ -15519,8 +15519,8 @@
         </p:nvSpPr>
         <p:spPr>
           <a:xfrm>
-            <a:off x="4069080" y="1783080"/>
-            <a:ext cx="7802575" cy="4663440"/>
+            <a:off x="5349240" y="1783080"/>
+            <a:ext cx="6522415" cy="4663440"/>
           </a:xfrm>
           <a:prstGeom prst="rect">
             <a:avLst/>
@@ -15567,7 +15567,7 @@
                 <a:ea typeface="Times New Roman" pitchFamily="34" charset="-122"/>
                 <a:cs typeface="Times New Roman" pitchFamily="34" charset="-120"/>
               </a:rPr>
-              <a:t>Ask an elder in your family how people in your area cope with the heat, the dust and the shortage of water during the dry season. Write down two ways.</a:t>
+              <a:t>Give two resources of hot deserts.</a:t>
             </a:r>
             <a:endParaRPr lang="en-US" sz="4000" dirty="0"/>
           </a:p>
@@ -17788,7 +17788,7 @@
                 <a:ea typeface="Times New Roman" pitchFamily="34" charset="-122"/>
                 <a:cs typeface="Times New Roman" pitchFamily="34" charset="-120"/>
               </a:rPr>
-              <a:t>Make a table with three columns: resources, hazards and adaptations. Fill it with examples from the hot deserts and from the dry season in Garoua.</a:t>
+              <a:t>Name the four main layers of the atmosphere.</a:t>
             </a:r>
             <a:endParaRPr lang="en-US" sz="4000" dirty="0"/>
           </a:p>
@@ -18246,7 +18246,7 @@
                 <a:ea typeface="Times New Roman" pitchFamily="34" charset="-122"/>
                 <a:cs typeface="Times New Roman" pitchFamily="34" charset="-120"/>
               </a:rPr>
-              <a:t>Examples: people drink more water and store water in jars; they wear long clothes and head scarves against dust; they rest in the shade at midday; they build houses with thick mud walls.</a:t>
+              <a:t>Oil and solar energy (also oases and minerals).</a:t>
             </a:r>
             <a:endParaRPr lang="en-US" sz="4000" dirty="0"/>
           </a:p>
@@ -20947,7 +20947,7 @@
                           <a:ea typeface="Calibri" pitchFamily="34" charset="-122"/>
                           <a:cs typeface="Calibri" pitchFamily="34" charset="-120"/>
                         </a:rPr>
-                        <a:t>Make a table with three columns: resources, hazards and adaptations. Fill it with examples from the hot deserts and from the dry season in Garoua.</a:t>
+                        <a:t>Name the four main layers of the atmosphere.</a:t>
                       </a:r>
                       <a:endParaRPr lang="en-US" sz="1600" dirty="0">
                         <a:latin typeface="Calibri" charset="0"/>

--- a/lecons/F3/33_FORM4_LESSON29_Man_in_Hot_Desert.pptx
+++ b/lecons/F3/33_FORM4_LESSON29_Man_in_Hot_Desert.pptx
@@ -7031,7 +7031,7 @@
                 <a:ea typeface="Times New Roman" pitchFamily="34" charset="-122"/>
                 <a:cs typeface="Times New Roman" pitchFamily="34" charset="-120"/>
               </a:rPr>
-              <a:t>"</a:t>
+              <a:t>Her son asks: "How can people live, and even become rich, in such dry places?"</a:t>
             </a:r>
             <a:endParaRPr lang="en-US" sz="4000" dirty="0"/>
           </a:p>
